--- a/figures/setup.pptx
+++ b/figures/setup.pptx
@@ -4,10 +4,13 @@
   <p:sldMasterIdLst>
     <p:sldMasterId id="2147483648" r:id="rId1"/>
   </p:sldMasterIdLst>
+  <p:notesMasterIdLst>
+    <p:notesMasterId r:id="rId3"/>
+  </p:notesMasterIdLst>
   <p:sldIdLst>
     <p:sldId id="256" r:id="rId2"/>
   </p:sldIdLst>
-  <p:sldSz cx="2687638" cy="7543800"/>
+  <p:sldSz cx="3886200" cy="7543800"/>
   <p:notesSz cx="6858000" cy="9144000"/>
   <p:defaultTextStyle>
     <a:defPPr>
@@ -112,7 +115,7 @@
             <a:srgbClr val="A4A3A4"/>
           </p15:clr>
         </p15:guide>
-        <p15:guide id="2" pos="2875" userDrawn="1">
+        <p15:guide id="2" pos="4158" userDrawn="1">
           <p15:clr>
             <a:srgbClr val="A4A3A4"/>
           </p15:clr>
@@ -126,7 +129,7 @@
 <file path=ppt/revisionInfo.xml><?xml version="1.0" encoding="utf-8"?>
 <p1510:revInfo xmlns:a="http://schemas.openxmlformats.org/drawingml/2006/main" xmlns:r="http://schemas.openxmlformats.org/officeDocument/2006/relationships" xmlns:p1510="http://schemas.microsoft.com/office/powerpoint/2015/10/main">
   <p1510:revLst>
-    <p1510:client id="{52030414-14B2-4CCC-B4C7-9058F7E501E5}" v="28" dt="2026-07-04T04:09:09.815"/>
+    <p1510:client id="{52030414-14B2-4CCC-B4C7-9058F7E501E5}" v="47" dt="2026-07-08T03:49:37.888"/>
   </p1510:revLst>
 </p1510:revInfo>
 </file>
@@ -136,18 +139,18 @@
   <pc:docChgLst>
     <pc:chgData name="Ivan V Pechenezhskiy" userId="05151ae6-aff0-4c3b-afef-5d8361ad9277" providerId="ADAL" clId="{497C8B30-E653-41E3-BCDE-D087AF3F3AA5}"/>
     <pc:docChg chg="undo redo custSel delSld modSld modMainMaster">
-      <pc:chgData name="Ivan V Pechenezhskiy" userId="05151ae6-aff0-4c3b-afef-5d8361ad9277" providerId="ADAL" clId="{497C8B30-E653-41E3-BCDE-D087AF3F3AA5}" dt="2026-07-04T04:10:02.627" v="1067" actId="1036"/>
+      <pc:chgData name="Ivan V Pechenezhskiy" userId="05151ae6-aff0-4c3b-afef-5d8361ad9277" providerId="ADAL" clId="{497C8B30-E653-41E3-BCDE-D087AF3F3AA5}" dt="2026-07-08T03:53:09.635" v="1331" actId="1035"/>
       <pc:docMkLst>
         <pc:docMk/>
       </pc:docMkLst>
       <pc:sldChg chg="addSp delSp modSp mod">
-        <pc:chgData name="Ivan V Pechenezhskiy" userId="05151ae6-aff0-4c3b-afef-5d8361ad9277" providerId="ADAL" clId="{497C8B30-E653-41E3-BCDE-D087AF3F3AA5}" dt="2026-07-04T04:10:02.627" v="1067" actId="1036"/>
+        <pc:chgData name="Ivan V Pechenezhskiy" userId="05151ae6-aff0-4c3b-afef-5d8361ad9277" providerId="ADAL" clId="{497C8B30-E653-41E3-BCDE-D087AF3F3AA5}" dt="2026-07-08T03:53:09.635" v="1331" actId="1035"/>
         <pc:sldMkLst>
           <pc:docMk/>
           <pc:sldMk cId="0" sldId="256"/>
         </pc:sldMkLst>
         <pc:spChg chg="mod">
-          <ac:chgData name="Ivan V Pechenezhskiy" userId="05151ae6-aff0-4c3b-afef-5d8361ad9277" providerId="ADAL" clId="{497C8B30-E653-41E3-BCDE-D087AF3F3AA5}" dt="2026-07-04T04:06:56.985" v="1025" actId="14100"/>
+          <ac:chgData name="Ivan V Pechenezhskiy" userId="05151ae6-aff0-4c3b-afef-5d8361ad9277" providerId="ADAL" clId="{497C8B30-E653-41E3-BCDE-D087AF3F3AA5}" dt="2026-07-08T03:46:43.544" v="1123" actId="1038"/>
           <ac:spMkLst>
             <pc:docMk/>
             <pc:sldMk cId="0" sldId="256"/>
@@ -155,7 +158,7 @@
           </ac:spMkLst>
         </pc:spChg>
         <pc:spChg chg="mod">
-          <ac:chgData name="Ivan V Pechenezhskiy" userId="05151ae6-aff0-4c3b-afef-5d8361ad9277" providerId="ADAL" clId="{497C8B30-E653-41E3-BCDE-D087AF3F3AA5}" dt="2026-07-04T04:06:42.263" v="1008" actId="14100"/>
+          <ac:chgData name="Ivan V Pechenezhskiy" userId="05151ae6-aff0-4c3b-afef-5d8361ad9277" providerId="ADAL" clId="{497C8B30-E653-41E3-BCDE-D087AF3F3AA5}" dt="2026-07-08T03:49:12.654" v="1196" actId="1076"/>
           <ac:spMkLst>
             <pc:docMk/>
             <pc:sldMk cId="0" sldId="256"/>
@@ -170,24 +173,56 @@
             <ac:spMk id="4" creationId="{00000000-0000-0000-0000-000000000000}"/>
           </ac:spMkLst>
         </pc:spChg>
-        <pc:spChg chg="del mod">
-          <ac:chgData name="Ivan V Pechenezhskiy" userId="05151ae6-aff0-4c3b-afef-5d8361ad9277" providerId="ADAL" clId="{497C8B30-E653-41E3-BCDE-D087AF3F3AA5}" dt="2026-07-03T05:08:20.450" v="536" actId="478"/>
+        <pc:spChg chg="add mod">
+          <ac:chgData name="Ivan V Pechenezhskiy" userId="05151ae6-aff0-4c3b-afef-5d8361ad9277" providerId="ADAL" clId="{497C8B30-E653-41E3-BCDE-D087AF3F3AA5}" dt="2026-07-08T03:50:41.602" v="1304" actId="1038"/>
           <ac:spMkLst>
             <pc:docMk/>
             <pc:sldMk cId="0" sldId="256"/>
-            <ac:spMk id="5" creationId="{00000000-0000-0000-0000-000000000000}"/>
+            <ac:spMk id="5" creationId="{861B304F-CDFB-F0E7-2356-7002C1F7EFCF}"/>
           </ac:spMkLst>
         </pc:spChg>
-        <pc:spChg chg="del mod">
-          <ac:chgData name="Ivan V Pechenezhskiy" userId="05151ae6-aff0-4c3b-afef-5d8361ad9277" providerId="ADAL" clId="{497C8B30-E653-41E3-BCDE-D087AF3F3AA5}" dt="2026-07-03T05:08:19.439" v="535" actId="478"/>
+        <pc:spChg chg="add mod">
+          <ac:chgData name="Ivan V Pechenezhskiy" userId="05151ae6-aff0-4c3b-afef-5d8361ad9277" providerId="ADAL" clId="{497C8B30-E653-41E3-BCDE-D087AF3F3AA5}" dt="2026-07-08T03:50:41.602" v="1304" actId="1038"/>
           <ac:spMkLst>
             <pc:docMk/>
             <pc:sldMk cId="0" sldId="256"/>
-            <ac:spMk id="6" creationId="{00000000-0000-0000-0000-000000000000}"/>
+            <ac:spMk id="6" creationId="{66E15EAB-571C-126F-B82F-AC7FEC60EA58}"/>
+          </ac:spMkLst>
+        </pc:spChg>
+        <pc:spChg chg="add mod">
+          <ac:chgData name="Ivan V Pechenezhskiy" userId="05151ae6-aff0-4c3b-afef-5d8361ad9277" providerId="ADAL" clId="{497C8B30-E653-41E3-BCDE-D087AF3F3AA5}" dt="2026-07-08T03:50:41.602" v="1304" actId="1038"/>
+          <ac:spMkLst>
+            <pc:docMk/>
+            <pc:sldMk cId="0" sldId="256"/>
+            <ac:spMk id="9" creationId="{D476E1E8-7006-54A9-0E63-5419CD305215}"/>
+          </ac:spMkLst>
+        </pc:spChg>
+        <pc:spChg chg="add mod">
+          <ac:chgData name="Ivan V Pechenezhskiy" userId="05151ae6-aff0-4c3b-afef-5d8361ad9277" providerId="ADAL" clId="{497C8B30-E653-41E3-BCDE-D087AF3F3AA5}" dt="2026-07-08T03:53:09.635" v="1331" actId="1035"/>
+          <ac:spMkLst>
+            <pc:docMk/>
+            <pc:sldMk cId="0" sldId="256"/>
+            <ac:spMk id="12" creationId="{29C73919-C3A8-DF81-4156-24C90EA34F46}"/>
+          </ac:spMkLst>
+        </pc:spChg>
+        <pc:spChg chg="add mod">
+          <ac:chgData name="Ivan V Pechenezhskiy" userId="05151ae6-aff0-4c3b-afef-5d8361ad9277" providerId="ADAL" clId="{497C8B30-E653-41E3-BCDE-D087AF3F3AA5}" dt="2026-07-08T03:53:06.241" v="1322" actId="1035"/>
+          <ac:spMkLst>
+            <pc:docMk/>
+            <pc:sldMk cId="0" sldId="256"/>
+            <ac:spMk id="13" creationId="{459E6D6A-A2CD-8561-1D60-555FEE11509D}"/>
+          </ac:spMkLst>
+        </pc:spChg>
+        <pc:spChg chg="add mod">
+          <ac:chgData name="Ivan V Pechenezhskiy" userId="05151ae6-aff0-4c3b-afef-5d8361ad9277" providerId="ADAL" clId="{497C8B30-E653-41E3-BCDE-D087AF3F3AA5}" dt="2026-07-08T03:53:01.016" v="1310" actId="1035"/>
+          <ac:spMkLst>
+            <pc:docMk/>
+            <pc:sldMk cId="0" sldId="256"/>
+            <ac:spMk id="14" creationId="{B742671C-DFED-3098-26DA-76095DFA27FC}"/>
           </ac:spMkLst>
         </pc:spChg>
         <pc:spChg chg="mod">
-          <ac:chgData name="Ivan V Pechenezhskiy" userId="05151ae6-aff0-4c3b-afef-5d8361ad9277" providerId="ADAL" clId="{497C8B30-E653-41E3-BCDE-D087AF3F3AA5}" dt="2026-07-03T05:19:58.640" v="794" actId="1035"/>
+          <ac:chgData name="Ivan V Pechenezhskiy" userId="05151ae6-aff0-4c3b-afef-5d8361ad9277" providerId="ADAL" clId="{497C8B30-E653-41E3-BCDE-D087AF3F3AA5}" dt="2026-07-08T03:49:20.999" v="1229" actId="1038"/>
           <ac:spMkLst>
             <pc:docMk/>
             <pc:sldMk cId="0" sldId="256"/>
@@ -195,7 +230,7 @@
           </ac:spMkLst>
         </pc:spChg>
         <pc:spChg chg="mod">
-          <ac:chgData name="Ivan V Pechenezhskiy" userId="05151ae6-aff0-4c3b-afef-5d8361ad9277" providerId="ADAL" clId="{497C8B30-E653-41E3-BCDE-D087AF3F3AA5}" dt="2026-07-03T05:01:45.397" v="407" actId="1037"/>
+          <ac:chgData name="Ivan V Pechenezhskiy" userId="05151ae6-aff0-4c3b-afef-5d8361ad9277" providerId="ADAL" clId="{497C8B30-E653-41E3-BCDE-D087AF3F3AA5}" dt="2026-07-08T03:49:20.999" v="1229" actId="1038"/>
           <ac:spMkLst>
             <pc:docMk/>
             <pc:sldMk cId="0" sldId="256"/>
@@ -203,7 +238,7 @@
           </ac:spMkLst>
         </pc:spChg>
         <pc:spChg chg="mod">
-          <ac:chgData name="Ivan V Pechenezhskiy" userId="05151ae6-aff0-4c3b-afef-5d8361ad9277" providerId="ADAL" clId="{497C8B30-E653-41E3-BCDE-D087AF3F3AA5}" dt="2026-07-04T04:09:53.075" v="1066" actId="1036"/>
+          <ac:chgData name="Ivan V Pechenezhskiy" userId="05151ae6-aff0-4c3b-afef-5d8361ad9277" providerId="ADAL" clId="{497C8B30-E653-41E3-BCDE-D087AF3F3AA5}" dt="2026-07-08T03:49:20.999" v="1229" actId="1038"/>
           <ac:spMkLst>
             <pc:docMk/>
             <pc:sldMk cId="0" sldId="256"/>
@@ -211,23 +246,23 @@
           </ac:spMkLst>
         </pc:spChg>
         <pc:spChg chg="mod">
-          <ac:chgData name="Ivan V Pechenezhskiy" userId="05151ae6-aff0-4c3b-afef-5d8361ad9277" providerId="ADAL" clId="{497C8B30-E653-41E3-BCDE-D087AF3F3AA5}" dt="2026-07-04T04:06:38.030" v="1007" actId="14100"/>
+          <ac:chgData name="Ivan V Pechenezhskiy" userId="05151ae6-aff0-4c3b-afef-5d8361ad9277" providerId="ADAL" clId="{497C8B30-E653-41E3-BCDE-D087AF3F3AA5}" dt="2026-07-08T03:46:43.544" v="1123" actId="1038"/>
           <ac:spMkLst>
             <pc:docMk/>
             <pc:sldMk cId="0" sldId="256"/>
             <ac:spMk id="19" creationId="{00000000-0000-0000-0000-000000000000}"/>
           </ac:spMkLst>
         </pc:spChg>
-        <pc:spChg chg="del">
-          <ac:chgData name="Ivan V Pechenezhskiy" userId="05151ae6-aff0-4c3b-afef-5d8361ad9277" providerId="ADAL" clId="{497C8B30-E653-41E3-BCDE-D087AF3F3AA5}" dt="2026-07-03T04:59:36.290" v="364" actId="478"/>
+        <pc:spChg chg="add mod">
+          <ac:chgData name="Ivan V Pechenezhskiy" userId="05151ae6-aff0-4c3b-afef-5d8361ad9277" providerId="ADAL" clId="{497C8B30-E653-41E3-BCDE-D087AF3F3AA5}" dt="2026-07-08T03:49:09.633" v="1194"/>
           <ac:spMkLst>
             <pc:docMk/>
             <pc:sldMk cId="0" sldId="256"/>
-            <ac:spMk id="20" creationId="{00000000-0000-0000-0000-000000000000}"/>
+            <ac:spMk id="20" creationId="{E6A11564-4CAD-4A9A-E262-77E3FEB34267}"/>
           </ac:spMkLst>
         </pc:spChg>
         <pc:spChg chg="mod">
-          <ac:chgData name="Ivan V Pechenezhskiy" userId="05151ae6-aff0-4c3b-afef-5d8361ad9277" providerId="ADAL" clId="{497C8B30-E653-41E3-BCDE-D087AF3F3AA5}" dt="2026-07-04T04:04:32.985" v="899" actId="1036"/>
+          <ac:chgData name="Ivan V Pechenezhskiy" userId="05151ae6-aff0-4c3b-afef-5d8361ad9277" providerId="ADAL" clId="{497C8B30-E653-41E3-BCDE-D087AF3F3AA5}" dt="2026-07-08T03:46:43.544" v="1123" actId="1038"/>
           <ac:spMkLst>
             <pc:docMk/>
             <pc:sldMk cId="0" sldId="256"/>
@@ -251,7 +286,7 @@
           </ac:spMkLst>
         </pc:spChg>
         <pc:spChg chg="mod">
-          <ac:chgData name="Ivan V Pechenezhskiy" userId="05151ae6-aff0-4c3b-afef-5d8361ad9277" providerId="ADAL" clId="{497C8B30-E653-41E3-BCDE-D087AF3F3AA5}" dt="2026-07-04T04:04:06.432" v="853" actId="1036"/>
+          <ac:chgData name="Ivan V Pechenezhskiy" userId="05151ae6-aff0-4c3b-afef-5d8361ad9277" providerId="ADAL" clId="{497C8B30-E653-41E3-BCDE-D087AF3F3AA5}" dt="2026-07-08T03:46:43.544" v="1123" actId="1038"/>
           <ac:spMkLst>
             <pc:docMk/>
             <pc:sldMk cId="0" sldId="256"/>
@@ -259,7 +294,7 @@
           </ac:spMkLst>
         </pc:spChg>
         <pc:spChg chg="mod">
-          <ac:chgData name="Ivan V Pechenezhskiy" userId="05151ae6-aff0-4c3b-afef-5d8361ad9277" providerId="ADAL" clId="{497C8B30-E653-41E3-BCDE-D087AF3F3AA5}" dt="2026-07-03T05:13:02.517" v="653" actId="1038"/>
+          <ac:chgData name="Ivan V Pechenezhskiy" userId="05151ae6-aff0-4c3b-afef-5d8361ad9277" providerId="ADAL" clId="{497C8B30-E653-41E3-BCDE-D087AF3F3AA5}" dt="2026-07-08T03:47:18.535" v="1152" actId="1036"/>
           <ac:spMkLst>
             <pc:docMk/>
             <pc:sldMk cId="0" sldId="256"/>
@@ -290,12 +325,12 @@
             <ac:spMk id="28" creationId="{00000000-0000-0000-0000-000000000000}"/>
           </ac:spMkLst>
         </pc:spChg>
-        <pc:spChg chg="del mod">
-          <ac:chgData name="Ivan V Pechenezhskiy" userId="05151ae6-aff0-4c3b-afef-5d8361ad9277" providerId="ADAL" clId="{497C8B30-E653-41E3-BCDE-D087AF3F3AA5}" dt="2026-07-03T05:15:56.830" v="720" actId="478"/>
+        <pc:spChg chg="add mod">
+          <ac:chgData name="Ivan V Pechenezhskiy" userId="05151ae6-aff0-4c3b-afef-5d8361ad9277" providerId="ADAL" clId="{497C8B30-E653-41E3-BCDE-D087AF3F3AA5}" dt="2026-07-08T03:49:09.633" v="1194"/>
           <ac:spMkLst>
             <pc:docMk/>
             <pc:sldMk cId="0" sldId="256"/>
-            <ac:spMk id="29" creationId="{00000000-0000-0000-0000-000000000000}"/>
+            <ac:spMk id="29" creationId="{139B2611-CD08-04BE-574A-00DC6370230B}"/>
           </ac:spMkLst>
         </pc:spChg>
         <pc:spChg chg="mod">
@@ -307,7 +342,7 @@
           </ac:spMkLst>
         </pc:spChg>
         <pc:spChg chg="mod">
-          <ac:chgData name="Ivan V Pechenezhskiy" userId="05151ae6-aff0-4c3b-afef-5d8361ad9277" providerId="ADAL" clId="{497C8B30-E653-41E3-BCDE-D087AF3F3AA5}" dt="2026-07-04T04:09:19.026" v="1065" actId="1036"/>
+          <ac:chgData name="Ivan V Pechenezhskiy" userId="05151ae6-aff0-4c3b-afef-5d8361ad9277" providerId="ADAL" clId="{497C8B30-E653-41E3-BCDE-D087AF3F3AA5}" dt="2026-07-08T03:46:43.544" v="1123" actId="1038"/>
           <ac:spMkLst>
             <pc:docMk/>
             <pc:sldMk cId="0" sldId="256"/>
@@ -339,7 +374,7 @@
           </ac:spMkLst>
         </pc:spChg>
         <pc:spChg chg="mod">
-          <ac:chgData name="Ivan V Pechenezhskiy" userId="05151ae6-aff0-4c3b-afef-5d8361ad9277" providerId="ADAL" clId="{497C8B30-E653-41E3-BCDE-D087AF3F3AA5}" dt="2026-07-03T05:12:20.856" v="625" actId="1038"/>
+          <ac:chgData name="Ivan V Pechenezhskiy" userId="05151ae6-aff0-4c3b-afef-5d8361ad9277" providerId="ADAL" clId="{497C8B30-E653-41E3-BCDE-D087AF3F3AA5}" dt="2026-07-08T03:46:43.544" v="1123" actId="1038"/>
           <ac:spMkLst>
             <pc:docMk/>
             <pc:sldMk cId="0" sldId="256"/>
@@ -355,7 +390,7 @@
           </ac:spMkLst>
         </pc:spChg>
         <pc:spChg chg="mod">
-          <ac:chgData name="Ivan V Pechenezhskiy" userId="05151ae6-aff0-4c3b-afef-5d8361ad9277" providerId="ADAL" clId="{497C8B30-E653-41E3-BCDE-D087AF3F3AA5}" dt="2026-07-04T04:09:19.026" v="1065" actId="1036"/>
+          <ac:chgData name="Ivan V Pechenezhskiy" userId="05151ae6-aff0-4c3b-afef-5d8361ad9277" providerId="ADAL" clId="{497C8B30-E653-41E3-BCDE-D087AF3F3AA5}" dt="2026-07-08T03:47:18.535" v="1152" actId="1036"/>
           <ac:spMkLst>
             <pc:docMk/>
             <pc:sldMk cId="0" sldId="256"/>
@@ -370,8 +405,8 @@
             <ac:spMk id="38" creationId="{00000000-0000-0000-0000-000000000000}"/>
           </ac:spMkLst>
         </pc:spChg>
-        <pc:spChg chg="mod">
-          <ac:chgData name="Ivan V Pechenezhskiy" userId="05151ae6-aff0-4c3b-afef-5d8361ad9277" providerId="ADAL" clId="{497C8B30-E653-41E3-BCDE-D087AF3F3AA5}" dt="2026-07-04T04:09:19.026" v="1065" actId="1036"/>
+        <pc:spChg chg="del mod">
+          <ac:chgData name="Ivan V Pechenezhskiy" userId="05151ae6-aff0-4c3b-afef-5d8361ad9277" providerId="ADAL" clId="{497C8B30-E653-41E3-BCDE-D087AF3F3AA5}" dt="2026-07-08T03:48:03.392" v="1181" actId="478"/>
           <ac:spMkLst>
             <pc:docMk/>
             <pc:sldMk cId="0" sldId="256"/>
@@ -402,20 +437,28 @@
             <ac:spMk id="42" creationId="{00000000-0000-0000-0000-000000000000}"/>
           </ac:spMkLst>
         </pc:spChg>
-        <pc:spChg chg="add del mod">
-          <ac:chgData name="Ivan V Pechenezhskiy" userId="05151ae6-aff0-4c3b-afef-5d8361ad9277" providerId="ADAL" clId="{497C8B30-E653-41E3-BCDE-D087AF3F3AA5}" dt="2026-07-03T05:08:21.828" v="537" actId="478"/>
+        <pc:spChg chg="add mod">
+          <ac:chgData name="Ivan V Pechenezhskiy" userId="05151ae6-aff0-4c3b-afef-5d8361ad9277" providerId="ADAL" clId="{497C8B30-E653-41E3-BCDE-D087AF3F3AA5}" dt="2026-07-08T03:49:09.633" v="1194"/>
           <ac:spMkLst>
             <pc:docMk/>
             <pc:sldMk cId="0" sldId="256"/>
-            <ac:spMk id="46" creationId="{CAB9A9E4-C100-F8A1-E45B-62994847B83B}"/>
+            <ac:spMk id="43" creationId="{797DF212-4641-535B-EDD7-425D6C3AB02E}"/>
           </ac:spMkLst>
         </pc:spChg>
-        <pc:spChg chg="add del">
-          <ac:chgData name="Ivan V Pechenezhskiy" userId="05151ae6-aff0-4c3b-afef-5d8361ad9277" providerId="ADAL" clId="{497C8B30-E653-41E3-BCDE-D087AF3F3AA5}" dt="2026-07-03T04:59:04.680" v="363" actId="478"/>
+        <pc:spChg chg="add mod">
+          <ac:chgData name="Ivan V Pechenezhskiy" userId="05151ae6-aff0-4c3b-afef-5d8361ad9277" providerId="ADAL" clId="{497C8B30-E653-41E3-BCDE-D087AF3F3AA5}" dt="2026-07-08T03:49:29.969" v="1232" actId="1076"/>
           <ac:spMkLst>
             <pc:docMk/>
             <pc:sldMk cId="0" sldId="256"/>
-            <ac:spMk id="47" creationId="{32D0648E-315B-0FD7-A0B9-67AB1013F19A}"/>
+            <ac:spMk id="46" creationId="{4CBD97B0-FCEC-E0BA-0BEE-ED3B3B63F55E}"/>
+          </ac:spMkLst>
+        </pc:spChg>
+        <pc:spChg chg="add mod">
+          <ac:chgData name="Ivan V Pechenezhskiy" userId="05151ae6-aff0-4c3b-afef-5d8361ad9277" providerId="ADAL" clId="{497C8B30-E653-41E3-BCDE-D087AF3F3AA5}" dt="2026-07-08T03:49:29.969" v="1232" actId="1076"/>
+          <ac:spMkLst>
+            <pc:docMk/>
+            <pc:sldMk cId="0" sldId="256"/>
+            <ac:spMk id="47" creationId="{41B90641-1851-052C-0CEA-747076EE788B}"/>
           </ac:spMkLst>
         </pc:spChg>
         <pc:spChg chg="add mod">
@@ -427,19 +470,11 @@
           </ac:spMkLst>
         </pc:spChg>
         <pc:spChg chg="add mod">
-          <ac:chgData name="Ivan V Pechenezhskiy" userId="05151ae6-aff0-4c3b-afef-5d8361ad9277" providerId="ADAL" clId="{497C8B30-E653-41E3-BCDE-D087AF3F3AA5}" dt="2026-07-04T04:09:19.026" v="1065" actId="1036"/>
+          <ac:chgData name="Ivan V Pechenezhskiy" userId="05151ae6-aff0-4c3b-afef-5d8361ad9277" providerId="ADAL" clId="{497C8B30-E653-41E3-BCDE-D087AF3F3AA5}" dt="2026-07-08T03:49:29.969" v="1232" actId="1076"/>
           <ac:spMkLst>
             <pc:docMk/>
             <pc:sldMk cId="0" sldId="256"/>
-            <ac:spMk id="52" creationId="{3A060945-B423-AC90-DEEA-8E6E4B717375}"/>
-          </ac:spMkLst>
-        </pc:spChg>
-        <pc:spChg chg="add del mod">
-          <ac:chgData name="Ivan V Pechenezhskiy" userId="05151ae6-aff0-4c3b-afef-5d8361ad9277" providerId="ADAL" clId="{497C8B30-E653-41E3-BCDE-D087AF3F3AA5}" dt="2026-07-03T05:08:17.398" v="534" actId="478"/>
-          <ac:spMkLst>
-            <pc:docMk/>
-            <pc:sldMk cId="0" sldId="256"/>
-            <ac:spMk id="53" creationId="{B413E02B-CD83-F835-99F5-23F961306DCD}"/>
+            <ac:spMk id="49" creationId="{D786C316-71C8-325E-6AC0-9671EB4E191F}"/>
           </ac:spMkLst>
         </pc:spChg>
         <pc:spChg chg="add mod">
@@ -447,15 +482,47 @@
           <ac:spMkLst>
             <pc:docMk/>
             <pc:sldMk cId="0" sldId="256"/>
+            <ac:spMk id="52" creationId="{3A060945-B423-AC90-DEEA-8E6E4B717375}"/>
+          </ac:spMkLst>
+        </pc:spChg>
+        <pc:spChg chg="add mod">
+          <ac:chgData name="Ivan V Pechenezhskiy" userId="05151ae6-aff0-4c3b-afef-5d8361ad9277" providerId="ADAL" clId="{497C8B30-E653-41E3-BCDE-D087AF3F3AA5}" dt="2026-07-08T03:50:41.602" v="1304" actId="1038"/>
+          <ac:spMkLst>
+            <pc:docMk/>
+            <pc:sldMk cId="0" sldId="256"/>
+            <ac:spMk id="53" creationId="{9C4089C5-22FE-3D9C-27E7-E3C51D1874FE}"/>
+          </ac:spMkLst>
+        </pc:spChg>
+        <pc:spChg chg="add mod">
+          <ac:chgData name="Ivan V Pechenezhskiy" userId="05151ae6-aff0-4c3b-afef-5d8361ad9277" providerId="ADAL" clId="{497C8B30-E653-41E3-BCDE-D087AF3F3AA5}" dt="2026-07-04T04:09:19.026" v="1065" actId="1036"/>
+          <ac:spMkLst>
+            <pc:docMk/>
+            <pc:sldMk cId="0" sldId="256"/>
             <ac:spMk id="54" creationId="{65398C4F-EB0B-354D-1D29-34208C115C7C}"/>
           </ac:spMkLst>
         </pc:spChg>
         <pc:spChg chg="add mod">
-          <ac:chgData name="Ivan V Pechenezhskiy" userId="05151ae6-aff0-4c3b-afef-5d8361ad9277" providerId="ADAL" clId="{497C8B30-E653-41E3-BCDE-D087AF3F3AA5}" dt="2026-07-03T05:19:58.640" v="794" actId="1035"/>
+          <ac:chgData name="Ivan V Pechenezhskiy" userId="05151ae6-aff0-4c3b-afef-5d8361ad9277" providerId="ADAL" clId="{497C8B30-E653-41E3-BCDE-D087AF3F3AA5}" dt="2026-07-08T03:50:41.602" v="1304" actId="1038"/>
+          <ac:spMkLst>
+            <pc:docMk/>
+            <pc:sldMk cId="0" sldId="256"/>
+            <ac:spMk id="55" creationId="{7A366CA6-7374-5992-9EFF-A5D9EA455F68}"/>
+          </ac:spMkLst>
+        </pc:spChg>
+        <pc:spChg chg="add mod">
+          <ac:chgData name="Ivan V Pechenezhskiy" userId="05151ae6-aff0-4c3b-afef-5d8361ad9277" providerId="ADAL" clId="{497C8B30-E653-41E3-BCDE-D087AF3F3AA5}" dt="2026-07-08T03:50:41.602" v="1304" actId="1038"/>
           <ac:spMkLst>
             <pc:docMk/>
             <pc:sldMk cId="0" sldId="256"/>
             <ac:spMk id="56" creationId="{3B776951-7B78-9B27-6D00-28786E53CCA7}"/>
+          </ac:spMkLst>
+        </pc:spChg>
+        <pc:spChg chg="add mod">
+          <ac:chgData name="Ivan V Pechenezhskiy" userId="05151ae6-aff0-4c3b-afef-5d8361ad9277" providerId="ADAL" clId="{497C8B30-E653-41E3-BCDE-D087AF3F3AA5}" dt="2026-07-08T03:50:41.602" v="1304" actId="1038"/>
+          <ac:spMkLst>
+            <pc:docMk/>
+            <pc:sldMk cId="0" sldId="256"/>
+            <ac:spMk id="57" creationId="{DFE149B0-7914-9776-C40E-B06E1741D9B6}"/>
           </ac:spMkLst>
         </pc:spChg>
         <pc:cxnChg chg="mod">
@@ -474,16 +541,8 @@
             <ac:cxnSpMk id="8" creationId="{00000000-0000-0000-0000-000000000000}"/>
           </ac:cxnSpMkLst>
         </pc:cxnChg>
-        <pc:cxnChg chg="del mod">
-          <ac:chgData name="Ivan V Pechenezhskiy" userId="05151ae6-aff0-4c3b-afef-5d8361ad9277" providerId="ADAL" clId="{497C8B30-E653-41E3-BCDE-D087AF3F3AA5}" dt="2026-07-03T05:01:33.391" v="396" actId="478"/>
-          <ac:cxnSpMkLst>
-            <pc:docMk/>
-            <pc:sldMk cId="0" sldId="256"/>
-            <ac:cxnSpMk id="9" creationId="{00000000-0000-0000-0000-000000000000}"/>
-          </ac:cxnSpMkLst>
-        </pc:cxnChg>
         <pc:cxnChg chg="mod">
-          <ac:chgData name="Ivan V Pechenezhskiy" userId="05151ae6-aff0-4c3b-afef-5d8361ad9277" providerId="ADAL" clId="{497C8B30-E653-41E3-BCDE-D087AF3F3AA5}" dt="2026-07-03T05:02:05.552" v="417" actId="1036"/>
+          <ac:chgData name="Ivan V Pechenezhskiy" userId="05151ae6-aff0-4c3b-afef-5d8361ad9277" providerId="ADAL" clId="{497C8B30-E653-41E3-BCDE-D087AF3F3AA5}" dt="2026-07-08T03:49:20.999" v="1229" actId="1038"/>
           <ac:cxnSpMkLst>
             <pc:docMk/>
             <pc:sldMk cId="0" sldId="256"/>
@@ -498,62 +557,55 @@
             <ac:cxnSpMk id="11" creationId="{00000000-0000-0000-0000-000000000000}"/>
           </ac:cxnSpMkLst>
         </pc:cxnChg>
-        <pc:cxnChg chg="del">
-          <ac:chgData name="Ivan V Pechenezhskiy" userId="05151ae6-aff0-4c3b-afef-5d8361ad9277" providerId="ADAL" clId="{497C8B30-E653-41E3-BCDE-D087AF3F3AA5}" dt="2026-07-03T04:44:23.920" v="53" actId="478"/>
+        <pc:cxnChg chg="add mod">
+          <ac:chgData name="Ivan V Pechenezhskiy" userId="05151ae6-aff0-4c3b-afef-5d8361ad9277" providerId="ADAL" clId="{497C8B30-E653-41E3-BCDE-D087AF3F3AA5}" dt="2026-07-08T03:49:09.633" v="1194"/>
           <ac:cxnSpMkLst>
             <pc:docMk/>
             <pc:sldMk cId="0" sldId="256"/>
-            <ac:cxnSpMk id="12" creationId="{00000000-0000-0000-0000-000000000000}"/>
+            <ac:cxnSpMk id="15" creationId="{359B6CDB-621F-8C4C-CBA0-1B5A8648C9DF}"/>
           </ac:cxnSpMkLst>
         </pc:cxnChg>
-        <pc:cxnChg chg="del">
-          <ac:chgData name="Ivan V Pechenezhskiy" userId="05151ae6-aff0-4c3b-afef-5d8361ad9277" providerId="ADAL" clId="{497C8B30-E653-41E3-BCDE-D087AF3F3AA5}" dt="2026-07-03T04:44:34.242" v="57" actId="478"/>
+        <pc:cxnChg chg="add mod">
+          <ac:chgData name="Ivan V Pechenezhskiy" userId="05151ae6-aff0-4c3b-afef-5d8361ad9277" providerId="ADAL" clId="{497C8B30-E653-41E3-BCDE-D087AF3F3AA5}" dt="2026-07-08T03:49:16.274" v="1198" actId="571"/>
           <ac:cxnSpMkLst>
             <pc:docMk/>
             <pc:sldMk cId="0" sldId="256"/>
-            <ac:cxnSpMk id="13" creationId="{00000000-0000-0000-0000-000000000000}"/>
+            <ac:cxnSpMk id="44" creationId="{FCCF1FE1-6863-BE73-EB49-C950B66751DC}"/>
           </ac:cxnSpMkLst>
         </pc:cxnChg>
-        <pc:cxnChg chg="del mod">
-          <ac:chgData name="Ivan V Pechenezhskiy" userId="05151ae6-aff0-4c3b-afef-5d8361ad9277" providerId="ADAL" clId="{497C8B30-E653-41E3-BCDE-D087AF3F3AA5}" dt="2026-07-03T04:51:30.550" v="213" actId="478"/>
+        <pc:cxnChg chg="add mod">
+          <ac:chgData name="Ivan V Pechenezhskiy" userId="05151ae6-aff0-4c3b-afef-5d8361ad9277" providerId="ADAL" clId="{497C8B30-E653-41E3-BCDE-D087AF3F3AA5}" dt="2026-07-08T03:49:29.969" v="1232" actId="1076"/>
           <ac:cxnSpMkLst>
             <pc:docMk/>
             <pc:sldMk cId="0" sldId="256"/>
-            <ac:cxnSpMk id="14" creationId="{00000000-0000-0000-0000-000000000000}"/>
+            <ac:cxnSpMk id="45" creationId="{84BF09E1-EF01-5A08-C96F-858CD7E8A0DC}"/>
           </ac:cxnSpMkLst>
         </pc:cxnChg>
-        <pc:cxnChg chg="del mod">
-          <ac:chgData name="Ivan V Pechenezhskiy" userId="05151ae6-aff0-4c3b-afef-5d8361ad9277" providerId="ADAL" clId="{497C8B30-E653-41E3-BCDE-D087AF3F3AA5}" dt="2026-07-03T04:51:33.381" v="214" actId="478"/>
+        <pc:cxnChg chg="add mod">
+          <ac:chgData name="Ivan V Pechenezhskiy" userId="05151ae6-aff0-4c3b-afef-5d8361ad9277" providerId="ADAL" clId="{497C8B30-E653-41E3-BCDE-D087AF3F3AA5}" dt="2026-07-08T03:50:23.118" v="1245" actId="1037"/>
           <ac:cxnSpMkLst>
             <pc:docMk/>
             <pc:sldMk cId="0" sldId="256"/>
-            <ac:cxnSpMk id="15" creationId="{00000000-0000-0000-0000-000000000000}"/>
+            <ac:cxnSpMk id="50" creationId="{6E813ABB-43EE-8E2A-E3B4-6EC613F05C10}"/>
+          </ac:cxnSpMkLst>
+        </pc:cxnChg>
+        <pc:cxnChg chg="add mod">
+          <ac:chgData name="Ivan V Pechenezhskiy" userId="05151ae6-aff0-4c3b-afef-5d8361ad9277" providerId="ADAL" clId="{497C8B30-E653-41E3-BCDE-D087AF3F3AA5}" dt="2026-07-08T03:50:23.118" v="1245" actId="1037"/>
+          <ac:cxnSpMkLst>
+            <pc:docMk/>
+            <pc:sldMk cId="0" sldId="256"/>
+            <ac:cxnSpMk id="51" creationId="{6B5EC015-9D1E-2F78-F5D5-C78A4C5297B8}"/>
           </ac:cxnSpMkLst>
         </pc:cxnChg>
       </pc:sldChg>
-      <pc:sldChg chg="modSp del mod">
-        <pc:chgData name="Ivan V Pechenezhskiy" userId="05151ae6-aff0-4c3b-afef-5d8361ad9277" providerId="ADAL" clId="{497C8B30-E653-41E3-BCDE-D087AF3F3AA5}" dt="2026-07-03T05:21:07.807" v="795" actId="47"/>
-        <pc:sldMkLst>
-          <pc:docMk/>
-          <pc:sldMk cId="0" sldId="257"/>
-        </pc:sldMkLst>
-        <pc:picChg chg="mod">
-          <ac:chgData name="Ivan V Pechenezhskiy" userId="05151ae6-aff0-4c3b-afef-5d8361ad9277" providerId="ADAL" clId="{497C8B30-E653-41E3-BCDE-D087AF3F3AA5}" dt="2026-07-03T05:19:38.603" v="788"/>
-          <ac:picMkLst>
-            <pc:docMk/>
-            <pc:sldMk cId="0" sldId="257"/>
-            <ac:picMk id="2" creationId="{00000000-0000-0000-0000-000000000000}"/>
-          </ac:picMkLst>
-        </pc:picChg>
-      </pc:sldChg>
       <pc:sldMasterChg chg="modSp modSldLayout">
-        <pc:chgData name="Ivan V Pechenezhskiy" userId="05151ae6-aff0-4c3b-afef-5d8361ad9277" providerId="ADAL" clId="{497C8B30-E653-41E3-BCDE-D087AF3F3AA5}" dt="2026-07-03T05:19:38.603" v="788"/>
+        <pc:chgData name="Ivan V Pechenezhskiy" userId="05151ae6-aff0-4c3b-afef-5d8361ad9277" providerId="ADAL" clId="{497C8B30-E653-41E3-BCDE-D087AF3F3AA5}" dt="2026-07-08T03:45:56.017" v="1068"/>
         <pc:sldMasterMkLst>
           <pc:docMk/>
           <pc:sldMasterMk cId="2209977519" sldId="2147483648"/>
         </pc:sldMasterMkLst>
         <pc:spChg chg="mod">
-          <ac:chgData name="Ivan V Pechenezhskiy" userId="05151ae6-aff0-4c3b-afef-5d8361ad9277" providerId="ADAL" clId="{497C8B30-E653-41E3-BCDE-D087AF3F3AA5}" dt="2026-07-03T05:19:38.603" v="788"/>
+          <ac:chgData name="Ivan V Pechenezhskiy" userId="05151ae6-aff0-4c3b-afef-5d8361ad9277" providerId="ADAL" clId="{497C8B30-E653-41E3-BCDE-D087AF3F3AA5}" dt="2026-07-08T03:45:56.017" v="1068"/>
           <ac:spMkLst>
             <pc:docMk/>
             <pc:sldMasterMk cId="2209977519" sldId="2147483648"/>
@@ -561,7 +613,7 @@
           </ac:spMkLst>
         </pc:spChg>
         <pc:spChg chg="mod">
-          <ac:chgData name="Ivan V Pechenezhskiy" userId="05151ae6-aff0-4c3b-afef-5d8361ad9277" providerId="ADAL" clId="{497C8B30-E653-41E3-BCDE-D087AF3F3AA5}" dt="2026-07-03T05:19:38.603" v="788"/>
+          <ac:chgData name="Ivan V Pechenezhskiy" userId="05151ae6-aff0-4c3b-afef-5d8361ad9277" providerId="ADAL" clId="{497C8B30-E653-41E3-BCDE-D087AF3F3AA5}" dt="2026-07-08T03:45:56.017" v="1068"/>
           <ac:spMkLst>
             <pc:docMk/>
             <pc:sldMasterMk cId="2209977519" sldId="2147483648"/>
@@ -569,7 +621,7 @@
           </ac:spMkLst>
         </pc:spChg>
         <pc:spChg chg="mod">
-          <ac:chgData name="Ivan V Pechenezhskiy" userId="05151ae6-aff0-4c3b-afef-5d8361ad9277" providerId="ADAL" clId="{497C8B30-E653-41E3-BCDE-D087AF3F3AA5}" dt="2026-07-03T05:19:38.603" v="788"/>
+          <ac:chgData name="Ivan V Pechenezhskiy" userId="05151ae6-aff0-4c3b-afef-5d8361ad9277" providerId="ADAL" clId="{497C8B30-E653-41E3-BCDE-D087AF3F3AA5}" dt="2026-07-08T03:45:56.017" v="1068"/>
           <ac:spMkLst>
             <pc:docMk/>
             <pc:sldMasterMk cId="2209977519" sldId="2147483648"/>
@@ -577,7 +629,7 @@
           </ac:spMkLst>
         </pc:spChg>
         <pc:spChg chg="mod">
-          <ac:chgData name="Ivan V Pechenezhskiy" userId="05151ae6-aff0-4c3b-afef-5d8361ad9277" providerId="ADAL" clId="{497C8B30-E653-41E3-BCDE-D087AF3F3AA5}" dt="2026-07-03T05:19:38.603" v="788"/>
+          <ac:chgData name="Ivan V Pechenezhskiy" userId="05151ae6-aff0-4c3b-afef-5d8361ad9277" providerId="ADAL" clId="{497C8B30-E653-41E3-BCDE-D087AF3F3AA5}" dt="2026-07-08T03:45:56.017" v="1068"/>
           <ac:spMkLst>
             <pc:docMk/>
             <pc:sldMasterMk cId="2209977519" sldId="2147483648"/>
@@ -585,7 +637,7 @@
           </ac:spMkLst>
         </pc:spChg>
         <pc:spChg chg="mod">
-          <ac:chgData name="Ivan V Pechenezhskiy" userId="05151ae6-aff0-4c3b-afef-5d8361ad9277" providerId="ADAL" clId="{497C8B30-E653-41E3-BCDE-D087AF3F3AA5}" dt="2026-07-03T05:19:38.603" v="788"/>
+          <ac:chgData name="Ivan V Pechenezhskiy" userId="05151ae6-aff0-4c3b-afef-5d8361ad9277" providerId="ADAL" clId="{497C8B30-E653-41E3-BCDE-D087AF3F3AA5}" dt="2026-07-08T03:45:56.017" v="1068"/>
           <ac:spMkLst>
             <pc:docMk/>
             <pc:sldMasterMk cId="2209977519" sldId="2147483648"/>
@@ -593,14 +645,14 @@
           </ac:spMkLst>
         </pc:spChg>
         <pc:sldLayoutChg chg="modSp">
-          <pc:chgData name="Ivan V Pechenezhskiy" userId="05151ae6-aff0-4c3b-afef-5d8361ad9277" providerId="ADAL" clId="{497C8B30-E653-41E3-BCDE-D087AF3F3AA5}" dt="2026-07-03T05:19:38.603" v="788"/>
+          <pc:chgData name="Ivan V Pechenezhskiy" userId="05151ae6-aff0-4c3b-afef-5d8361ad9277" providerId="ADAL" clId="{497C8B30-E653-41E3-BCDE-D087AF3F3AA5}" dt="2026-07-08T03:45:56.017" v="1068"/>
           <pc:sldLayoutMkLst>
             <pc:docMk/>
             <pc:sldMasterMk cId="2209977519" sldId="2147483648"/>
             <pc:sldLayoutMk cId="3168075583" sldId="2147483649"/>
           </pc:sldLayoutMkLst>
           <pc:spChg chg="mod">
-            <ac:chgData name="Ivan V Pechenezhskiy" userId="05151ae6-aff0-4c3b-afef-5d8361ad9277" providerId="ADAL" clId="{497C8B30-E653-41E3-BCDE-D087AF3F3AA5}" dt="2026-07-03T05:19:38.603" v="788"/>
+            <ac:chgData name="Ivan V Pechenezhskiy" userId="05151ae6-aff0-4c3b-afef-5d8361ad9277" providerId="ADAL" clId="{497C8B30-E653-41E3-BCDE-D087AF3F3AA5}" dt="2026-07-08T03:45:56.017" v="1068"/>
             <ac:spMkLst>
               <pc:docMk/>
               <pc:sldMasterMk cId="2209977519" sldId="2147483648"/>
@@ -609,7 +661,7 @@
             </ac:spMkLst>
           </pc:spChg>
           <pc:spChg chg="mod">
-            <ac:chgData name="Ivan V Pechenezhskiy" userId="05151ae6-aff0-4c3b-afef-5d8361ad9277" providerId="ADAL" clId="{497C8B30-E653-41E3-BCDE-D087AF3F3AA5}" dt="2026-07-03T05:19:38.603" v="788"/>
+            <ac:chgData name="Ivan V Pechenezhskiy" userId="05151ae6-aff0-4c3b-afef-5d8361ad9277" providerId="ADAL" clId="{497C8B30-E653-41E3-BCDE-D087AF3F3AA5}" dt="2026-07-08T03:45:56.017" v="1068"/>
             <ac:spMkLst>
               <pc:docMk/>
               <pc:sldMasterMk cId="2209977519" sldId="2147483648"/>
@@ -619,14 +671,14 @@
           </pc:spChg>
         </pc:sldLayoutChg>
         <pc:sldLayoutChg chg="modSp">
-          <pc:chgData name="Ivan V Pechenezhskiy" userId="05151ae6-aff0-4c3b-afef-5d8361ad9277" providerId="ADAL" clId="{497C8B30-E653-41E3-BCDE-D087AF3F3AA5}" dt="2026-07-03T05:19:38.603" v="788"/>
+          <pc:chgData name="Ivan V Pechenezhskiy" userId="05151ae6-aff0-4c3b-afef-5d8361ad9277" providerId="ADAL" clId="{497C8B30-E653-41E3-BCDE-D087AF3F3AA5}" dt="2026-07-08T03:45:56.017" v="1068"/>
           <pc:sldLayoutMkLst>
             <pc:docMk/>
             <pc:sldMasterMk cId="2209977519" sldId="2147483648"/>
             <pc:sldLayoutMk cId="960648375" sldId="2147483651"/>
           </pc:sldLayoutMkLst>
           <pc:spChg chg="mod">
-            <ac:chgData name="Ivan V Pechenezhskiy" userId="05151ae6-aff0-4c3b-afef-5d8361ad9277" providerId="ADAL" clId="{497C8B30-E653-41E3-BCDE-D087AF3F3AA5}" dt="2026-07-03T05:19:38.603" v="788"/>
+            <ac:chgData name="Ivan V Pechenezhskiy" userId="05151ae6-aff0-4c3b-afef-5d8361ad9277" providerId="ADAL" clId="{497C8B30-E653-41E3-BCDE-D087AF3F3AA5}" dt="2026-07-08T03:45:56.017" v="1068"/>
             <ac:spMkLst>
               <pc:docMk/>
               <pc:sldMasterMk cId="2209977519" sldId="2147483648"/>
@@ -635,7 +687,7 @@
             </ac:spMkLst>
           </pc:spChg>
           <pc:spChg chg="mod">
-            <ac:chgData name="Ivan V Pechenezhskiy" userId="05151ae6-aff0-4c3b-afef-5d8361ad9277" providerId="ADAL" clId="{497C8B30-E653-41E3-BCDE-D087AF3F3AA5}" dt="2026-07-03T05:19:38.603" v="788"/>
+            <ac:chgData name="Ivan V Pechenezhskiy" userId="05151ae6-aff0-4c3b-afef-5d8361ad9277" providerId="ADAL" clId="{497C8B30-E653-41E3-BCDE-D087AF3F3AA5}" dt="2026-07-08T03:45:56.017" v="1068"/>
             <ac:spMkLst>
               <pc:docMk/>
               <pc:sldMasterMk cId="2209977519" sldId="2147483648"/>
@@ -645,14 +697,14 @@
           </pc:spChg>
         </pc:sldLayoutChg>
         <pc:sldLayoutChg chg="modSp">
-          <pc:chgData name="Ivan V Pechenezhskiy" userId="05151ae6-aff0-4c3b-afef-5d8361ad9277" providerId="ADAL" clId="{497C8B30-E653-41E3-BCDE-D087AF3F3AA5}" dt="2026-07-03T05:19:38.603" v="788"/>
+          <pc:chgData name="Ivan V Pechenezhskiy" userId="05151ae6-aff0-4c3b-afef-5d8361ad9277" providerId="ADAL" clId="{497C8B30-E653-41E3-BCDE-D087AF3F3AA5}" dt="2026-07-08T03:45:56.017" v="1068"/>
           <pc:sldLayoutMkLst>
             <pc:docMk/>
             <pc:sldMasterMk cId="2209977519" sldId="2147483648"/>
             <pc:sldLayoutMk cId="2782244947" sldId="2147483652"/>
           </pc:sldLayoutMkLst>
           <pc:spChg chg="mod">
-            <ac:chgData name="Ivan V Pechenezhskiy" userId="05151ae6-aff0-4c3b-afef-5d8361ad9277" providerId="ADAL" clId="{497C8B30-E653-41E3-BCDE-D087AF3F3AA5}" dt="2026-07-03T05:19:38.603" v="788"/>
+            <ac:chgData name="Ivan V Pechenezhskiy" userId="05151ae6-aff0-4c3b-afef-5d8361ad9277" providerId="ADAL" clId="{497C8B30-E653-41E3-BCDE-D087AF3F3AA5}" dt="2026-07-08T03:45:56.017" v="1068"/>
             <ac:spMkLst>
               <pc:docMk/>
               <pc:sldMasterMk cId="2209977519" sldId="2147483648"/>
@@ -661,7 +713,7 @@
             </ac:spMkLst>
           </pc:spChg>
           <pc:spChg chg="mod">
-            <ac:chgData name="Ivan V Pechenezhskiy" userId="05151ae6-aff0-4c3b-afef-5d8361ad9277" providerId="ADAL" clId="{497C8B30-E653-41E3-BCDE-D087AF3F3AA5}" dt="2026-07-03T05:19:38.603" v="788"/>
+            <ac:chgData name="Ivan V Pechenezhskiy" userId="05151ae6-aff0-4c3b-afef-5d8361ad9277" providerId="ADAL" clId="{497C8B30-E653-41E3-BCDE-D087AF3F3AA5}" dt="2026-07-08T03:45:56.017" v="1068"/>
             <ac:spMkLst>
               <pc:docMk/>
               <pc:sldMasterMk cId="2209977519" sldId="2147483648"/>
@@ -671,14 +723,14 @@
           </pc:spChg>
         </pc:sldLayoutChg>
         <pc:sldLayoutChg chg="modSp">
-          <pc:chgData name="Ivan V Pechenezhskiy" userId="05151ae6-aff0-4c3b-afef-5d8361ad9277" providerId="ADAL" clId="{497C8B30-E653-41E3-BCDE-D087AF3F3AA5}" dt="2026-07-03T05:19:38.603" v="788"/>
+          <pc:chgData name="Ivan V Pechenezhskiy" userId="05151ae6-aff0-4c3b-afef-5d8361ad9277" providerId="ADAL" clId="{497C8B30-E653-41E3-BCDE-D087AF3F3AA5}" dt="2026-07-08T03:45:56.017" v="1068"/>
           <pc:sldLayoutMkLst>
             <pc:docMk/>
             <pc:sldMasterMk cId="2209977519" sldId="2147483648"/>
             <pc:sldLayoutMk cId="990158736" sldId="2147483653"/>
           </pc:sldLayoutMkLst>
           <pc:spChg chg="mod">
-            <ac:chgData name="Ivan V Pechenezhskiy" userId="05151ae6-aff0-4c3b-afef-5d8361ad9277" providerId="ADAL" clId="{497C8B30-E653-41E3-BCDE-D087AF3F3AA5}" dt="2026-07-03T05:19:38.603" v="788"/>
+            <ac:chgData name="Ivan V Pechenezhskiy" userId="05151ae6-aff0-4c3b-afef-5d8361ad9277" providerId="ADAL" clId="{497C8B30-E653-41E3-BCDE-D087AF3F3AA5}" dt="2026-07-08T03:45:56.017" v="1068"/>
             <ac:spMkLst>
               <pc:docMk/>
               <pc:sldMasterMk cId="2209977519" sldId="2147483648"/>
@@ -687,7 +739,7 @@
             </ac:spMkLst>
           </pc:spChg>
           <pc:spChg chg="mod">
-            <ac:chgData name="Ivan V Pechenezhskiy" userId="05151ae6-aff0-4c3b-afef-5d8361ad9277" providerId="ADAL" clId="{497C8B30-E653-41E3-BCDE-D087AF3F3AA5}" dt="2026-07-03T05:19:38.603" v="788"/>
+            <ac:chgData name="Ivan V Pechenezhskiy" userId="05151ae6-aff0-4c3b-afef-5d8361ad9277" providerId="ADAL" clId="{497C8B30-E653-41E3-BCDE-D087AF3F3AA5}" dt="2026-07-08T03:45:56.017" v="1068"/>
             <ac:spMkLst>
               <pc:docMk/>
               <pc:sldMasterMk cId="2209977519" sldId="2147483648"/>
@@ -696,7 +748,7 @@
             </ac:spMkLst>
           </pc:spChg>
           <pc:spChg chg="mod">
-            <ac:chgData name="Ivan V Pechenezhskiy" userId="05151ae6-aff0-4c3b-afef-5d8361ad9277" providerId="ADAL" clId="{497C8B30-E653-41E3-BCDE-D087AF3F3AA5}" dt="2026-07-03T05:19:38.603" v="788"/>
+            <ac:chgData name="Ivan V Pechenezhskiy" userId="05151ae6-aff0-4c3b-afef-5d8361ad9277" providerId="ADAL" clId="{497C8B30-E653-41E3-BCDE-D087AF3F3AA5}" dt="2026-07-08T03:45:56.017" v="1068"/>
             <ac:spMkLst>
               <pc:docMk/>
               <pc:sldMasterMk cId="2209977519" sldId="2147483648"/>
@@ -705,7 +757,7 @@
             </ac:spMkLst>
           </pc:spChg>
           <pc:spChg chg="mod">
-            <ac:chgData name="Ivan V Pechenezhskiy" userId="05151ae6-aff0-4c3b-afef-5d8361ad9277" providerId="ADAL" clId="{497C8B30-E653-41E3-BCDE-D087AF3F3AA5}" dt="2026-07-03T05:19:38.603" v="788"/>
+            <ac:chgData name="Ivan V Pechenezhskiy" userId="05151ae6-aff0-4c3b-afef-5d8361ad9277" providerId="ADAL" clId="{497C8B30-E653-41E3-BCDE-D087AF3F3AA5}" dt="2026-07-08T03:45:56.017" v="1068"/>
             <ac:spMkLst>
               <pc:docMk/>
               <pc:sldMasterMk cId="2209977519" sldId="2147483648"/>
@@ -715,14 +767,14 @@
           </pc:spChg>
         </pc:sldLayoutChg>
         <pc:sldLayoutChg chg="modSp">
-          <pc:chgData name="Ivan V Pechenezhskiy" userId="05151ae6-aff0-4c3b-afef-5d8361ad9277" providerId="ADAL" clId="{497C8B30-E653-41E3-BCDE-D087AF3F3AA5}" dt="2026-07-03T05:19:38.603" v="788"/>
+          <pc:chgData name="Ivan V Pechenezhskiy" userId="05151ae6-aff0-4c3b-afef-5d8361ad9277" providerId="ADAL" clId="{497C8B30-E653-41E3-BCDE-D087AF3F3AA5}" dt="2026-07-08T03:45:56.017" v="1068"/>
           <pc:sldLayoutMkLst>
             <pc:docMk/>
             <pc:sldMasterMk cId="2209977519" sldId="2147483648"/>
             <pc:sldLayoutMk cId="1840726560" sldId="2147483656"/>
           </pc:sldLayoutMkLst>
           <pc:spChg chg="mod">
-            <ac:chgData name="Ivan V Pechenezhskiy" userId="05151ae6-aff0-4c3b-afef-5d8361ad9277" providerId="ADAL" clId="{497C8B30-E653-41E3-BCDE-D087AF3F3AA5}" dt="2026-07-03T05:19:38.603" v="788"/>
+            <ac:chgData name="Ivan V Pechenezhskiy" userId="05151ae6-aff0-4c3b-afef-5d8361ad9277" providerId="ADAL" clId="{497C8B30-E653-41E3-BCDE-D087AF3F3AA5}" dt="2026-07-08T03:45:56.017" v="1068"/>
             <ac:spMkLst>
               <pc:docMk/>
               <pc:sldMasterMk cId="2209977519" sldId="2147483648"/>
@@ -731,7 +783,7 @@
             </ac:spMkLst>
           </pc:spChg>
           <pc:spChg chg="mod">
-            <ac:chgData name="Ivan V Pechenezhskiy" userId="05151ae6-aff0-4c3b-afef-5d8361ad9277" providerId="ADAL" clId="{497C8B30-E653-41E3-BCDE-D087AF3F3AA5}" dt="2026-07-03T05:19:38.603" v="788"/>
+            <ac:chgData name="Ivan V Pechenezhskiy" userId="05151ae6-aff0-4c3b-afef-5d8361ad9277" providerId="ADAL" clId="{497C8B30-E653-41E3-BCDE-D087AF3F3AA5}" dt="2026-07-08T03:45:56.017" v="1068"/>
             <ac:spMkLst>
               <pc:docMk/>
               <pc:sldMasterMk cId="2209977519" sldId="2147483648"/>
@@ -740,7 +792,7 @@
             </ac:spMkLst>
           </pc:spChg>
           <pc:spChg chg="mod">
-            <ac:chgData name="Ivan V Pechenezhskiy" userId="05151ae6-aff0-4c3b-afef-5d8361ad9277" providerId="ADAL" clId="{497C8B30-E653-41E3-BCDE-D087AF3F3AA5}" dt="2026-07-03T05:19:38.603" v="788"/>
+            <ac:chgData name="Ivan V Pechenezhskiy" userId="05151ae6-aff0-4c3b-afef-5d8361ad9277" providerId="ADAL" clId="{497C8B30-E653-41E3-BCDE-D087AF3F3AA5}" dt="2026-07-08T03:45:56.017" v="1068"/>
             <ac:spMkLst>
               <pc:docMk/>
               <pc:sldMasterMk cId="2209977519" sldId="2147483648"/>
@@ -750,14 +802,14 @@
           </pc:spChg>
         </pc:sldLayoutChg>
         <pc:sldLayoutChg chg="modSp">
-          <pc:chgData name="Ivan V Pechenezhskiy" userId="05151ae6-aff0-4c3b-afef-5d8361ad9277" providerId="ADAL" clId="{497C8B30-E653-41E3-BCDE-D087AF3F3AA5}" dt="2026-07-03T05:19:38.603" v="788"/>
+          <pc:chgData name="Ivan V Pechenezhskiy" userId="05151ae6-aff0-4c3b-afef-5d8361ad9277" providerId="ADAL" clId="{497C8B30-E653-41E3-BCDE-D087AF3F3AA5}" dt="2026-07-08T03:45:56.017" v="1068"/>
           <pc:sldLayoutMkLst>
             <pc:docMk/>
             <pc:sldMasterMk cId="2209977519" sldId="2147483648"/>
             <pc:sldLayoutMk cId="3889236939" sldId="2147483657"/>
           </pc:sldLayoutMkLst>
           <pc:spChg chg="mod">
-            <ac:chgData name="Ivan V Pechenezhskiy" userId="05151ae6-aff0-4c3b-afef-5d8361ad9277" providerId="ADAL" clId="{497C8B30-E653-41E3-BCDE-D087AF3F3AA5}" dt="2026-07-03T05:19:38.603" v="788"/>
+            <ac:chgData name="Ivan V Pechenezhskiy" userId="05151ae6-aff0-4c3b-afef-5d8361ad9277" providerId="ADAL" clId="{497C8B30-E653-41E3-BCDE-D087AF3F3AA5}" dt="2026-07-08T03:45:56.017" v="1068"/>
             <ac:spMkLst>
               <pc:docMk/>
               <pc:sldMasterMk cId="2209977519" sldId="2147483648"/>
@@ -766,7 +818,7 @@
             </ac:spMkLst>
           </pc:spChg>
           <pc:spChg chg="mod">
-            <ac:chgData name="Ivan V Pechenezhskiy" userId="05151ae6-aff0-4c3b-afef-5d8361ad9277" providerId="ADAL" clId="{497C8B30-E653-41E3-BCDE-D087AF3F3AA5}" dt="2026-07-03T05:19:38.603" v="788"/>
+            <ac:chgData name="Ivan V Pechenezhskiy" userId="05151ae6-aff0-4c3b-afef-5d8361ad9277" providerId="ADAL" clId="{497C8B30-E653-41E3-BCDE-D087AF3F3AA5}" dt="2026-07-08T03:45:56.017" v="1068"/>
             <ac:spMkLst>
               <pc:docMk/>
               <pc:sldMasterMk cId="2209977519" sldId="2147483648"/>
@@ -775,7 +827,7 @@
             </ac:spMkLst>
           </pc:spChg>
           <pc:spChg chg="mod">
-            <ac:chgData name="Ivan V Pechenezhskiy" userId="05151ae6-aff0-4c3b-afef-5d8361ad9277" providerId="ADAL" clId="{497C8B30-E653-41E3-BCDE-D087AF3F3AA5}" dt="2026-07-03T05:19:38.603" v="788"/>
+            <ac:chgData name="Ivan V Pechenezhskiy" userId="05151ae6-aff0-4c3b-afef-5d8361ad9277" providerId="ADAL" clId="{497C8B30-E653-41E3-BCDE-D087AF3F3AA5}" dt="2026-07-08T03:45:56.017" v="1068"/>
             <ac:spMkLst>
               <pc:docMk/>
               <pc:sldMasterMk cId="2209977519" sldId="2147483648"/>
@@ -785,14 +837,14 @@
           </pc:spChg>
         </pc:sldLayoutChg>
         <pc:sldLayoutChg chg="modSp">
-          <pc:chgData name="Ivan V Pechenezhskiy" userId="05151ae6-aff0-4c3b-afef-5d8361ad9277" providerId="ADAL" clId="{497C8B30-E653-41E3-BCDE-D087AF3F3AA5}" dt="2026-07-03T05:19:38.603" v="788"/>
+          <pc:chgData name="Ivan V Pechenezhskiy" userId="05151ae6-aff0-4c3b-afef-5d8361ad9277" providerId="ADAL" clId="{497C8B30-E653-41E3-BCDE-D087AF3F3AA5}" dt="2026-07-08T03:45:56.017" v="1068"/>
           <pc:sldLayoutMkLst>
             <pc:docMk/>
             <pc:sldMasterMk cId="2209977519" sldId="2147483648"/>
             <pc:sldLayoutMk cId="3612223792" sldId="2147483659"/>
           </pc:sldLayoutMkLst>
           <pc:spChg chg="mod">
-            <ac:chgData name="Ivan V Pechenezhskiy" userId="05151ae6-aff0-4c3b-afef-5d8361ad9277" providerId="ADAL" clId="{497C8B30-E653-41E3-BCDE-D087AF3F3AA5}" dt="2026-07-03T05:19:38.603" v="788"/>
+            <ac:chgData name="Ivan V Pechenezhskiy" userId="05151ae6-aff0-4c3b-afef-5d8361ad9277" providerId="ADAL" clId="{497C8B30-E653-41E3-BCDE-D087AF3F3AA5}" dt="2026-07-08T03:45:56.017" v="1068"/>
             <ac:spMkLst>
               <pc:docMk/>
               <pc:sldMasterMk cId="2209977519" sldId="2147483648"/>
@@ -801,7 +853,7 @@
             </ac:spMkLst>
           </pc:spChg>
           <pc:spChg chg="mod">
-            <ac:chgData name="Ivan V Pechenezhskiy" userId="05151ae6-aff0-4c3b-afef-5d8361ad9277" providerId="ADAL" clId="{497C8B30-E653-41E3-BCDE-D087AF3F3AA5}" dt="2026-07-03T05:19:38.603" v="788"/>
+            <ac:chgData name="Ivan V Pechenezhskiy" userId="05151ae6-aff0-4c3b-afef-5d8361ad9277" providerId="ADAL" clId="{497C8B30-E653-41E3-BCDE-D087AF3F3AA5}" dt="2026-07-08T03:45:56.017" v="1068"/>
             <ac:spMkLst>
               <pc:docMk/>
               <pc:sldMasterMk cId="2209977519" sldId="2147483648"/>
@@ -814,6 +866,444 @@
     </pc:docChg>
   </pc:docChgLst>
 </pc:chgInfo>
+</file>
+
+<file path=ppt/notesMasters/notesMaster1.xml><?xml version="1.0" encoding="utf-8"?>
+<p:notesMaster xmlns:a="http://schemas.openxmlformats.org/drawingml/2006/main" xmlns:r="http://schemas.openxmlformats.org/officeDocument/2006/relationships" xmlns:p="http://schemas.openxmlformats.org/presentationml/2006/main">
+  <p:cSld>
+    <p:bg>
+      <p:bgRef idx="1001">
+        <a:schemeClr val="bg1"/>
+      </p:bgRef>
+    </p:bg>
+    <p:spTree>
+      <p:nvGrpSpPr>
+        <p:cNvPr id="1" name=""/>
+        <p:cNvGrpSpPr/>
+        <p:nvPr/>
+      </p:nvGrpSpPr>
+      <p:grpSpPr>
+        <a:xfrm>
+          <a:off x="0" y="0"/>
+          <a:ext cx="0" cy="0"/>
+          <a:chOff x="0" y="0"/>
+          <a:chExt cx="0" cy="0"/>
+        </a:xfrm>
+      </p:grpSpPr>
+      <p:sp>
+        <p:nvSpPr>
+          <p:cNvPr id="2" name="Header Placeholder 1"/>
+          <p:cNvSpPr>
+            <a:spLocks noGrp="1"/>
+          </p:cNvSpPr>
+          <p:nvPr>
+            <p:ph type="hdr" sz="quarter"/>
+          </p:nvPr>
+        </p:nvSpPr>
+        <p:spPr>
+          <a:xfrm>
+            <a:off x="0" y="0"/>
+            <a:ext cx="2971800" cy="458788"/>
+          </a:xfrm>
+          <a:prstGeom prst="rect">
+            <a:avLst/>
+          </a:prstGeom>
+        </p:spPr>
+        <p:txBody>
+          <a:bodyPr vert="horz" lIns="91440" tIns="45720" rIns="91440" bIns="45720" rtlCol="0"/>
+          <a:lstStyle>
+            <a:lvl1pPr algn="l">
+              <a:defRPr sz="1200"/>
+            </a:lvl1pPr>
+          </a:lstStyle>
+          <a:p>
+            <a:endParaRPr lang="en-US"/>
+          </a:p>
+        </p:txBody>
+      </p:sp>
+      <p:sp>
+        <p:nvSpPr>
+          <p:cNvPr id="3" name="Date Placeholder 2"/>
+          <p:cNvSpPr>
+            <a:spLocks noGrp="1"/>
+          </p:cNvSpPr>
+          <p:nvPr>
+            <p:ph type="dt" idx="1"/>
+          </p:nvPr>
+        </p:nvSpPr>
+        <p:spPr>
+          <a:xfrm>
+            <a:off x="3884613" y="0"/>
+            <a:ext cx="2971800" cy="458788"/>
+          </a:xfrm>
+          <a:prstGeom prst="rect">
+            <a:avLst/>
+          </a:prstGeom>
+        </p:spPr>
+        <p:txBody>
+          <a:bodyPr vert="horz" lIns="91440" tIns="45720" rIns="91440" bIns="45720" rtlCol="0"/>
+          <a:lstStyle>
+            <a:lvl1pPr algn="r">
+              <a:defRPr sz="1200"/>
+            </a:lvl1pPr>
+          </a:lstStyle>
+          <a:p>
+            <a:fld id="{E9373EDD-C250-4B95-9196-DEA1E9C34B38}" type="datetimeFigureOut">
+              <a:rPr lang="en-US" smtClean="0"/>
+              <a:t>7/7/2026</a:t>
+            </a:fld>
+            <a:endParaRPr lang="en-US"/>
+          </a:p>
+        </p:txBody>
+      </p:sp>
+      <p:sp>
+        <p:nvSpPr>
+          <p:cNvPr id="4" name="Slide Image Placeholder 3"/>
+          <p:cNvSpPr>
+            <a:spLocks noGrp="1" noRot="1" noChangeAspect="1"/>
+          </p:cNvSpPr>
+          <p:nvPr>
+            <p:ph type="sldImg" idx="2"/>
+          </p:nvPr>
+        </p:nvSpPr>
+        <p:spPr>
+          <a:xfrm>
+            <a:off x="2635250" y="1143000"/>
+            <a:ext cx="1587500" cy="3086100"/>
+          </a:xfrm>
+          <a:prstGeom prst="rect">
+            <a:avLst/>
+          </a:prstGeom>
+          <a:noFill/>
+          <a:ln w="12700">
+            <a:solidFill>
+              <a:prstClr val="black"/>
+            </a:solidFill>
+          </a:ln>
+        </p:spPr>
+        <p:txBody>
+          <a:bodyPr vert="horz" lIns="91440" tIns="45720" rIns="91440" bIns="45720" rtlCol="0" anchor="ctr"/>
+          <a:lstStyle/>
+          <a:p>
+            <a:endParaRPr lang="en-US"/>
+          </a:p>
+        </p:txBody>
+      </p:sp>
+      <p:sp>
+        <p:nvSpPr>
+          <p:cNvPr id="5" name="Notes Placeholder 4"/>
+          <p:cNvSpPr>
+            <a:spLocks noGrp="1"/>
+          </p:cNvSpPr>
+          <p:nvPr>
+            <p:ph type="body" sz="quarter" idx="3"/>
+          </p:nvPr>
+        </p:nvSpPr>
+        <p:spPr>
+          <a:xfrm>
+            <a:off x="685800" y="4400550"/>
+            <a:ext cx="5486400" cy="3600450"/>
+          </a:xfrm>
+          <a:prstGeom prst="rect">
+            <a:avLst/>
+          </a:prstGeom>
+        </p:spPr>
+        <p:txBody>
+          <a:bodyPr vert="horz" lIns="91440" tIns="45720" rIns="91440" bIns="45720" rtlCol="0"/>
+          <a:lstStyle/>
+          <a:p>
+            <a:pPr lvl="0"/>
+            <a:r>
+              <a:rPr lang="en-US"/>
+              <a:t>Click to edit Master text styles</a:t>
+            </a:r>
+          </a:p>
+          <a:p>
+            <a:pPr lvl="1"/>
+            <a:r>
+              <a:rPr lang="en-US"/>
+              <a:t>Second level</a:t>
+            </a:r>
+          </a:p>
+          <a:p>
+            <a:pPr lvl="2"/>
+            <a:r>
+              <a:rPr lang="en-US"/>
+              <a:t>Third level</a:t>
+            </a:r>
+          </a:p>
+          <a:p>
+            <a:pPr lvl="3"/>
+            <a:r>
+              <a:rPr lang="en-US"/>
+              <a:t>Fourth level</a:t>
+            </a:r>
+          </a:p>
+          <a:p>
+            <a:pPr lvl="4"/>
+            <a:r>
+              <a:rPr lang="en-US"/>
+              <a:t>Fifth level</a:t>
+            </a:r>
+          </a:p>
+        </p:txBody>
+      </p:sp>
+      <p:sp>
+        <p:nvSpPr>
+          <p:cNvPr id="6" name="Footer Placeholder 5"/>
+          <p:cNvSpPr>
+            <a:spLocks noGrp="1"/>
+          </p:cNvSpPr>
+          <p:nvPr>
+            <p:ph type="ftr" sz="quarter" idx="4"/>
+          </p:nvPr>
+        </p:nvSpPr>
+        <p:spPr>
+          <a:xfrm>
+            <a:off x="0" y="8685213"/>
+            <a:ext cx="2971800" cy="458787"/>
+          </a:xfrm>
+          <a:prstGeom prst="rect">
+            <a:avLst/>
+          </a:prstGeom>
+        </p:spPr>
+        <p:txBody>
+          <a:bodyPr vert="horz" lIns="91440" tIns="45720" rIns="91440" bIns="45720" rtlCol="0" anchor="b"/>
+          <a:lstStyle>
+            <a:lvl1pPr algn="l">
+              <a:defRPr sz="1200"/>
+            </a:lvl1pPr>
+          </a:lstStyle>
+          <a:p>
+            <a:endParaRPr lang="en-US"/>
+          </a:p>
+        </p:txBody>
+      </p:sp>
+      <p:sp>
+        <p:nvSpPr>
+          <p:cNvPr id="7" name="Slide Number Placeholder 6"/>
+          <p:cNvSpPr>
+            <a:spLocks noGrp="1"/>
+          </p:cNvSpPr>
+          <p:nvPr>
+            <p:ph type="sldNum" sz="quarter" idx="5"/>
+          </p:nvPr>
+        </p:nvSpPr>
+        <p:spPr>
+          <a:xfrm>
+            <a:off x="3884613" y="8685213"/>
+            <a:ext cx="2971800" cy="458787"/>
+          </a:xfrm>
+          <a:prstGeom prst="rect">
+            <a:avLst/>
+          </a:prstGeom>
+        </p:spPr>
+        <p:txBody>
+          <a:bodyPr vert="horz" lIns="91440" tIns="45720" rIns="91440" bIns="45720" rtlCol="0" anchor="b"/>
+          <a:lstStyle>
+            <a:lvl1pPr algn="r">
+              <a:defRPr sz="1200"/>
+            </a:lvl1pPr>
+          </a:lstStyle>
+          <a:p>
+            <a:fld id="{00297262-8712-477A-8A3E-4470E3F11A94}" type="slidenum">
+              <a:rPr lang="en-US" smtClean="0"/>
+              <a:t>‹#›</a:t>
+            </a:fld>
+            <a:endParaRPr lang="en-US"/>
+          </a:p>
+        </p:txBody>
+      </p:sp>
+    </p:spTree>
+    <p:extLst>
+      <p:ext uri="{BB962C8B-B14F-4D97-AF65-F5344CB8AC3E}">
+        <p14:creationId xmlns:p14="http://schemas.microsoft.com/office/powerpoint/2010/main" val="2709655705"/>
+      </p:ext>
+    </p:extLst>
+  </p:cSld>
+  <p:clrMap bg1="lt1" tx1="dk1" bg2="lt2" tx2="dk2" accent1="accent1" accent2="accent2" accent3="accent3" accent4="accent4" accent5="accent5" accent6="accent6" hlink="hlink" folHlink="folHlink"/>
+  <p:notesStyle>
+    <a:lvl1pPr marL="0" algn="l" defTabSz="914400" rtl="0" eaLnBrk="1" latinLnBrk="0" hangingPunct="1">
+      <a:defRPr sz="1200" kern="1200">
+        <a:solidFill>
+          <a:schemeClr val="tx1"/>
+        </a:solidFill>
+        <a:latin typeface="+mn-lt"/>
+        <a:ea typeface="+mn-ea"/>
+        <a:cs typeface="+mn-cs"/>
+      </a:defRPr>
+    </a:lvl1pPr>
+    <a:lvl2pPr marL="457200" algn="l" defTabSz="914400" rtl="0" eaLnBrk="1" latinLnBrk="0" hangingPunct="1">
+      <a:defRPr sz="1200" kern="1200">
+        <a:solidFill>
+          <a:schemeClr val="tx1"/>
+        </a:solidFill>
+        <a:latin typeface="+mn-lt"/>
+        <a:ea typeface="+mn-ea"/>
+        <a:cs typeface="+mn-cs"/>
+      </a:defRPr>
+    </a:lvl2pPr>
+    <a:lvl3pPr marL="914400" algn="l" defTabSz="914400" rtl="0" eaLnBrk="1" latinLnBrk="0" hangingPunct="1">
+      <a:defRPr sz="1200" kern="1200">
+        <a:solidFill>
+          <a:schemeClr val="tx1"/>
+        </a:solidFill>
+        <a:latin typeface="+mn-lt"/>
+        <a:ea typeface="+mn-ea"/>
+        <a:cs typeface="+mn-cs"/>
+      </a:defRPr>
+    </a:lvl3pPr>
+    <a:lvl4pPr marL="1371600" algn="l" defTabSz="914400" rtl="0" eaLnBrk="1" latinLnBrk="0" hangingPunct="1">
+      <a:defRPr sz="1200" kern="1200">
+        <a:solidFill>
+          <a:schemeClr val="tx1"/>
+        </a:solidFill>
+        <a:latin typeface="+mn-lt"/>
+        <a:ea typeface="+mn-ea"/>
+        <a:cs typeface="+mn-cs"/>
+      </a:defRPr>
+    </a:lvl4pPr>
+    <a:lvl5pPr marL="1828800" algn="l" defTabSz="914400" rtl="0" eaLnBrk="1" latinLnBrk="0" hangingPunct="1">
+      <a:defRPr sz="1200" kern="1200">
+        <a:solidFill>
+          <a:schemeClr val="tx1"/>
+        </a:solidFill>
+        <a:latin typeface="+mn-lt"/>
+        <a:ea typeface="+mn-ea"/>
+        <a:cs typeface="+mn-cs"/>
+      </a:defRPr>
+    </a:lvl5pPr>
+    <a:lvl6pPr marL="2286000" algn="l" defTabSz="914400" rtl="0" eaLnBrk="1" latinLnBrk="0" hangingPunct="1">
+      <a:defRPr sz="1200" kern="1200">
+        <a:solidFill>
+          <a:schemeClr val="tx1"/>
+        </a:solidFill>
+        <a:latin typeface="+mn-lt"/>
+        <a:ea typeface="+mn-ea"/>
+        <a:cs typeface="+mn-cs"/>
+      </a:defRPr>
+    </a:lvl6pPr>
+    <a:lvl7pPr marL="2743200" algn="l" defTabSz="914400" rtl="0" eaLnBrk="1" latinLnBrk="0" hangingPunct="1">
+      <a:defRPr sz="1200" kern="1200">
+        <a:solidFill>
+          <a:schemeClr val="tx1"/>
+        </a:solidFill>
+        <a:latin typeface="+mn-lt"/>
+        <a:ea typeface="+mn-ea"/>
+        <a:cs typeface="+mn-cs"/>
+      </a:defRPr>
+    </a:lvl7pPr>
+    <a:lvl8pPr marL="3200400" algn="l" defTabSz="914400" rtl="0" eaLnBrk="1" latinLnBrk="0" hangingPunct="1">
+      <a:defRPr sz="1200" kern="1200">
+        <a:solidFill>
+          <a:schemeClr val="tx1"/>
+        </a:solidFill>
+        <a:latin typeface="+mn-lt"/>
+        <a:ea typeface="+mn-ea"/>
+        <a:cs typeface="+mn-cs"/>
+      </a:defRPr>
+    </a:lvl8pPr>
+    <a:lvl9pPr marL="3657600" algn="l" defTabSz="914400" rtl="0" eaLnBrk="1" latinLnBrk="0" hangingPunct="1">
+      <a:defRPr sz="1200" kern="1200">
+        <a:solidFill>
+          <a:schemeClr val="tx1"/>
+        </a:solidFill>
+        <a:latin typeface="+mn-lt"/>
+        <a:ea typeface="+mn-ea"/>
+        <a:cs typeface="+mn-cs"/>
+      </a:defRPr>
+    </a:lvl9pPr>
+  </p:notesStyle>
+</p:notesMaster>
+</file>
+
+<file path=ppt/notesSlides/notesSlide1.xml><?xml version="1.0" encoding="utf-8"?>
+<p:notes xmlns:a="http://schemas.openxmlformats.org/drawingml/2006/main" xmlns:r="http://schemas.openxmlformats.org/officeDocument/2006/relationships" xmlns:p="http://schemas.openxmlformats.org/presentationml/2006/main">
+  <p:cSld>
+    <p:spTree>
+      <p:nvGrpSpPr>
+        <p:cNvPr id="1" name=""/>
+        <p:cNvGrpSpPr/>
+        <p:nvPr/>
+      </p:nvGrpSpPr>
+      <p:grpSpPr>
+        <a:xfrm>
+          <a:off x="0" y="0"/>
+          <a:ext cx="0" cy="0"/>
+          <a:chOff x="0" y="0"/>
+          <a:chExt cx="0" cy="0"/>
+        </a:xfrm>
+      </p:grpSpPr>
+      <p:sp>
+        <p:nvSpPr>
+          <p:cNvPr id="2" name="Slide Image Placeholder 1"/>
+          <p:cNvSpPr>
+            <a:spLocks noGrp="1" noRot="1" noChangeAspect="1"/>
+          </p:cNvSpPr>
+          <p:nvPr>
+            <p:ph type="sldImg"/>
+          </p:nvPr>
+        </p:nvSpPr>
+        <p:spPr>
+          <a:xfrm>
+            <a:off x="2635250" y="1143000"/>
+            <a:ext cx="1587500" cy="3086100"/>
+          </a:xfrm>
+        </p:spPr>
+      </p:sp>
+      <p:sp>
+        <p:nvSpPr>
+          <p:cNvPr id="3" name="Notes Placeholder 2"/>
+          <p:cNvSpPr>
+            <a:spLocks noGrp="1"/>
+          </p:cNvSpPr>
+          <p:nvPr>
+            <p:ph type="body" idx="1"/>
+          </p:nvPr>
+        </p:nvSpPr>
+        <p:spPr/>
+        <p:txBody>
+          <a:bodyPr/>
+          <a:lstStyle/>
+          <a:p>
+            <a:endParaRPr lang="en-US" dirty="0"/>
+          </a:p>
+        </p:txBody>
+      </p:sp>
+      <p:sp>
+        <p:nvSpPr>
+          <p:cNvPr id="4" name="Slide Number Placeholder 3"/>
+          <p:cNvSpPr>
+            <a:spLocks noGrp="1"/>
+          </p:cNvSpPr>
+          <p:nvPr>
+            <p:ph type="sldNum" sz="quarter" idx="5"/>
+          </p:nvPr>
+        </p:nvSpPr>
+        <p:spPr/>
+        <p:txBody>
+          <a:bodyPr/>
+          <a:lstStyle/>
+          <a:p>
+            <a:fld id="{00297262-8712-477A-8A3E-4470E3F11A94}" type="slidenum">
+              <a:rPr lang="en-US" smtClean="0"/>
+              <a:t>1</a:t>
+            </a:fld>
+            <a:endParaRPr lang="en-US"/>
+          </a:p>
+        </p:txBody>
+      </p:sp>
+    </p:spTree>
+    <p:extLst>
+      <p:ext uri="{BB962C8B-B14F-4D97-AF65-F5344CB8AC3E}">
+        <p14:creationId xmlns:p14="http://schemas.microsoft.com/office/powerpoint/2010/main" val="3963277454"/>
+      </p:ext>
+    </p:extLst>
+  </p:cSld>
+  <p:clrMapOvr>
+    <a:masterClrMapping/>
+  </p:clrMapOvr>
+</p:notes>
 </file>
 
 <file path=ppt/slideLayouts/slideLayout1.xml><?xml version="1.0" encoding="utf-8"?>
@@ -845,8 +1335,8 @@
         </p:nvSpPr>
         <p:spPr>
           <a:xfrm>
-            <a:off x="684595" y="1677794"/>
-            <a:ext cx="7758653" cy="1157700"/>
+            <a:off x="989893" y="1677794"/>
+            <a:ext cx="11218653" cy="1157700"/>
           </a:xfrm>
         </p:spPr>
         <p:txBody>
@@ -872,8 +1362,8 @@
         </p:nvSpPr>
         <p:spPr>
           <a:xfrm>
-            <a:off x="1369182" y="3060530"/>
-            <a:ext cx="6389479" cy="1380238"/>
+            <a:off x="1979774" y="3060530"/>
+            <a:ext cx="9238890" cy="1380238"/>
           </a:xfrm>
         </p:spPr>
         <p:txBody>
@@ -889,7 +1379,7 @@
                 </a:solidFill>
               </a:defRPr>
             </a:lvl1pPr>
-            <a:lvl2pPr marL="457200" indent="0" algn="ctr">
+            <a:lvl2pPr marL="457195" indent="0" algn="ctr">
               <a:buNone/>
               <a:defRPr>
                 <a:solidFill>
@@ -899,7 +1389,7 @@
                 </a:solidFill>
               </a:defRPr>
             </a:lvl2pPr>
-            <a:lvl3pPr marL="914400" indent="0" algn="ctr">
+            <a:lvl3pPr marL="914390" indent="0" algn="ctr">
               <a:buNone/>
               <a:defRPr>
                 <a:solidFill>
@@ -909,7 +1399,7 @@
                 </a:solidFill>
               </a:defRPr>
             </a:lvl3pPr>
-            <a:lvl4pPr marL="1371600" indent="0" algn="ctr">
+            <a:lvl4pPr marL="1371585" indent="0" algn="ctr">
               <a:buNone/>
               <a:defRPr>
                 <a:solidFill>
@@ -919,7 +1409,7 @@
                 </a:solidFill>
               </a:defRPr>
             </a:lvl4pPr>
-            <a:lvl5pPr marL="1828800" indent="0" algn="ctr">
+            <a:lvl5pPr marL="1828781" indent="0" algn="ctr">
               <a:buNone/>
               <a:defRPr>
                 <a:solidFill>
@@ -929,7 +1419,7 @@
                 </a:solidFill>
               </a:defRPr>
             </a:lvl5pPr>
-            <a:lvl6pPr marL="2286000" indent="0" algn="ctr">
+            <a:lvl6pPr marL="2285975" indent="0" algn="ctr">
               <a:buNone/>
               <a:defRPr>
                 <a:solidFill>
@@ -939,7 +1429,7 @@
                 </a:solidFill>
               </a:defRPr>
             </a:lvl6pPr>
-            <a:lvl7pPr marL="2743200" indent="0" algn="ctr">
+            <a:lvl7pPr marL="2743171" indent="0" algn="ctr">
               <a:buNone/>
               <a:defRPr>
                 <a:solidFill>
@@ -949,7 +1439,7 @@
                 </a:solidFill>
               </a:defRPr>
             </a:lvl7pPr>
-            <a:lvl8pPr marL="3200400" indent="0" algn="ctr">
+            <a:lvl8pPr marL="3200366" indent="0" algn="ctr">
               <a:buNone/>
               <a:defRPr>
                 <a:solidFill>
@@ -959,7 +1449,7 @@
                 </a:solidFill>
               </a:defRPr>
             </a:lvl8pPr>
-            <a:lvl9pPr marL="3657600" indent="0" algn="ctr">
+            <a:lvl9pPr marL="3657561" indent="0" algn="ctr">
               <a:buNone/>
               <a:defRPr>
                 <a:solidFill>
@@ -995,7 +1485,7 @@
           <a:p>
             <a:fld id="{5BCAD085-E8A6-8845-BD4E-CB4CCA059FC4}" type="datetimeFigureOut">
               <a:rPr lang="en-US" smtClean="0"/>
-              <a:t>7/4/2026</a:t>
+              <a:t>7/7/2026</a:t>
             </a:fld>
             <a:endParaRPr lang="en-US"/>
           </a:p>
@@ -1163,7 +1653,7 @@
           <a:p>
             <a:fld id="{5BCAD085-E8A6-8845-BD4E-CB4CCA059FC4}" type="datetimeFigureOut">
               <a:rPr lang="en-US" smtClean="0"/>
-              <a:t>7/4/2026</a:t>
+              <a:t>7/7/2026</a:t>
             </a:fld>
             <a:endParaRPr lang="en-US"/>
           </a:p>
@@ -1253,8 +1743,8 @@
         </p:nvSpPr>
         <p:spPr>
           <a:xfrm>
-            <a:off x="6617676" y="216294"/>
-            <a:ext cx="2053761" cy="4608293"/>
+            <a:off x="9568855" y="216298"/>
+            <a:ext cx="2969643" cy="4608293"/>
           </a:xfrm>
         </p:spPr>
         <p:txBody>
@@ -1280,8 +1770,8 @@
         </p:nvSpPr>
         <p:spPr>
           <a:xfrm>
-            <a:off x="456393" y="216294"/>
-            <a:ext cx="6009153" cy="4608293"/>
+            <a:off x="659925" y="216298"/>
+            <a:ext cx="8688957" cy="4608293"/>
           </a:xfrm>
         </p:spPr>
         <p:txBody>
@@ -1341,7 +1831,7 @@
           <a:p>
             <a:fld id="{5BCAD085-E8A6-8845-BD4E-CB4CCA059FC4}" type="datetimeFigureOut">
               <a:rPr lang="en-US" smtClean="0"/>
-              <a:t>7/4/2026</a:t>
+              <a:t>7/7/2026</a:t>
             </a:fld>
             <a:endParaRPr lang="en-US"/>
           </a:p>
@@ -1509,7 +1999,7 @@
           <a:p>
             <a:fld id="{5BCAD085-E8A6-8845-BD4E-CB4CCA059FC4}" type="datetimeFigureOut">
               <a:rPr lang="en-US" smtClean="0"/>
-              <a:t>7/4/2026</a:t>
+              <a:t>7/7/2026</a:t>
             </a:fld>
             <a:endParaRPr lang="en-US"/>
           </a:p>
@@ -1599,8 +2089,8 @@
         </p:nvSpPr>
         <p:spPr>
           <a:xfrm>
-            <a:off x="721045" y="3470604"/>
-            <a:ext cx="7758653" cy="1072683"/>
+            <a:off x="1042598" y="3470608"/>
+            <a:ext cx="11218653" cy="1072683"/>
           </a:xfrm>
         </p:spPr>
         <p:txBody>
@@ -1630,8 +2120,8 @@
         </p:nvSpPr>
         <p:spPr>
           <a:xfrm>
-            <a:off x="721045" y="2289150"/>
-            <a:ext cx="7758653" cy="1181453"/>
+            <a:off x="1042598" y="2289154"/>
+            <a:ext cx="11218653" cy="1181453"/>
           </a:xfrm>
         </p:spPr>
         <p:txBody>
@@ -1647,7 +2137,7 @@
                 </a:solidFill>
               </a:defRPr>
             </a:lvl1pPr>
-            <a:lvl2pPr marL="457200" indent="0">
+            <a:lvl2pPr marL="457195" indent="0">
               <a:buNone/>
               <a:defRPr sz="1800">
                 <a:solidFill>
@@ -1657,7 +2147,7 @@
                 </a:solidFill>
               </a:defRPr>
             </a:lvl2pPr>
-            <a:lvl3pPr marL="914400" indent="0">
+            <a:lvl3pPr marL="914390" indent="0">
               <a:buNone/>
               <a:defRPr sz="1600">
                 <a:solidFill>
@@ -1667,7 +2157,7 @@
                 </a:solidFill>
               </a:defRPr>
             </a:lvl3pPr>
-            <a:lvl4pPr marL="1371600" indent="0">
+            <a:lvl4pPr marL="1371585" indent="0">
               <a:buNone/>
               <a:defRPr sz="1400">
                 <a:solidFill>
@@ -1677,7 +2167,7 @@
                 </a:solidFill>
               </a:defRPr>
             </a:lvl4pPr>
-            <a:lvl5pPr marL="1828800" indent="0">
+            <a:lvl5pPr marL="1828781" indent="0">
               <a:buNone/>
               <a:defRPr sz="1400">
                 <a:solidFill>
@@ -1687,7 +2177,7 @@
                 </a:solidFill>
               </a:defRPr>
             </a:lvl5pPr>
-            <a:lvl6pPr marL="2286000" indent="0">
+            <a:lvl6pPr marL="2285975" indent="0">
               <a:buNone/>
               <a:defRPr sz="1400">
                 <a:solidFill>
@@ -1697,7 +2187,7 @@
                 </a:solidFill>
               </a:defRPr>
             </a:lvl6pPr>
-            <a:lvl7pPr marL="2743200" indent="0">
+            <a:lvl7pPr marL="2743171" indent="0">
               <a:buNone/>
               <a:defRPr sz="1400">
                 <a:solidFill>
@@ -1707,7 +2197,7 @@
                 </a:solidFill>
               </a:defRPr>
             </a:lvl7pPr>
-            <a:lvl8pPr marL="3200400" indent="0">
+            <a:lvl8pPr marL="3200366" indent="0">
               <a:buNone/>
               <a:defRPr sz="1400">
                 <a:solidFill>
@@ -1717,7 +2207,7 @@
                 </a:solidFill>
               </a:defRPr>
             </a:lvl8pPr>
-            <a:lvl9pPr marL="3657600" indent="0">
+            <a:lvl9pPr marL="3657561" indent="0">
               <a:buNone/>
               <a:defRPr sz="1400">
                 <a:solidFill>
@@ -1754,7 +2244,7 @@
           <a:p>
             <a:fld id="{5BCAD085-E8A6-8845-BD4E-CB4CCA059FC4}" type="datetimeFigureOut">
               <a:rPr lang="en-US" smtClean="0"/>
-              <a:t>7/4/2026</a:t>
+              <a:t>7/7/2026</a:t>
             </a:fld>
             <a:endParaRPr lang="en-US"/>
           </a:p>
@@ -1866,8 +2356,8 @@
         </p:nvSpPr>
         <p:spPr>
           <a:xfrm>
-            <a:off x="456399" y="1260222"/>
-            <a:ext cx="4031457" cy="3564365"/>
+            <a:off x="659934" y="1260226"/>
+            <a:ext cx="5829300" cy="3564365"/>
           </a:xfrm>
         </p:spPr>
         <p:txBody>
@@ -1950,8 +2440,8 @@
         </p:nvSpPr>
         <p:spPr>
           <a:xfrm>
-            <a:off x="4639988" y="1260222"/>
-            <a:ext cx="4031457" cy="3564365"/>
+            <a:off x="6709208" y="1260226"/>
+            <a:ext cx="5829300" cy="3564365"/>
           </a:xfrm>
         </p:spPr>
         <p:txBody>
@@ -2039,7 +2529,7 @@
           <a:p>
             <a:fld id="{5BCAD085-E8A6-8845-BD4E-CB4CCA059FC4}" type="datetimeFigureOut">
               <a:rPr lang="en-US" smtClean="0"/>
-              <a:t>7/4/2026</a:t>
+              <a:t>7/7/2026</a:t>
             </a:fld>
             <a:endParaRPr lang="en-US"/>
           </a:p>
@@ -2155,8 +2645,8 @@
         </p:nvSpPr>
         <p:spPr>
           <a:xfrm>
-            <a:off x="456391" y="1208961"/>
-            <a:ext cx="4033042" cy="503836"/>
+            <a:off x="659920" y="1208961"/>
+            <a:ext cx="5831592" cy="503836"/>
           </a:xfrm>
         </p:spPr>
         <p:txBody>
@@ -2166,35 +2656,35 @@
               <a:buNone/>
               <a:defRPr sz="2400" b="1"/>
             </a:lvl1pPr>
-            <a:lvl2pPr marL="457200" indent="0">
+            <a:lvl2pPr marL="457195" indent="0">
               <a:buNone/>
               <a:defRPr sz="2000" b="1"/>
             </a:lvl2pPr>
-            <a:lvl3pPr marL="914400" indent="0">
+            <a:lvl3pPr marL="914390" indent="0">
               <a:buNone/>
               <a:defRPr sz="1800" b="1"/>
             </a:lvl3pPr>
-            <a:lvl4pPr marL="1371600" indent="0">
+            <a:lvl4pPr marL="1371585" indent="0">
               <a:buNone/>
               <a:defRPr sz="1600" b="1"/>
             </a:lvl4pPr>
-            <a:lvl5pPr marL="1828800" indent="0">
+            <a:lvl5pPr marL="1828781" indent="0">
               <a:buNone/>
               <a:defRPr sz="1600" b="1"/>
             </a:lvl5pPr>
-            <a:lvl6pPr marL="2286000" indent="0">
+            <a:lvl6pPr marL="2285975" indent="0">
               <a:buNone/>
               <a:defRPr sz="1600" b="1"/>
             </a:lvl6pPr>
-            <a:lvl7pPr marL="2743200" indent="0">
+            <a:lvl7pPr marL="2743171" indent="0">
               <a:buNone/>
               <a:defRPr sz="1600" b="1"/>
             </a:lvl7pPr>
-            <a:lvl8pPr marL="3200400" indent="0">
+            <a:lvl8pPr marL="3200366" indent="0">
               <a:buNone/>
               <a:defRPr sz="1600" b="1"/>
             </a:lvl8pPr>
-            <a:lvl9pPr marL="3657600" indent="0">
+            <a:lvl9pPr marL="3657561" indent="0">
               <a:buNone/>
               <a:defRPr sz="1600" b="1"/>
             </a:lvl9pPr>
@@ -2220,8 +2710,8 @@
         </p:nvSpPr>
         <p:spPr>
           <a:xfrm>
-            <a:off x="456391" y="1712800"/>
-            <a:ext cx="4033042" cy="3111785"/>
+            <a:off x="659920" y="1712804"/>
+            <a:ext cx="5831592" cy="3111785"/>
           </a:xfrm>
         </p:spPr>
         <p:txBody>
@@ -2304,8 +2794,8 @@
         </p:nvSpPr>
         <p:spPr>
           <a:xfrm>
-            <a:off x="4636816" y="1208961"/>
-            <a:ext cx="4034626" cy="503836"/>
+            <a:off x="6704621" y="1208961"/>
+            <a:ext cx="5833883" cy="503836"/>
           </a:xfrm>
         </p:spPr>
         <p:txBody>
@@ -2315,35 +2805,35 @@
               <a:buNone/>
               <a:defRPr sz="2400" b="1"/>
             </a:lvl1pPr>
-            <a:lvl2pPr marL="457200" indent="0">
+            <a:lvl2pPr marL="457195" indent="0">
               <a:buNone/>
               <a:defRPr sz="2000" b="1"/>
             </a:lvl2pPr>
-            <a:lvl3pPr marL="914400" indent="0">
+            <a:lvl3pPr marL="914390" indent="0">
               <a:buNone/>
               <a:defRPr sz="1800" b="1"/>
             </a:lvl3pPr>
-            <a:lvl4pPr marL="1371600" indent="0">
+            <a:lvl4pPr marL="1371585" indent="0">
               <a:buNone/>
               <a:defRPr sz="1600" b="1"/>
             </a:lvl4pPr>
-            <a:lvl5pPr marL="1828800" indent="0">
+            <a:lvl5pPr marL="1828781" indent="0">
               <a:buNone/>
               <a:defRPr sz="1600" b="1"/>
             </a:lvl5pPr>
-            <a:lvl6pPr marL="2286000" indent="0">
+            <a:lvl6pPr marL="2285975" indent="0">
               <a:buNone/>
               <a:defRPr sz="1600" b="1"/>
             </a:lvl6pPr>
-            <a:lvl7pPr marL="2743200" indent="0">
+            <a:lvl7pPr marL="2743171" indent="0">
               <a:buNone/>
               <a:defRPr sz="1600" b="1"/>
             </a:lvl7pPr>
-            <a:lvl8pPr marL="3200400" indent="0">
+            <a:lvl8pPr marL="3200366" indent="0">
               <a:buNone/>
               <a:defRPr sz="1600" b="1"/>
             </a:lvl8pPr>
-            <a:lvl9pPr marL="3657600" indent="0">
+            <a:lvl9pPr marL="3657561" indent="0">
               <a:buNone/>
               <a:defRPr sz="1600" b="1"/>
             </a:lvl9pPr>
@@ -2369,8 +2859,8 @@
         </p:nvSpPr>
         <p:spPr>
           <a:xfrm>
-            <a:off x="4636816" y="1712800"/>
-            <a:ext cx="4034626" cy="3111785"/>
+            <a:off x="6704621" y="1712804"/>
+            <a:ext cx="5833883" cy="3111785"/>
           </a:xfrm>
         </p:spPr>
         <p:txBody>
@@ -2458,7 +2948,7 @@
           <a:p>
             <a:fld id="{5BCAD085-E8A6-8845-BD4E-CB4CCA059FC4}" type="datetimeFigureOut">
               <a:rPr lang="en-US" smtClean="0"/>
-              <a:t>7/4/2026</a:t>
+              <a:t>7/7/2026</a:t>
             </a:fld>
             <a:endParaRPr lang="en-US"/>
           </a:p>
@@ -2575,7 +3065,7 @@
           <a:p>
             <a:fld id="{5BCAD085-E8A6-8845-BD4E-CB4CCA059FC4}" type="datetimeFigureOut">
               <a:rPr lang="en-US" smtClean="0"/>
-              <a:t>7/4/2026</a:t>
+              <a:t>7/7/2026</a:t>
             </a:fld>
             <a:endParaRPr lang="en-US"/>
           </a:p>
@@ -2670,7 +3160,7 @@
           <a:p>
             <a:fld id="{5BCAD085-E8A6-8845-BD4E-CB4CCA059FC4}" type="datetimeFigureOut">
               <a:rPr lang="en-US" smtClean="0"/>
-              <a:t>7/4/2026</a:t>
+              <a:t>7/7/2026</a:t>
             </a:fld>
             <a:endParaRPr lang="en-US"/>
           </a:p>
@@ -2760,8 +3250,8 @@
         </p:nvSpPr>
         <p:spPr>
           <a:xfrm>
-            <a:off x="456395" y="215039"/>
-            <a:ext cx="3002992" cy="915158"/>
+            <a:off x="659926" y="215039"/>
+            <a:ext cx="4342187" cy="915158"/>
           </a:xfrm>
         </p:spPr>
         <p:txBody>
@@ -2791,8 +3281,8 @@
         </p:nvSpPr>
         <p:spPr>
           <a:xfrm>
-            <a:off x="3568731" y="215041"/>
-            <a:ext cx="5102709" cy="4609546"/>
+            <a:off x="5160220" y="215041"/>
+            <a:ext cx="7378281" cy="4609546"/>
           </a:xfrm>
         </p:spPr>
         <p:txBody>
@@ -2875,8 +3365,8 @@
         </p:nvSpPr>
         <p:spPr>
           <a:xfrm>
-            <a:off x="456395" y="1130198"/>
-            <a:ext cx="3002992" cy="3694387"/>
+            <a:off x="659926" y="1130202"/>
+            <a:ext cx="4342187" cy="3694387"/>
           </a:xfrm>
         </p:spPr>
         <p:txBody>
@@ -2886,35 +3376,35 @@
               <a:buNone/>
               <a:defRPr sz="1400"/>
             </a:lvl1pPr>
-            <a:lvl2pPr marL="457200" indent="0">
+            <a:lvl2pPr marL="457195" indent="0">
               <a:buNone/>
               <a:defRPr sz="1200"/>
             </a:lvl2pPr>
-            <a:lvl3pPr marL="914400" indent="0">
+            <a:lvl3pPr marL="914390" indent="0">
               <a:buNone/>
               <a:defRPr sz="1000"/>
             </a:lvl3pPr>
-            <a:lvl4pPr marL="1371600" indent="0">
+            <a:lvl4pPr marL="1371585" indent="0">
               <a:buNone/>
               <a:defRPr sz="900"/>
             </a:lvl4pPr>
-            <a:lvl5pPr marL="1828800" indent="0">
+            <a:lvl5pPr marL="1828781" indent="0">
               <a:buNone/>
               <a:defRPr sz="900"/>
             </a:lvl5pPr>
-            <a:lvl6pPr marL="2286000" indent="0">
+            <a:lvl6pPr marL="2285975" indent="0">
               <a:buNone/>
               <a:defRPr sz="900"/>
             </a:lvl6pPr>
-            <a:lvl7pPr marL="2743200" indent="0">
+            <a:lvl7pPr marL="2743171" indent="0">
               <a:buNone/>
               <a:defRPr sz="900"/>
             </a:lvl7pPr>
-            <a:lvl8pPr marL="3200400" indent="0">
+            <a:lvl8pPr marL="3200366" indent="0">
               <a:buNone/>
               <a:defRPr sz="900"/>
             </a:lvl8pPr>
-            <a:lvl9pPr marL="3657600" indent="0">
+            <a:lvl9pPr marL="3657561" indent="0">
               <a:buNone/>
               <a:defRPr sz="900"/>
             </a:lvl9pPr>
@@ -2945,7 +3435,7 @@
           <a:p>
             <a:fld id="{5BCAD085-E8A6-8845-BD4E-CB4CCA059FC4}" type="datetimeFigureOut">
               <a:rPr lang="en-US" smtClean="0"/>
-              <a:t>7/4/2026</a:t>
+              <a:t>7/7/2026</a:t>
             </a:fld>
             <a:endParaRPr lang="en-US"/>
           </a:p>
@@ -3035,8 +3525,8 @@
         </p:nvSpPr>
         <p:spPr>
           <a:xfrm>
-            <a:off x="1789118" y="3780655"/>
-            <a:ext cx="5476696" cy="446326"/>
+            <a:off x="2586982" y="3780655"/>
+            <a:ext cx="7919048" cy="446326"/>
           </a:xfrm>
         </p:spPr>
         <p:txBody>
@@ -3066,8 +3556,8 @@
         </p:nvSpPr>
         <p:spPr>
           <a:xfrm>
-            <a:off x="1789118" y="482586"/>
-            <a:ext cx="5476696" cy="3240559"/>
+            <a:off x="2586982" y="482590"/>
+            <a:ext cx="7919048" cy="3240559"/>
           </a:xfrm>
         </p:spPr>
         <p:txBody>
@@ -3077,35 +3567,35 @@
               <a:buNone/>
               <a:defRPr sz="3200"/>
             </a:lvl1pPr>
-            <a:lvl2pPr marL="457200" indent="0">
+            <a:lvl2pPr marL="457195" indent="0">
               <a:buNone/>
               <a:defRPr sz="2800"/>
             </a:lvl2pPr>
-            <a:lvl3pPr marL="914400" indent="0">
+            <a:lvl3pPr marL="914390" indent="0">
               <a:buNone/>
               <a:defRPr sz="2400"/>
             </a:lvl3pPr>
-            <a:lvl4pPr marL="1371600" indent="0">
+            <a:lvl4pPr marL="1371585" indent="0">
               <a:buNone/>
               <a:defRPr sz="2000"/>
             </a:lvl4pPr>
-            <a:lvl5pPr marL="1828800" indent="0">
+            <a:lvl5pPr marL="1828781" indent="0">
               <a:buNone/>
               <a:defRPr sz="2000"/>
             </a:lvl5pPr>
-            <a:lvl6pPr marL="2286000" indent="0">
+            <a:lvl6pPr marL="2285975" indent="0">
               <a:buNone/>
               <a:defRPr sz="2000"/>
             </a:lvl6pPr>
-            <a:lvl7pPr marL="2743200" indent="0">
+            <a:lvl7pPr marL="2743171" indent="0">
               <a:buNone/>
               <a:defRPr sz="2000"/>
             </a:lvl7pPr>
-            <a:lvl8pPr marL="3200400" indent="0">
+            <a:lvl8pPr marL="3200366" indent="0">
               <a:buNone/>
               <a:defRPr sz="2000"/>
             </a:lvl8pPr>
-            <a:lvl9pPr marL="3657600" indent="0">
+            <a:lvl9pPr marL="3657561" indent="0">
               <a:buNone/>
               <a:defRPr sz="2000"/>
             </a:lvl9pPr>
@@ -3127,8 +3617,8 @@
         </p:nvSpPr>
         <p:spPr>
           <a:xfrm>
-            <a:off x="1789118" y="4226980"/>
-            <a:ext cx="5476696" cy="633859"/>
+            <a:off x="2586982" y="4226984"/>
+            <a:ext cx="7919048" cy="633859"/>
           </a:xfrm>
         </p:spPr>
         <p:txBody>
@@ -3138,35 +3628,35 @@
               <a:buNone/>
               <a:defRPr sz="1400"/>
             </a:lvl1pPr>
-            <a:lvl2pPr marL="457200" indent="0">
+            <a:lvl2pPr marL="457195" indent="0">
               <a:buNone/>
               <a:defRPr sz="1200"/>
             </a:lvl2pPr>
-            <a:lvl3pPr marL="914400" indent="0">
+            <a:lvl3pPr marL="914390" indent="0">
               <a:buNone/>
               <a:defRPr sz="1000"/>
             </a:lvl3pPr>
-            <a:lvl4pPr marL="1371600" indent="0">
+            <a:lvl4pPr marL="1371585" indent="0">
               <a:buNone/>
               <a:defRPr sz="900"/>
             </a:lvl4pPr>
-            <a:lvl5pPr marL="1828800" indent="0">
+            <a:lvl5pPr marL="1828781" indent="0">
               <a:buNone/>
               <a:defRPr sz="900"/>
             </a:lvl5pPr>
-            <a:lvl6pPr marL="2286000" indent="0">
+            <a:lvl6pPr marL="2285975" indent="0">
               <a:buNone/>
               <a:defRPr sz="900"/>
             </a:lvl6pPr>
-            <a:lvl7pPr marL="2743200" indent="0">
+            <a:lvl7pPr marL="2743171" indent="0">
               <a:buNone/>
               <a:defRPr sz="900"/>
             </a:lvl7pPr>
-            <a:lvl8pPr marL="3200400" indent="0">
+            <a:lvl8pPr marL="3200366" indent="0">
               <a:buNone/>
               <a:defRPr sz="900"/>
             </a:lvl8pPr>
-            <a:lvl9pPr marL="3657600" indent="0">
+            <a:lvl9pPr marL="3657561" indent="0">
               <a:buNone/>
               <a:defRPr sz="900"/>
             </a:lvl9pPr>
@@ -3197,7 +3687,7 @@
           <a:p>
             <a:fld id="{5BCAD085-E8A6-8845-BD4E-CB4CCA059FC4}" type="datetimeFigureOut">
               <a:rPr lang="en-US" smtClean="0"/>
-              <a:t>7/4/2026</a:t>
+              <a:t>7/7/2026</a:t>
             </a:fld>
             <a:endParaRPr lang="en-US"/>
           </a:p>
@@ -3292,8 +3782,8 @@
         </p:nvSpPr>
         <p:spPr>
           <a:xfrm>
-            <a:off x="456392" y="216293"/>
-            <a:ext cx="8215044" cy="900154"/>
+            <a:off x="659922" y="216293"/>
+            <a:ext cx="11878573" cy="900154"/>
           </a:xfrm>
           <a:prstGeom prst="rect">
             <a:avLst/>
@@ -3324,8 +3814,8 @@
         </p:nvSpPr>
         <p:spPr>
           <a:xfrm>
-            <a:off x="456392" y="1260222"/>
-            <a:ext cx="8215044" cy="3564365"/>
+            <a:off x="659922" y="1260226"/>
+            <a:ext cx="11878573" cy="3564365"/>
           </a:xfrm>
           <a:prstGeom prst="rect">
             <a:avLst/>
@@ -3385,8 +3875,8 @@
         </p:nvSpPr>
         <p:spPr>
           <a:xfrm>
-            <a:off x="456392" y="5005866"/>
-            <a:ext cx="2129826" cy="287549"/>
+            <a:off x="659923" y="5005870"/>
+            <a:ext cx="3079630" cy="287549"/>
           </a:xfrm>
           <a:prstGeom prst="rect">
             <a:avLst/>
@@ -3408,7 +3898,7 @@
           <a:p>
             <a:fld id="{5BCAD085-E8A6-8845-BD4E-CB4CCA059FC4}" type="datetimeFigureOut">
               <a:rPr lang="en-US" smtClean="0"/>
-              <a:t>7/4/2026</a:t>
+              <a:t>7/7/2026</a:t>
             </a:fld>
             <a:endParaRPr lang="en-US"/>
           </a:p>
@@ -3426,8 +3916,8 @@
         </p:nvSpPr>
         <p:spPr>
           <a:xfrm>
-            <a:off x="3118682" y="5005866"/>
-            <a:ext cx="2890479" cy="287549"/>
+            <a:off x="4509470" y="5005870"/>
+            <a:ext cx="4179499" cy="287549"/>
           </a:xfrm>
           <a:prstGeom prst="rect">
             <a:avLst/>
@@ -3463,8 +3953,8 @@
         </p:nvSpPr>
         <p:spPr>
           <a:xfrm>
-            <a:off x="6541610" y="5005866"/>
-            <a:ext cx="2129826" cy="287549"/>
+            <a:off x="9458865" y="5005870"/>
+            <a:ext cx="3079630" cy="287549"/>
           </a:xfrm>
           <a:prstGeom prst="rect">
             <a:avLst/>
@@ -3515,7 +4005,7 @@
   </p:sldLayoutIdLst>
   <p:txStyles>
     <p:titleStyle>
-      <a:lvl1pPr algn="ctr" defTabSz="457200" rtl="0" eaLnBrk="1" latinLnBrk="0" hangingPunct="1">
+      <a:lvl1pPr algn="ctr" defTabSz="457195" rtl="0" eaLnBrk="1" latinLnBrk="0" hangingPunct="1">
         <a:spcBef>
           <a:spcPct val="0"/>
         </a:spcBef>
@@ -3531,7 +4021,7 @@
       </a:lvl1pPr>
     </p:titleStyle>
     <p:bodyStyle>
-      <a:lvl1pPr marL="342900" indent="-342900" algn="l" defTabSz="457200" rtl="0" eaLnBrk="1" latinLnBrk="0" hangingPunct="1">
+      <a:lvl1pPr marL="342897" indent="-342897" algn="l" defTabSz="457195" rtl="0" eaLnBrk="1" latinLnBrk="0" hangingPunct="1">
         <a:spcBef>
           <a:spcPct val="20000"/>
         </a:spcBef>
@@ -3546,7 +4036,7 @@
           <a:cs typeface="+mn-cs"/>
         </a:defRPr>
       </a:lvl1pPr>
-      <a:lvl2pPr marL="742950" indent="-285750" algn="l" defTabSz="457200" rtl="0" eaLnBrk="1" latinLnBrk="0" hangingPunct="1">
+      <a:lvl2pPr marL="742942" indent="-285747" algn="l" defTabSz="457195" rtl="0" eaLnBrk="1" latinLnBrk="0" hangingPunct="1">
         <a:spcBef>
           <a:spcPct val="20000"/>
         </a:spcBef>
@@ -3561,7 +4051,7 @@
           <a:cs typeface="+mn-cs"/>
         </a:defRPr>
       </a:lvl2pPr>
-      <a:lvl3pPr marL="1143000" indent="-228600" algn="l" defTabSz="457200" rtl="0" eaLnBrk="1" latinLnBrk="0" hangingPunct="1">
+      <a:lvl3pPr marL="1142988" indent="-228598" algn="l" defTabSz="457195" rtl="0" eaLnBrk="1" latinLnBrk="0" hangingPunct="1">
         <a:spcBef>
           <a:spcPct val="20000"/>
         </a:spcBef>
@@ -3576,7 +4066,7 @@
           <a:cs typeface="+mn-cs"/>
         </a:defRPr>
       </a:lvl3pPr>
-      <a:lvl4pPr marL="1600200" indent="-228600" algn="l" defTabSz="457200" rtl="0" eaLnBrk="1" latinLnBrk="0" hangingPunct="1">
+      <a:lvl4pPr marL="1600183" indent="-228598" algn="l" defTabSz="457195" rtl="0" eaLnBrk="1" latinLnBrk="0" hangingPunct="1">
         <a:spcBef>
           <a:spcPct val="20000"/>
         </a:spcBef>
@@ -3591,7 +4081,7 @@
           <a:cs typeface="+mn-cs"/>
         </a:defRPr>
       </a:lvl4pPr>
-      <a:lvl5pPr marL="2057400" indent="-228600" algn="l" defTabSz="457200" rtl="0" eaLnBrk="1" latinLnBrk="0" hangingPunct="1">
+      <a:lvl5pPr marL="2057378" indent="-228598" algn="l" defTabSz="457195" rtl="0" eaLnBrk="1" latinLnBrk="0" hangingPunct="1">
         <a:spcBef>
           <a:spcPct val="20000"/>
         </a:spcBef>
@@ -3606,7 +4096,7 @@
           <a:cs typeface="+mn-cs"/>
         </a:defRPr>
       </a:lvl5pPr>
-      <a:lvl6pPr marL="2514600" indent="-228600" algn="l" defTabSz="457200" rtl="0" eaLnBrk="1" latinLnBrk="0" hangingPunct="1">
+      <a:lvl6pPr marL="2514573" indent="-228598" algn="l" defTabSz="457195" rtl="0" eaLnBrk="1" latinLnBrk="0" hangingPunct="1">
         <a:spcBef>
           <a:spcPct val="20000"/>
         </a:spcBef>
@@ -3621,7 +4111,7 @@
           <a:cs typeface="+mn-cs"/>
         </a:defRPr>
       </a:lvl6pPr>
-      <a:lvl7pPr marL="2971800" indent="-228600" algn="l" defTabSz="457200" rtl="0" eaLnBrk="1" latinLnBrk="0" hangingPunct="1">
+      <a:lvl7pPr marL="2971769" indent="-228598" algn="l" defTabSz="457195" rtl="0" eaLnBrk="1" latinLnBrk="0" hangingPunct="1">
         <a:spcBef>
           <a:spcPct val="20000"/>
         </a:spcBef>
@@ -3636,7 +4126,7 @@
           <a:cs typeface="+mn-cs"/>
         </a:defRPr>
       </a:lvl7pPr>
-      <a:lvl8pPr marL="3429000" indent="-228600" algn="l" defTabSz="457200" rtl="0" eaLnBrk="1" latinLnBrk="0" hangingPunct="1">
+      <a:lvl8pPr marL="3428963" indent="-228598" algn="l" defTabSz="457195" rtl="0" eaLnBrk="1" latinLnBrk="0" hangingPunct="1">
         <a:spcBef>
           <a:spcPct val="20000"/>
         </a:spcBef>
@@ -3651,7 +4141,7 @@
           <a:cs typeface="+mn-cs"/>
         </a:defRPr>
       </a:lvl8pPr>
-      <a:lvl9pPr marL="3886200" indent="-228600" algn="l" defTabSz="457200" rtl="0" eaLnBrk="1" latinLnBrk="0" hangingPunct="1">
+      <a:lvl9pPr marL="3886159" indent="-228598" algn="l" defTabSz="457195" rtl="0" eaLnBrk="1" latinLnBrk="0" hangingPunct="1">
         <a:spcBef>
           <a:spcPct val="20000"/>
         </a:spcBef>
@@ -3671,7 +4161,7 @@
       <a:defPPr>
         <a:defRPr lang="en-US"/>
       </a:defPPr>
-      <a:lvl1pPr marL="0" algn="l" defTabSz="457200" rtl="0" eaLnBrk="1" latinLnBrk="0" hangingPunct="1">
+      <a:lvl1pPr marL="0" algn="l" defTabSz="457195" rtl="0" eaLnBrk="1" latinLnBrk="0" hangingPunct="1">
         <a:defRPr sz="1800" kern="1200">
           <a:solidFill>
             <a:schemeClr val="tx1"/>
@@ -3681,7 +4171,7 @@
           <a:cs typeface="+mn-cs"/>
         </a:defRPr>
       </a:lvl1pPr>
-      <a:lvl2pPr marL="457200" algn="l" defTabSz="457200" rtl="0" eaLnBrk="1" latinLnBrk="0" hangingPunct="1">
+      <a:lvl2pPr marL="457195" algn="l" defTabSz="457195" rtl="0" eaLnBrk="1" latinLnBrk="0" hangingPunct="1">
         <a:defRPr sz="1800" kern="1200">
           <a:solidFill>
             <a:schemeClr val="tx1"/>
@@ -3691,7 +4181,7 @@
           <a:cs typeface="+mn-cs"/>
         </a:defRPr>
       </a:lvl2pPr>
-      <a:lvl3pPr marL="914400" algn="l" defTabSz="457200" rtl="0" eaLnBrk="1" latinLnBrk="0" hangingPunct="1">
+      <a:lvl3pPr marL="914390" algn="l" defTabSz="457195" rtl="0" eaLnBrk="1" latinLnBrk="0" hangingPunct="1">
         <a:defRPr sz="1800" kern="1200">
           <a:solidFill>
             <a:schemeClr val="tx1"/>
@@ -3701,7 +4191,7 @@
           <a:cs typeface="+mn-cs"/>
         </a:defRPr>
       </a:lvl3pPr>
-      <a:lvl4pPr marL="1371600" algn="l" defTabSz="457200" rtl="0" eaLnBrk="1" latinLnBrk="0" hangingPunct="1">
+      <a:lvl4pPr marL="1371585" algn="l" defTabSz="457195" rtl="0" eaLnBrk="1" latinLnBrk="0" hangingPunct="1">
         <a:defRPr sz="1800" kern="1200">
           <a:solidFill>
             <a:schemeClr val="tx1"/>
@@ -3711,7 +4201,7 @@
           <a:cs typeface="+mn-cs"/>
         </a:defRPr>
       </a:lvl4pPr>
-      <a:lvl5pPr marL="1828800" algn="l" defTabSz="457200" rtl="0" eaLnBrk="1" latinLnBrk="0" hangingPunct="1">
+      <a:lvl5pPr marL="1828781" algn="l" defTabSz="457195" rtl="0" eaLnBrk="1" latinLnBrk="0" hangingPunct="1">
         <a:defRPr sz="1800" kern="1200">
           <a:solidFill>
             <a:schemeClr val="tx1"/>
@@ -3721,7 +4211,7 @@
           <a:cs typeface="+mn-cs"/>
         </a:defRPr>
       </a:lvl5pPr>
-      <a:lvl6pPr marL="2286000" algn="l" defTabSz="457200" rtl="0" eaLnBrk="1" latinLnBrk="0" hangingPunct="1">
+      <a:lvl6pPr marL="2285975" algn="l" defTabSz="457195" rtl="0" eaLnBrk="1" latinLnBrk="0" hangingPunct="1">
         <a:defRPr sz="1800" kern="1200">
           <a:solidFill>
             <a:schemeClr val="tx1"/>
@@ -3731,7 +4221,7 @@
           <a:cs typeface="+mn-cs"/>
         </a:defRPr>
       </a:lvl6pPr>
-      <a:lvl7pPr marL="2743200" algn="l" defTabSz="457200" rtl="0" eaLnBrk="1" latinLnBrk="0" hangingPunct="1">
+      <a:lvl7pPr marL="2743171" algn="l" defTabSz="457195" rtl="0" eaLnBrk="1" latinLnBrk="0" hangingPunct="1">
         <a:defRPr sz="1800" kern="1200">
           <a:solidFill>
             <a:schemeClr val="tx1"/>
@@ -3741,7 +4231,7 @@
           <a:cs typeface="+mn-cs"/>
         </a:defRPr>
       </a:lvl7pPr>
-      <a:lvl8pPr marL="3200400" algn="l" defTabSz="457200" rtl="0" eaLnBrk="1" latinLnBrk="0" hangingPunct="1">
+      <a:lvl8pPr marL="3200366" algn="l" defTabSz="457195" rtl="0" eaLnBrk="1" latinLnBrk="0" hangingPunct="1">
         <a:defRPr sz="1800" kern="1200">
           <a:solidFill>
             <a:schemeClr val="tx1"/>
@@ -3751,7 +4241,7 @@
           <a:cs typeface="+mn-cs"/>
         </a:defRPr>
       </a:lvl8pPr>
-      <a:lvl9pPr marL="3657600" algn="l" defTabSz="457200" rtl="0" eaLnBrk="1" latinLnBrk="0" hangingPunct="1">
+      <a:lvl9pPr marL="3657561" algn="l" defTabSz="457195" rtl="0" eaLnBrk="1" latinLnBrk="0" hangingPunct="1">
         <a:defRPr sz="1800" kern="1200">
           <a:solidFill>
             <a:schemeClr val="tx1"/>
@@ -3799,7 +4289,7 @@
         </p:nvSpPr>
         <p:spPr>
           <a:xfrm>
-            <a:off x="179033" y="1960460"/>
+            <a:off x="110802" y="1960460"/>
             <a:ext cx="2360618" cy="5466616"/>
           </a:xfrm>
           <a:prstGeom prst="rect">
@@ -3830,7 +4320,7 @@
         </p:nvSpPr>
         <p:spPr>
           <a:xfrm>
-            <a:off x="267384" y="3023987"/>
+            <a:off x="199156" y="3023990"/>
             <a:ext cx="2166723" cy="4294883"/>
           </a:xfrm>
           <a:prstGeom prst="rect">
@@ -3861,7 +4351,7 @@
         </p:nvSpPr>
         <p:spPr>
           <a:xfrm>
-            <a:off x="403809" y="4837123"/>
+            <a:off x="335578" y="4837125"/>
             <a:ext cx="1892808" cy="2190001"/>
           </a:xfrm>
           <a:prstGeom prst="rect">
@@ -3894,7 +4384,7 @@
         </p:nvCxnSpPr>
         <p:spPr>
           <a:xfrm flipH="1">
-            <a:off x="787611" y="192248"/>
+            <a:off x="719382" y="192250"/>
             <a:ext cx="2807" cy="4129037"/>
           </a:xfrm>
           <a:prstGeom prst="line">
@@ -3918,7 +4408,7 @@
         </p:nvCxnSpPr>
         <p:spPr>
           <a:xfrm>
-            <a:off x="2022210" y="187630"/>
+            <a:off x="1953979" y="187632"/>
             <a:ext cx="0" cy="5893829"/>
           </a:xfrm>
           <a:prstGeom prst="line">
@@ -3942,7 +4432,7 @@
         </p:nvCxnSpPr>
         <p:spPr>
           <a:xfrm flipH="1">
-            <a:off x="617020" y="4307532"/>
+            <a:off x="548789" y="4307535"/>
             <a:ext cx="173390" cy="279227"/>
           </a:xfrm>
           <a:prstGeom prst="line">
@@ -3964,7 +4454,7 @@
         </p:nvCxnSpPr>
         <p:spPr>
           <a:xfrm>
-            <a:off x="632917" y="4562785"/>
+            <a:off x="564686" y="4562785"/>
             <a:ext cx="0" cy="1504188"/>
           </a:xfrm>
           <a:prstGeom prst="line">
@@ -3986,7 +4476,7 @@
         </p:nvSpPr>
         <p:spPr>
           <a:xfrm>
-            <a:off x="576544" y="4461864"/>
+            <a:off x="508313" y="4461864"/>
             <a:ext cx="146304" cy="146304"/>
           </a:xfrm>
           <a:prstGeom prst="ellipse">
@@ -4017,7 +4507,7 @@
         </p:nvSpPr>
         <p:spPr>
           <a:xfrm>
-            <a:off x="744986" y="4463691"/>
+            <a:off x="676755" y="4463692"/>
             <a:ext cx="146304" cy="146304"/>
           </a:xfrm>
           <a:prstGeom prst="ellipse">
@@ -4048,7 +4538,7 @@
         </p:nvSpPr>
         <p:spPr>
           <a:xfrm>
-            <a:off x="927502" y="4466455"/>
+            <a:off x="859271" y="4466455"/>
             <a:ext cx="146304" cy="146304"/>
           </a:xfrm>
           <a:prstGeom prst="ellipse">
@@ -4079,7 +4569,7 @@
         </p:nvSpPr>
         <p:spPr>
           <a:xfrm>
-            <a:off x="326821" y="4762854"/>
+            <a:off x="258593" y="4762854"/>
             <a:ext cx="2039363" cy="2330636"/>
           </a:xfrm>
           <a:prstGeom prst="rect">
@@ -4110,7 +4600,7 @@
         </p:nvSpPr>
         <p:spPr>
           <a:xfrm>
-            <a:off x="435559" y="1025863"/>
+            <a:off x="367328" y="1025863"/>
             <a:ext cx="704088" cy="644652"/>
           </a:xfrm>
           <a:prstGeom prst="triangle">
@@ -4143,7 +4633,7 @@
         </p:nvSpPr>
         <p:spPr>
           <a:xfrm>
-            <a:off x="435559" y="3491413"/>
+            <a:off x="367328" y="3491413"/>
             <a:ext cx="704088" cy="644652"/>
           </a:xfrm>
           <a:prstGeom prst="triangle">
@@ -4176,7 +4666,7 @@
         </p:nvSpPr>
         <p:spPr>
           <a:xfrm>
-            <a:off x="1889622" y="1082251"/>
+            <a:off x="1821391" y="1082252"/>
             <a:ext cx="274320" cy="580644"/>
           </a:xfrm>
           <a:prstGeom prst="roundRect">
@@ -4209,7 +4699,7 @@
         </p:nvSpPr>
         <p:spPr>
           <a:xfrm>
-            <a:off x="1889622" y="2218221"/>
+            <a:off x="1821391" y="2218222"/>
             <a:ext cx="274320" cy="580644"/>
           </a:xfrm>
           <a:prstGeom prst="roundRect">
@@ -4242,7 +4732,7 @@
         </p:nvSpPr>
         <p:spPr>
           <a:xfrm>
-            <a:off x="1889622" y="3593521"/>
+            <a:off x="1821391" y="3483793"/>
             <a:ext cx="274320" cy="580644"/>
           </a:xfrm>
           <a:prstGeom prst="roundRect">
@@ -4275,7 +4765,7 @@
         </p:nvSpPr>
         <p:spPr>
           <a:xfrm>
-            <a:off x="1889622" y="5083739"/>
+            <a:off x="1821391" y="5083739"/>
             <a:ext cx="274320" cy="580644"/>
           </a:xfrm>
           <a:prstGeom prst="roundRect">
@@ -4308,7 +4798,7 @@
         </p:nvSpPr>
         <p:spPr>
           <a:xfrm>
-            <a:off x="513791" y="5046147"/>
+            <a:off x="445560" y="5046147"/>
             <a:ext cx="278892" cy="603504"/>
           </a:xfrm>
           <a:prstGeom prst="roundRect">
@@ -4341,7 +4831,7 @@
         </p:nvSpPr>
         <p:spPr>
           <a:xfrm>
-            <a:off x="485976" y="5955725"/>
+            <a:off x="417748" y="5955728"/>
             <a:ext cx="1724107" cy="807829"/>
           </a:xfrm>
           <a:prstGeom prst="rect">
@@ -4376,7 +4866,7 @@
         </p:nvSpPr>
         <p:spPr>
           <a:xfrm>
-            <a:off x="1175112" y="596731"/>
+            <a:off x="1106883" y="596731"/>
             <a:ext cx="484107" cy="261610"/>
           </a:xfrm>
           <a:prstGeom prst="rect">
@@ -4412,7 +4902,7 @@
         </p:nvSpPr>
         <p:spPr>
           <a:xfrm>
-            <a:off x="916528" y="975080"/>
+            <a:off x="848299" y="975082"/>
             <a:ext cx="572273" cy="246221"/>
           </a:xfrm>
           <a:prstGeom prst="rect">
@@ -4448,8 +4938,8 @@
         </p:nvSpPr>
         <p:spPr>
           <a:xfrm rot="16200000">
-            <a:off x="1458863" y="1254340"/>
-            <a:ext cx="528991" cy="253916"/>
+            <a:off x="1390633" y="1254340"/>
+            <a:ext cx="528992" cy="253916"/>
           </a:xfrm>
           <a:prstGeom prst="rect">
             <a:avLst/>
@@ -4484,7 +4974,7 @@
         </p:nvSpPr>
         <p:spPr>
           <a:xfrm>
-            <a:off x="1284116" y="1969531"/>
+            <a:off x="1215887" y="1969532"/>
             <a:ext cx="375103" cy="261610"/>
           </a:xfrm>
           <a:prstGeom prst="rect">
@@ -4520,7 +5010,7 @@
         </p:nvSpPr>
         <p:spPr>
           <a:xfrm rot="16200000">
-            <a:off x="1511762" y="2394285"/>
+            <a:off x="1443534" y="2394285"/>
             <a:ext cx="423193" cy="253916"/>
           </a:xfrm>
           <a:prstGeom prst="rect">
@@ -4556,8 +5046,8 @@
         </p:nvSpPr>
         <p:spPr>
           <a:xfrm>
-            <a:off x="1393104" y="3026454"/>
-            <a:ext cx="266098" cy="261610"/>
+            <a:off x="1324875" y="3026455"/>
+            <a:ext cx="266099" cy="261610"/>
           </a:xfrm>
           <a:prstGeom prst="rect">
             <a:avLst/>
@@ -4592,8 +5082,8 @@
         </p:nvSpPr>
         <p:spPr>
           <a:xfrm>
-            <a:off x="933923" y="3343550"/>
-            <a:ext cx="564257" cy="477054"/>
+            <a:off x="865693" y="3343550"/>
+            <a:ext cx="564258" cy="477054"/>
           </a:xfrm>
           <a:prstGeom prst="rect">
             <a:avLst/>
@@ -4640,8 +5130,8 @@
         </p:nvSpPr>
         <p:spPr>
           <a:xfrm rot="16200000">
-            <a:off x="1458863" y="3798732"/>
-            <a:ext cx="528991" cy="253916"/>
+            <a:off x="1390633" y="3689004"/>
+            <a:ext cx="528992" cy="253916"/>
           </a:xfrm>
           <a:prstGeom prst="rect">
             <a:avLst/>
@@ -4676,8 +5166,8 @@
         </p:nvSpPr>
         <p:spPr>
           <a:xfrm>
-            <a:off x="1074785" y="4824688"/>
-            <a:ext cx="654025" cy="261610"/>
+            <a:off x="1006555" y="4824689"/>
+            <a:ext cx="654026" cy="261610"/>
           </a:xfrm>
           <a:prstGeom prst="rect">
             <a:avLst/>
@@ -4706,68 +5196,14 @@
       </p:sp>
       <p:sp>
         <p:nvSpPr>
-          <p:cNvPr id="39" name="Eccosorb label"/>
-          <p:cNvSpPr txBox="1"/>
-          <p:nvPr/>
-        </p:nvSpPr>
-        <p:spPr>
-          <a:xfrm rot="16200000">
-            <a:off x="569127" y="5190737"/>
-            <a:ext cx="878446" cy="400110"/>
-          </a:xfrm>
-          <a:prstGeom prst="rect">
-            <a:avLst/>
-          </a:prstGeom>
-          <a:noFill/>
-          <a:effectLst/>
-        </p:spPr>
-        <p:txBody>
-          <a:bodyPr wrap="none" lIns="0" tIns="0" rIns="0" bIns="0" anchor="ctr">
-            <a:spAutoFit/>
-          </a:bodyPr>
-          <a:lstStyle/>
-          <a:p>
-            <a:pPr algn="ctr"/>
-            <a:r>
-              <a:rPr lang="en-US" sz="1300" dirty="0">
-                <a:solidFill>
-                  <a:srgbClr val="000000"/>
-                </a:solidFill>
-                <a:latin typeface="Times New Roman"/>
-              </a:rPr>
-              <a:t>ECCOSORB</a:t>
-            </a:r>
-          </a:p>
-          <a:p>
-            <a:pPr algn="ctr"/>
-            <a:r>
-              <a:rPr lang="en-US" sz="1300" dirty="0">
-                <a:solidFill>
-                  <a:srgbClr val="000000"/>
-                </a:solidFill>
-                <a:latin typeface="Times New Roman"/>
-              </a:rPr>
-              <a:t>filter</a:t>
-            </a:r>
-            <a:endParaRPr sz="1300" dirty="0">
-              <a:solidFill>
-                <a:srgbClr val="000000"/>
-              </a:solidFill>
-              <a:latin typeface="Times New Roman"/>
-            </a:endParaRPr>
-          </a:p>
-        </p:txBody>
-      </p:sp>
-      <p:sp>
-        <p:nvSpPr>
           <p:cNvPr id="40" name="100 mK -20 dB label"/>
           <p:cNvSpPr txBox="1"/>
           <p:nvPr/>
         </p:nvSpPr>
         <p:spPr>
           <a:xfrm rot="16200000">
-            <a:off x="1463715" y="5265937"/>
-            <a:ext cx="528991" cy="253916"/>
+            <a:off x="1395485" y="5265937"/>
+            <a:ext cx="528992" cy="253916"/>
           </a:xfrm>
           <a:prstGeom prst="rect">
             <a:avLst/>
@@ -4802,7 +5238,7 @@
         </p:nvSpPr>
         <p:spPr>
           <a:xfrm>
-            <a:off x="939142" y="6142353"/>
+            <a:off x="870913" y="6142353"/>
             <a:ext cx="870431" cy="369332"/>
           </a:xfrm>
           <a:prstGeom prst="rect">
@@ -4847,7 +5283,7 @@
         </p:nvSpPr>
         <p:spPr>
           <a:xfrm>
-            <a:off x="1359799" y="7085776"/>
+            <a:off x="1291568" y="7085776"/>
             <a:ext cx="1022716" cy="215444"/>
           </a:xfrm>
           <a:prstGeom prst="rect">
@@ -4898,7 +5334,7 @@
         </p:nvSpPr>
         <p:spPr>
           <a:xfrm>
-            <a:off x="347802" y="24063"/>
+            <a:off x="393873" y="24063"/>
             <a:ext cx="2062031" cy="559756"/>
           </a:xfrm>
           <a:prstGeom prst="roundRect">
@@ -4964,7 +5400,7 @@
         </p:nvSpPr>
         <p:spPr>
           <a:xfrm>
-            <a:off x="1088744" y="6719347"/>
+            <a:off x="1020513" y="6719349"/>
             <a:ext cx="1346200" cy="307777"/>
           </a:xfrm>
           <a:prstGeom prst="rect">
@@ -5005,7 +5441,7 @@
         </p:nvSpPr>
         <p:spPr>
           <a:xfrm>
-            <a:off x="99219" y="1884859"/>
+            <a:off x="30988" y="1884859"/>
             <a:ext cx="2514600" cy="5617966"/>
           </a:xfrm>
           <a:prstGeom prst="rect">
@@ -5051,8 +5487,8 @@
         </p:nvSpPr>
         <p:spPr>
           <a:xfrm>
-            <a:off x="763341" y="4195923"/>
-            <a:ext cx="1031365" cy="307777"/>
+            <a:off x="2874411" y="5282278"/>
+            <a:ext cx="1031365" cy="523220"/>
           </a:xfrm>
           <a:prstGeom prst="rect">
             <a:avLst/>
@@ -5065,6 +5501,25 @@
           </a:bodyPr>
           <a:lstStyle/>
           <a:p>
+            <a:pPr algn="ctr"/>
+            <a:r>
+              <a:rPr lang="en-US" sz="1400" dirty="0" err="1">
+                <a:solidFill>
+                  <a:srgbClr val="000000"/>
+                </a:solidFill>
+                <a:latin typeface="Times New Roman"/>
+              </a:rPr>
+              <a:t>Radiall</a:t>
+            </a:r>
+            <a:endParaRPr lang="en-US" sz="1400" dirty="0">
+              <a:solidFill>
+                <a:srgbClr val="000000"/>
+              </a:solidFill>
+              <a:latin typeface="Times New Roman"/>
+            </a:endParaRPr>
+          </a:p>
+          <a:p>
+            <a:pPr algn="ctr"/>
             <a:r>
               <a:rPr lang="en-US" sz="1400" dirty="0">
                 <a:solidFill>
@@ -5075,6 +5530,450 @@
               <a:t>switch</a:t>
             </a:r>
             <a:endParaRPr lang="en-US" sz="1400" dirty="0"/>
+          </a:p>
+        </p:txBody>
+      </p:sp>
+      <p:sp>
+        <p:nvSpPr>
+          <p:cNvPr id="5" name="NARDA amplifier triangle">
+            <a:extLst>
+              <a:ext uri="{FF2B5EF4-FFF2-40B4-BE49-F238E27FC236}">
+                <a16:creationId xmlns:a16="http://schemas.microsoft.com/office/drawing/2014/main" id="{861B304F-CDFB-F0E7-2356-7002C1F7EFCF}"/>
+              </a:ext>
+            </a:extLst>
+          </p:cNvPr>
+          <p:cNvSpPr/>
+          <p:nvPr/>
+        </p:nvSpPr>
+        <p:spPr>
+          <a:xfrm>
+            <a:off x="3038049" y="1001142"/>
+            <a:ext cx="704088" cy="644652"/>
+          </a:xfrm>
+          <a:prstGeom prst="triangle">
+            <a:avLst/>
+          </a:prstGeom>
+          <a:solidFill>
+            <a:srgbClr val="FF0000"/>
+          </a:solidFill>
+          <a:ln w="40640">
+            <a:solidFill>
+              <a:srgbClr val="000000"/>
+            </a:solidFill>
+          </a:ln>
+          <a:effectLst/>
+        </p:spPr>
+        <p:txBody>
+          <a:bodyPr rtlCol="0" anchor="ctr"/>
+          <a:lstStyle/>
+          <a:p>
+            <a:pPr algn="ctr"/>
+            <a:endParaRPr/>
+          </a:p>
+        </p:txBody>
+      </p:sp>
+      <p:sp>
+        <p:nvSpPr>
+          <p:cNvPr id="6" name="50 K attenuator">
+            <a:extLst>
+              <a:ext uri="{FF2B5EF4-FFF2-40B4-BE49-F238E27FC236}">
+                <a16:creationId xmlns:a16="http://schemas.microsoft.com/office/drawing/2014/main" id="{66E15EAB-571C-126F-B82F-AC7FEC60EA58}"/>
+              </a:ext>
+            </a:extLst>
+          </p:cNvPr>
+          <p:cNvSpPr/>
+          <p:nvPr/>
+        </p:nvSpPr>
+        <p:spPr>
+          <a:xfrm>
+            <a:off x="3252933" y="2230921"/>
+            <a:ext cx="274320" cy="580644"/>
+          </a:xfrm>
+          <a:prstGeom prst="roundRect">
+            <a:avLst/>
+          </a:prstGeom>
+          <a:solidFill>
+            <a:srgbClr val="0065D7"/>
+          </a:solidFill>
+          <a:ln w="40640">
+            <a:solidFill>
+              <a:srgbClr val="000000"/>
+            </a:solidFill>
+          </a:ln>
+          <a:effectLst/>
+        </p:spPr>
+        <p:txBody>
+          <a:bodyPr rtlCol="0" anchor="ctr"/>
+          <a:lstStyle/>
+          <a:p>
+            <a:pPr algn="ctr"/>
+            <a:endParaRPr/>
+          </a:p>
+        </p:txBody>
+      </p:sp>
+      <p:sp>
+        <p:nvSpPr>
+          <p:cNvPr id="9" name="Eccosorb filter block">
+            <a:extLst>
+              <a:ext uri="{FF2B5EF4-FFF2-40B4-BE49-F238E27FC236}">
+                <a16:creationId xmlns:a16="http://schemas.microsoft.com/office/drawing/2014/main" id="{D476E1E8-7006-54A9-0E63-5419CD305215}"/>
+              </a:ext>
+            </a:extLst>
+          </p:cNvPr>
+          <p:cNvSpPr/>
+          <p:nvPr/>
+        </p:nvSpPr>
+        <p:spPr>
+          <a:xfrm>
+            <a:off x="3250647" y="3470148"/>
+            <a:ext cx="278892" cy="603504"/>
+          </a:xfrm>
+          <a:prstGeom prst="roundRect">
+            <a:avLst/>
+          </a:prstGeom>
+          <a:solidFill>
+            <a:srgbClr val="FFCD00"/>
+          </a:solidFill>
+          <a:ln w="40640">
+            <a:solidFill>
+              <a:srgbClr val="000000"/>
+            </a:solidFill>
+          </a:ln>
+          <a:effectLst/>
+        </p:spPr>
+        <p:txBody>
+          <a:bodyPr rtlCol="0" anchor="ctr"/>
+          <a:lstStyle/>
+          <a:p>
+            <a:pPr algn="ctr"/>
+            <a:endParaRPr/>
+          </a:p>
+        </p:txBody>
+      </p:sp>
+      <p:sp>
+        <p:nvSpPr>
+          <p:cNvPr id="12" name="Eccosorb label">
+            <a:extLst>
+              <a:ext uri="{FF2B5EF4-FFF2-40B4-BE49-F238E27FC236}">
+                <a16:creationId xmlns:a16="http://schemas.microsoft.com/office/drawing/2014/main" id="{29C73919-C3A8-DF81-4156-24C90EA34F46}"/>
+              </a:ext>
+            </a:extLst>
+          </p:cNvPr>
+          <p:cNvSpPr txBox="1"/>
+          <p:nvPr/>
+        </p:nvSpPr>
+        <p:spPr>
+          <a:xfrm>
+            <a:off x="2950870" y="4139775"/>
+            <a:ext cx="878447" cy="400110"/>
+          </a:xfrm>
+          <a:prstGeom prst="rect">
+            <a:avLst/>
+          </a:prstGeom>
+          <a:noFill/>
+          <a:effectLst/>
+        </p:spPr>
+        <p:txBody>
+          <a:bodyPr wrap="none" lIns="0" tIns="0" rIns="0" bIns="0" anchor="ctr">
+            <a:spAutoFit/>
+          </a:bodyPr>
+          <a:lstStyle/>
+          <a:p>
+            <a:pPr algn="ctr"/>
+            <a:r>
+              <a:rPr lang="en-US" sz="1300" dirty="0">
+                <a:solidFill>
+                  <a:srgbClr val="000000"/>
+                </a:solidFill>
+                <a:latin typeface="Times New Roman"/>
+              </a:rPr>
+              <a:t>ECCOSORB</a:t>
+            </a:r>
+          </a:p>
+          <a:p>
+            <a:pPr algn="ctr"/>
+            <a:r>
+              <a:rPr lang="en-US" sz="1300" dirty="0">
+                <a:solidFill>
+                  <a:srgbClr val="000000"/>
+                </a:solidFill>
+                <a:latin typeface="Times New Roman"/>
+              </a:rPr>
+              <a:t>filter</a:t>
+            </a:r>
+            <a:endParaRPr sz="1300" dirty="0">
+              <a:solidFill>
+                <a:srgbClr val="000000"/>
+              </a:solidFill>
+              <a:latin typeface="Times New Roman"/>
+            </a:endParaRPr>
+          </a:p>
+        </p:txBody>
+      </p:sp>
+      <p:sp>
+        <p:nvSpPr>
+          <p:cNvPr id="13" name="Eccosorb label">
+            <a:extLst>
+              <a:ext uri="{FF2B5EF4-FFF2-40B4-BE49-F238E27FC236}">
+                <a16:creationId xmlns:a16="http://schemas.microsoft.com/office/drawing/2014/main" id="{459E6D6A-A2CD-8561-1D60-555FEE11509D}"/>
+              </a:ext>
+            </a:extLst>
+          </p:cNvPr>
+          <p:cNvSpPr txBox="1"/>
+          <p:nvPr/>
+        </p:nvSpPr>
+        <p:spPr>
+          <a:xfrm>
+            <a:off x="3056669" y="2883120"/>
+            <a:ext cx="666849" cy="200055"/>
+          </a:xfrm>
+          <a:prstGeom prst="rect">
+            <a:avLst/>
+          </a:prstGeom>
+          <a:noFill/>
+          <a:effectLst/>
+        </p:spPr>
+        <p:txBody>
+          <a:bodyPr wrap="none" lIns="0" tIns="0" rIns="0" bIns="0" anchor="ctr">
+            <a:spAutoFit/>
+          </a:bodyPr>
+          <a:lstStyle/>
+          <a:p>
+            <a:pPr algn="ctr"/>
+            <a:r>
+              <a:rPr lang="en-US" sz="1300" dirty="0">
+                <a:solidFill>
+                  <a:srgbClr val="000000"/>
+                </a:solidFill>
+                <a:latin typeface="Times New Roman"/>
+              </a:rPr>
+              <a:t>attenuator</a:t>
+            </a:r>
+            <a:endParaRPr sz="1300" dirty="0">
+              <a:solidFill>
+                <a:srgbClr val="000000"/>
+              </a:solidFill>
+              <a:latin typeface="Times New Roman"/>
+            </a:endParaRPr>
+          </a:p>
+        </p:txBody>
+      </p:sp>
+      <p:sp>
+        <p:nvSpPr>
+          <p:cNvPr id="14" name="Eccosorb label">
+            <a:extLst>
+              <a:ext uri="{FF2B5EF4-FFF2-40B4-BE49-F238E27FC236}">
+                <a16:creationId xmlns:a16="http://schemas.microsoft.com/office/drawing/2014/main" id="{B742671C-DFED-3098-26DA-76095DFA27FC}"/>
+              </a:ext>
+            </a:extLst>
+          </p:cNvPr>
+          <p:cNvSpPr txBox="1"/>
+          <p:nvPr/>
+        </p:nvSpPr>
+        <p:spPr>
+          <a:xfrm>
+            <a:off x="3083920" y="1701726"/>
+            <a:ext cx="612347" cy="200055"/>
+          </a:xfrm>
+          <a:prstGeom prst="rect">
+            <a:avLst/>
+          </a:prstGeom>
+          <a:noFill/>
+          <a:effectLst/>
+        </p:spPr>
+        <p:txBody>
+          <a:bodyPr wrap="none" lIns="0" tIns="0" rIns="0" bIns="0" anchor="ctr">
+            <a:spAutoFit/>
+          </a:bodyPr>
+          <a:lstStyle/>
+          <a:p>
+            <a:pPr algn="ctr"/>
+            <a:r>
+              <a:rPr lang="en-US" sz="1300" dirty="0">
+                <a:solidFill>
+                  <a:srgbClr val="000000"/>
+                </a:solidFill>
+                <a:latin typeface="Times New Roman"/>
+              </a:rPr>
+              <a:t>amplifier</a:t>
+            </a:r>
+            <a:endParaRPr sz="1300" dirty="0">
+              <a:solidFill>
+                <a:srgbClr val="000000"/>
+              </a:solidFill>
+              <a:latin typeface="Times New Roman"/>
+            </a:endParaRPr>
+          </a:p>
+        </p:txBody>
+      </p:sp>
+      <p:cxnSp>
+        <p:nvCxnSpPr>
+          <p:cNvPr id="50" name="output coax vertical">
+            <a:extLst>
+              <a:ext uri="{FF2B5EF4-FFF2-40B4-BE49-F238E27FC236}">
+                <a16:creationId xmlns:a16="http://schemas.microsoft.com/office/drawing/2014/main" id="{6E813ABB-43EE-8E2A-E3B4-6EC613F05C10}"/>
+              </a:ext>
+            </a:extLst>
+          </p:cNvPr>
+          <p:cNvCxnSpPr>
+            <a:cxnSpLocks/>
+          </p:cNvCxnSpPr>
+          <p:nvPr/>
+        </p:nvCxnSpPr>
+        <p:spPr>
+          <a:xfrm flipH="1">
+            <a:off x="3354530" y="4762854"/>
+            <a:ext cx="2807" cy="168033"/>
+          </a:xfrm>
+          <a:prstGeom prst="line">
+            <a:avLst/>
+          </a:prstGeom>
+          <a:ln w="68580">
+            <a:solidFill>
+              <a:srgbClr val="000000"/>
+            </a:solidFill>
+          </a:ln>
+          <a:effectLst/>
+        </p:spPr>
+      </p:cxnSp>
+      <p:cxnSp>
+        <p:nvCxnSpPr>
+          <p:cNvPr id="51" name="HEMT output bend">
+            <a:extLst>
+              <a:ext uri="{FF2B5EF4-FFF2-40B4-BE49-F238E27FC236}">
+                <a16:creationId xmlns:a16="http://schemas.microsoft.com/office/drawing/2014/main" id="{6B5EC015-9D1E-2F78-F5D5-C78A4C5297B8}"/>
+              </a:ext>
+            </a:extLst>
+          </p:cNvPr>
+          <p:cNvCxnSpPr>
+            <a:cxnSpLocks/>
+          </p:cNvCxnSpPr>
+          <p:nvPr/>
+        </p:nvCxnSpPr>
+        <p:spPr>
+          <a:xfrm flipH="1">
+            <a:off x="3183937" y="4917135"/>
+            <a:ext cx="173390" cy="279227"/>
+          </a:xfrm>
+          <a:prstGeom prst="line">
+            <a:avLst/>
+          </a:prstGeom>
+          <a:ln w="68580">
+            <a:solidFill>
+              <a:srgbClr val="000000"/>
+            </a:solidFill>
+          </a:ln>
+          <a:effectLst/>
+        </p:spPr>
+      </p:cxnSp>
+      <p:sp>
+        <p:nvSpPr>
+          <p:cNvPr id="53" name="wire bond node left">
+            <a:extLst>
+              <a:ext uri="{FF2B5EF4-FFF2-40B4-BE49-F238E27FC236}">
+                <a16:creationId xmlns:a16="http://schemas.microsoft.com/office/drawing/2014/main" id="{9C4089C5-22FE-3D9C-27E7-E3C51D1874FE}"/>
+              </a:ext>
+            </a:extLst>
+          </p:cNvPr>
+          <p:cNvSpPr/>
+          <p:nvPr/>
+        </p:nvSpPr>
+        <p:spPr>
+          <a:xfrm>
+            <a:off x="3143461" y="5071464"/>
+            <a:ext cx="146304" cy="146304"/>
+          </a:xfrm>
+          <a:prstGeom prst="ellipse">
+            <a:avLst/>
+          </a:prstGeom>
+          <a:solidFill>
+            <a:srgbClr val="000000"/>
+          </a:solidFill>
+          <a:ln>
+            <a:noFill/>
+          </a:ln>
+          <a:effectLst/>
+        </p:spPr>
+        <p:txBody>
+          <a:bodyPr rtlCol="0" anchor="ctr"/>
+          <a:lstStyle/>
+          <a:p>
+            <a:pPr algn="ctr"/>
+            <a:endParaRPr/>
+          </a:p>
+        </p:txBody>
+      </p:sp>
+      <p:sp>
+        <p:nvSpPr>
+          <p:cNvPr id="55" name="wire bond node center">
+            <a:extLst>
+              <a:ext uri="{FF2B5EF4-FFF2-40B4-BE49-F238E27FC236}">
+                <a16:creationId xmlns:a16="http://schemas.microsoft.com/office/drawing/2014/main" id="{7A366CA6-7374-5992-9EFF-A5D9EA455F68}"/>
+              </a:ext>
+            </a:extLst>
+          </p:cNvPr>
+          <p:cNvSpPr/>
+          <p:nvPr/>
+        </p:nvSpPr>
+        <p:spPr>
+          <a:xfrm>
+            <a:off x="3311903" y="5073292"/>
+            <a:ext cx="146304" cy="146304"/>
+          </a:xfrm>
+          <a:prstGeom prst="ellipse">
+            <a:avLst/>
+          </a:prstGeom>
+          <a:solidFill>
+            <a:srgbClr val="000000"/>
+          </a:solidFill>
+          <a:ln>
+            <a:noFill/>
+          </a:ln>
+          <a:effectLst/>
+        </p:spPr>
+        <p:txBody>
+          <a:bodyPr rtlCol="0" anchor="ctr"/>
+          <a:lstStyle/>
+          <a:p>
+            <a:pPr algn="ctr"/>
+            <a:endParaRPr/>
+          </a:p>
+        </p:txBody>
+      </p:sp>
+      <p:sp>
+        <p:nvSpPr>
+          <p:cNvPr id="57" name="wire bond node right">
+            <a:extLst>
+              <a:ext uri="{FF2B5EF4-FFF2-40B4-BE49-F238E27FC236}">
+                <a16:creationId xmlns:a16="http://schemas.microsoft.com/office/drawing/2014/main" id="{DFE149B0-7914-9776-C40E-B06E1741D9B6}"/>
+              </a:ext>
+            </a:extLst>
+          </p:cNvPr>
+          <p:cNvSpPr/>
+          <p:nvPr/>
+        </p:nvSpPr>
+        <p:spPr>
+          <a:xfrm>
+            <a:off x="3494419" y="5076055"/>
+            <a:ext cx="146304" cy="146304"/>
+          </a:xfrm>
+          <a:prstGeom prst="ellipse">
+            <a:avLst/>
+          </a:prstGeom>
+          <a:solidFill>
+            <a:srgbClr val="000000"/>
+          </a:solidFill>
+          <a:ln>
+            <a:noFill/>
+          </a:ln>
+          <a:effectLst/>
+        </p:spPr>
+        <p:txBody>
+          <a:bodyPr rtlCol="0" anchor="ctr"/>
+          <a:lstStyle/>
+          <a:p>
+            <a:pPr algn="ctr"/>
+            <a:endParaRPr/>
           </a:p>
         </p:txBody>
       </p:sp>
@@ -5406,6 +6305,321 @@
 </a:theme>
 </file>
 
+<file path=ppt/theme/theme2.xml><?xml version="1.0" encoding="utf-8"?>
+<a:theme xmlns:a="http://schemas.openxmlformats.org/drawingml/2006/main" name="Office Theme">
+  <a:themeElements>
+    <a:clrScheme name="Office">
+      <a:dk1>
+        <a:sysClr val="windowText" lastClr="000000"/>
+      </a:dk1>
+      <a:lt1>
+        <a:sysClr val="window" lastClr="FFFFFF"/>
+      </a:lt1>
+      <a:dk2>
+        <a:srgbClr val="0E2841"/>
+      </a:dk2>
+      <a:lt2>
+        <a:srgbClr val="E8E8E8"/>
+      </a:lt2>
+      <a:accent1>
+        <a:srgbClr val="156082"/>
+      </a:accent1>
+      <a:accent2>
+        <a:srgbClr val="E97132"/>
+      </a:accent2>
+      <a:accent3>
+        <a:srgbClr val="196B24"/>
+      </a:accent3>
+      <a:accent4>
+        <a:srgbClr val="0F9ED5"/>
+      </a:accent4>
+      <a:accent5>
+        <a:srgbClr val="A02B93"/>
+      </a:accent5>
+      <a:accent6>
+        <a:srgbClr val="4EA72E"/>
+      </a:accent6>
+      <a:hlink>
+        <a:srgbClr val="467886"/>
+      </a:hlink>
+      <a:folHlink>
+        <a:srgbClr val="96607D"/>
+      </a:folHlink>
+    </a:clrScheme>
+    <a:fontScheme name="Office">
+      <a:majorFont>
+        <a:latin typeface="Aptos Display" panose="02110004020202020204"/>
+        <a:ea typeface=""/>
+        <a:cs typeface=""/>
+        <a:font script="Jpan" typeface="游ゴシック Light"/>
+        <a:font script="Hang" typeface="맑은 고딕"/>
+        <a:font script="Hans" typeface="等线 Light"/>
+        <a:font script="Hant" typeface="新細明體"/>
+        <a:font script="Arab" typeface="Times New Roman"/>
+        <a:font script="Hebr" typeface="Times New Roman"/>
+        <a:font script="Thai" typeface="Angsana New"/>
+        <a:font script="Ethi" typeface="Nyala"/>
+        <a:font script="Beng" typeface="Vrinda"/>
+        <a:font script="Gujr" typeface="Shruti"/>
+        <a:font script="Khmr" typeface="MoolBoran"/>
+        <a:font script="Knda" typeface="Tunga"/>
+        <a:font script="Guru" typeface="Raavi"/>
+        <a:font script="Cans" typeface="Euphemia"/>
+        <a:font script="Cher" typeface="Plantagenet Cherokee"/>
+        <a:font script="Yiii" typeface="Microsoft Yi Baiti"/>
+        <a:font script="Tibt" typeface="Microsoft Himalaya"/>
+        <a:font script="Thaa" typeface="MV Boli"/>
+        <a:font script="Deva" typeface="Mangal"/>
+        <a:font script="Telu" typeface="Gautami"/>
+        <a:font script="Taml" typeface="Latha"/>
+        <a:font script="Syrc" typeface="Estrangelo Edessa"/>
+        <a:font script="Orya" typeface="Kalinga"/>
+        <a:font script="Mlym" typeface="Kartika"/>
+        <a:font script="Laoo" typeface="DokChampa"/>
+        <a:font script="Sinh" typeface="Iskoola Pota"/>
+        <a:font script="Mong" typeface="Mongolian Baiti"/>
+        <a:font script="Viet" typeface="Times New Roman"/>
+        <a:font script="Uigh" typeface="Microsoft Uighur"/>
+        <a:font script="Geor" typeface="Sylfaen"/>
+        <a:font script="Armn" typeface="Arial"/>
+        <a:font script="Bugi" typeface="Leelawadee UI"/>
+        <a:font script="Bopo" typeface="Microsoft JhengHei"/>
+        <a:font script="Java" typeface="Javanese Text"/>
+        <a:font script="Lisu" typeface="Segoe UI"/>
+        <a:font script="Mymr" typeface="Myanmar Text"/>
+        <a:font script="Nkoo" typeface="Ebrima"/>
+        <a:font script="Olck" typeface="Nirmala UI"/>
+        <a:font script="Osma" typeface="Ebrima"/>
+        <a:font script="Phag" typeface="Phagspa"/>
+        <a:font script="Syrn" typeface="Estrangelo Edessa"/>
+        <a:font script="Syrj" typeface="Estrangelo Edessa"/>
+        <a:font script="Syre" typeface="Estrangelo Edessa"/>
+        <a:font script="Sora" typeface="Nirmala UI"/>
+        <a:font script="Tale" typeface="Microsoft Tai Le"/>
+        <a:font script="Talu" typeface="Microsoft New Tai Lue"/>
+        <a:font script="Tfng" typeface="Ebrima"/>
+      </a:majorFont>
+      <a:minorFont>
+        <a:latin typeface="Aptos" panose="02110004020202020204"/>
+        <a:ea typeface=""/>
+        <a:cs typeface=""/>
+        <a:font script="Jpan" typeface="游ゴシック"/>
+        <a:font script="Hang" typeface="맑은 고딕"/>
+        <a:font script="Hans" typeface="等线"/>
+        <a:font script="Hant" typeface="新細明體"/>
+        <a:font script="Arab" typeface="Arial"/>
+        <a:font script="Hebr" typeface="Arial"/>
+        <a:font script="Thai" typeface="Cordia New"/>
+        <a:font script="Ethi" typeface="Nyala"/>
+        <a:font script="Beng" typeface="Vrinda"/>
+        <a:font script="Gujr" typeface="Shruti"/>
+        <a:font script="Khmr" typeface="DaunPenh"/>
+        <a:font script="Knda" typeface="Tunga"/>
+        <a:font script="Guru" typeface="Raavi"/>
+        <a:font script="Cans" typeface="Euphemia"/>
+        <a:font script="Cher" typeface="Plantagenet Cherokee"/>
+        <a:font script="Yiii" typeface="Microsoft Yi Baiti"/>
+        <a:font script="Tibt" typeface="Microsoft Himalaya"/>
+        <a:font script="Thaa" typeface="MV Boli"/>
+        <a:font script="Deva" typeface="Mangal"/>
+        <a:font script="Telu" typeface="Gautami"/>
+        <a:font script="Taml" typeface="Latha"/>
+        <a:font script="Syrc" typeface="Estrangelo Edessa"/>
+        <a:font script="Orya" typeface="Kalinga"/>
+        <a:font script="Mlym" typeface="Kartika"/>
+        <a:font script="Laoo" typeface="DokChampa"/>
+        <a:font script="Sinh" typeface="Iskoola Pota"/>
+        <a:font script="Mong" typeface="Mongolian Baiti"/>
+        <a:font script="Viet" typeface="Arial"/>
+        <a:font script="Uigh" typeface="Microsoft Uighur"/>
+        <a:font script="Geor" typeface="Sylfaen"/>
+        <a:font script="Armn" typeface="Arial"/>
+        <a:font script="Bugi" typeface="Leelawadee UI"/>
+        <a:font script="Bopo" typeface="Microsoft JhengHei"/>
+        <a:font script="Java" typeface="Javanese Text"/>
+        <a:font script="Lisu" typeface="Segoe UI"/>
+        <a:font script="Mymr" typeface="Myanmar Text"/>
+        <a:font script="Nkoo" typeface="Ebrima"/>
+        <a:font script="Olck" typeface="Nirmala UI"/>
+        <a:font script="Osma" typeface="Ebrima"/>
+        <a:font script="Phag" typeface="Phagspa"/>
+        <a:font script="Syrn" typeface="Estrangelo Edessa"/>
+        <a:font script="Syrj" typeface="Estrangelo Edessa"/>
+        <a:font script="Syre" typeface="Estrangelo Edessa"/>
+        <a:font script="Sora" typeface="Nirmala UI"/>
+        <a:font script="Tale" typeface="Microsoft Tai Le"/>
+        <a:font script="Talu" typeface="Microsoft New Tai Lue"/>
+        <a:font script="Tfng" typeface="Ebrima"/>
+      </a:minorFont>
+    </a:fontScheme>
+    <a:fmtScheme name="Office">
+      <a:fillStyleLst>
+        <a:solidFill>
+          <a:schemeClr val="phClr"/>
+        </a:solidFill>
+        <a:gradFill rotWithShape="1">
+          <a:gsLst>
+            <a:gs pos="0">
+              <a:schemeClr val="phClr">
+                <a:lumMod val="110000"/>
+                <a:satMod val="105000"/>
+                <a:tint val="67000"/>
+              </a:schemeClr>
+            </a:gs>
+            <a:gs pos="50000">
+              <a:schemeClr val="phClr">
+                <a:lumMod val="105000"/>
+                <a:satMod val="103000"/>
+                <a:tint val="73000"/>
+              </a:schemeClr>
+            </a:gs>
+            <a:gs pos="100000">
+              <a:schemeClr val="phClr">
+                <a:lumMod val="105000"/>
+                <a:satMod val="109000"/>
+                <a:tint val="81000"/>
+              </a:schemeClr>
+            </a:gs>
+          </a:gsLst>
+          <a:lin ang="5400000" scaled="0"/>
+        </a:gradFill>
+        <a:gradFill rotWithShape="1">
+          <a:gsLst>
+            <a:gs pos="0">
+              <a:schemeClr val="phClr">
+                <a:satMod val="103000"/>
+                <a:lumMod val="102000"/>
+                <a:tint val="94000"/>
+              </a:schemeClr>
+            </a:gs>
+            <a:gs pos="50000">
+              <a:schemeClr val="phClr">
+                <a:satMod val="110000"/>
+                <a:lumMod val="100000"/>
+                <a:shade val="100000"/>
+              </a:schemeClr>
+            </a:gs>
+            <a:gs pos="100000">
+              <a:schemeClr val="phClr">
+                <a:lumMod val="99000"/>
+                <a:satMod val="120000"/>
+                <a:shade val="78000"/>
+              </a:schemeClr>
+            </a:gs>
+          </a:gsLst>
+          <a:lin ang="5400000" scaled="0"/>
+        </a:gradFill>
+      </a:fillStyleLst>
+      <a:lnStyleLst>
+        <a:ln w="12700" cap="flat" cmpd="sng" algn="ctr">
+          <a:solidFill>
+            <a:schemeClr val="phClr"/>
+          </a:solidFill>
+          <a:prstDash val="solid"/>
+          <a:miter lim="800000"/>
+        </a:ln>
+        <a:ln w="19050" cap="flat" cmpd="sng" algn="ctr">
+          <a:solidFill>
+            <a:schemeClr val="phClr"/>
+          </a:solidFill>
+          <a:prstDash val="solid"/>
+          <a:miter lim="800000"/>
+        </a:ln>
+        <a:ln w="25400" cap="flat" cmpd="sng" algn="ctr">
+          <a:solidFill>
+            <a:schemeClr val="phClr"/>
+          </a:solidFill>
+          <a:prstDash val="solid"/>
+          <a:miter lim="800000"/>
+        </a:ln>
+      </a:lnStyleLst>
+      <a:effectStyleLst>
+        <a:effectStyle>
+          <a:effectLst/>
+        </a:effectStyle>
+        <a:effectStyle>
+          <a:effectLst/>
+        </a:effectStyle>
+        <a:effectStyle>
+          <a:effectLst>
+            <a:outerShdw blurRad="57150" dist="19050" dir="5400000" algn="ctr" rotWithShape="0">
+              <a:srgbClr val="000000">
+                <a:alpha val="63000"/>
+              </a:srgbClr>
+            </a:outerShdw>
+          </a:effectLst>
+        </a:effectStyle>
+      </a:effectStyleLst>
+      <a:bgFillStyleLst>
+        <a:solidFill>
+          <a:schemeClr val="phClr"/>
+        </a:solidFill>
+        <a:solidFill>
+          <a:schemeClr val="phClr">
+            <a:tint val="95000"/>
+            <a:satMod val="170000"/>
+          </a:schemeClr>
+        </a:solidFill>
+        <a:gradFill rotWithShape="1">
+          <a:gsLst>
+            <a:gs pos="0">
+              <a:schemeClr val="phClr">
+                <a:tint val="93000"/>
+                <a:satMod val="150000"/>
+                <a:shade val="98000"/>
+                <a:lumMod val="102000"/>
+              </a:schemeClr>
+            </a:gs>
+            <a:gs pos="50000">
+              <a:schemeClr val="phClr">
+                <a:tint val="98000"/>
+                <a:satMod val="130000"/>
+                <a:shade val="90000"/>
+                <a:lumMod val="103000"/>
+              </a:schemeClr>
+            </a:gs>
+            <a:gs pos="100000">
+              <a:schemeClr val="phClr">
+                <a:shade val="63000"/>
+                <a:satMod val="120000"/>
+              </a:schemeClr>
+            </a:gs>
+          </a:gsLst>
+          <a:lin ang="5400000" scaled="0"/>
+        </a:gradFill>
+      </a:bgFillStyleLst>
+    </a:fmtScheme>
+  </a:themeElements>
+  <a:objectDefaults>
+    <a:lnDef>
+      <a:spPr/>
+      <a:bodyPr/>
+      <a:lstStyle/>
+      <a:style>
+        <a:lnRef idx="2">
+          <a:schemeClr val="accent1"/>
+        </a:lnRef>
+        <a:fillRef idx="0">
+          <a:schemeClr val="accent1"/>
+        </a:fillRef>
+        <a:effectRef idx="1">
+          <a:schemeClr val="accent1"/>
+        </a:effectRef>
+        <a:fontRef idx="minor">
+          <a:schemeClr val="tx1"/>
+        </a:fontRef>
+      </a:style>
+    </a:lnDef>
+  </a:objectDefaults>
+  <a:extraClrSchemeLst/>
+  <a:extLst>
+    <a:ext uri="{05A4C25C-085E-4340-85A3-A5531E510DB2}">
+      <thm15:themeFamily xmlns:thm15="http://schemas.microsoft.com/office/thememl/2012/main" name="Office Theme" id="{2E142A2C-CD16-42D6-873A-C26D2A0506FA}" vid="{1BDDFF52-6CD6-40A5-AB3C-68EB2F1E4D0A}"/>
+    </a:ext>
+  </a:extLst>
+</a:theme>
+</file>
+
 <file path=docMetadata/LabelInfo.xml><?xml version="1.0" encoding="utf-8"?>
 <clbl:labelList xmlns:clbl="http://schemas.microsoft.com/office/2020/mipLabelMetadata">
   <clbl:label id="{4278a402-1a9e-4eb9-8414-ffb55a5fcf1e}" enabled="0" method="" siteId="{4278a402-1a9e-4eb9-8414-ffb55a5fcf1e}" removed="1"/>

--- a/figures/setup.pptx
+++ b/figures/setup.pptx
@@ -139,12 +139,12 @@
   <pc:docChgLst>
     <pc:chgData name="Ivan V Pechenezhskiy" userId="05151ae6-aff0-4c3b-afef-5d8361ad9277" providerId="ADAL" clId="{497C8B30-E653-41E3-BCDE-D087AF3F3AA5}"/>
     <pc:docChg chg="undo redo custSel delSld modSld modMainMaster">
-      <pc:chgData name="Ivan V Pechenezhskiy" userId="05151ae6-aff0-4c3b-afef-5d8361ad9277" providerId="ADAL" clId="{497C8B30-E653-41E3-BCDE-D087AF3F3AA5}" dt="2026-07-08T03:53:09.635" v="1331" actId="1035"/>
+      <pc:chgData name="Ivan V Pechenezhskiy" userId="05151ae6-aff0-4c3b-afef-5d8361ad9277" providerId="ADAL" clId="{497C8B30-E653-41E3-BCDE-D087AF3F3AA5}" dt="2026-07-08T05:14:13.093" v="1349" actId="1038"/>
       <pc:docMkLst>
         <pc:docMk/>
       </pc:docMkLst>
       <pc:sldChg chg="addSp delSp modSp mod">
-        <pc:chgData name="Ivan V Pechenezhskiy" userId="05151ae6-aff0-4c3b-afef-5d8361ad9277" providerId="ADAL" clId="{497C8B30-E653-41E3-BCDE-D087AF3F3AA5}" dt="2026-07-08T03:53:09.635" v="1331" actId="1035"/>
+        <pc:chgData name="Ivan V Pechenezhskiy" userId="05151ae6-aff0-4c3b-afef-5d8361ad9277" providerId="ADAL" clId="{497C8B30-E653-41E3-BCDE-D087AF3F3AA5}" dt="2026-07-08T05:14:13.093" v="1349" actId="1038"/>
         <pc:sldMkLst>
           <pc:docMk/>
           <pc:sldMk cId="0" sldId="256"/>
@@ -462,7 +462,7 @@
           </ac:spMkLst>
         </pc:spChg>
         <pc:spChg chg="add mod">
-          <ac:chgData name="Ivan V Pechenezhskiy" userId="05151ae6-aff0-4c3b-afef-5d8361ad9277" providerId="ADAL" clId="{497C8B30-E653-41E3-BCDE-D087AF3F3AA5}" dt="2026-07-04T04:05:57.980" v="979" actId="14100"/>
+          <ac:chgData name="Ivan V Pechenezhskiy" userId="05151ae6-aff0-4c3b-afef-5d8361ad9277" providerId="ADAL" clId="{497C8B30-E653-41E3-BCDE-D087AF3F3AA5}" dt="2026-07-08T05:14:13.093" v="1349" actId="1038"/>
           <ac:spMkLst>
             <pc:docMk/>
             <pc:sldMk cId="0" sldId="256"/>
@@ -5334,7 +5334,7 @@
         </p:nvSpPr>
         <p:spPr>
           <a:xfrm>
-            <a:off x="393873" y="24063"/>
+            <a:off x="297861" y="24063"/>
             <a:ext cx="2062031" cy="559756"/>
           </a:xfrm>
           <a:prstGeom prst="roundRect">

--- a/figures/setup.pptx
+++ b/figures/setup.pptx
@@ -129,7 +129,7 @@
 <file path=ppt/revisionInfo.xml><?xml version="1.0" encoding="utf-8"?>
 <p1510:revInfo xmlns:a="http://schemas.openxmlformats.org/drawingml/2006/main" xmlns:r="http://schemas.openxmlformats.org/officeDocument/2006/relationships" xmlns:p1510="http://schemas.microsoft.com/office/powerpoint/2015/10/main">
   <p1510:revLst>
-    <p1510:client id="{52030414-14B2-4CCC-B4C7-9058F7E501E5}" v="47" dt="2026-07-08T03:49:37.888"/>
+    <p1510:client id="{52030414-14B2-4CCC-B4C7-9058F7E501E5}" v="3" dt="2026-07-13T19:49:49.183"/>
   </p1510:revLst>
 </p1510:revInfo>
 </file>
@@ -139,18 +139,18 @@
   <pc:docChgLst>
     <pc:chgData name="Ivan V Pechenezhskiy" userId="05151ae6-aff0-4c3b-afef-5d8361ad9277" providerId="ADAL" clId="{497C8B30-E653-41E3-BCDE-D087AF3F3AA5}"/>
     <pc:docChg chg="undo redo custSel delSld modSld modMainMaster">
-      <pc:chgData name="Ivan V Pechenezhskiy" userId="05151ae6-aff0-4c3b-afef-5d8361ad9277" providerId="ADAL" clId="{497C8B30-E653-41E3-BCDE-D087AF3F3AA5}" dt="2026-07-08T05:14:13.093" v="1349" actId="1038"/>
+      <pc:chgData name="Ivan V Pechenezhskiy" userId="05151ae6-aff0-4c3b-afef-5d8361ad9277" providerId="ADAL" clId="{497C8B30-E653-41E3-BCDE-D087AF3F3AA5}" dt="2026-07-13T19:53:58.248" v="1455" actId="1036"/>
       <pc:docMkLst>
         <pc:docMk/>
       </pc:docMkLst>
       <pc:sldChg chg="addSp delSp modSp mod">
-        <pc:chgData name="Ivan V Pechenezhskiy" userId="05151ae6-aff0-4c3b-afef-5d8361ad9277" providerId="ADAL" clId="{497C8B30-E653-41E3-BCDE-D087AF3F3AA5}" dt="2026-07-08T05:14:13.093" v="1349" actId="1038"/>
+        <pc:chgData name="Ivan V Pechenezhskiy" userId="05151ae6-aff0-4c3b-afef-5d8361ad9277" providerId="ADAL" clId="{497C8B30-E653-41E3-BCDE-D087AF3F3AA5}" dt="2026-07-13T19:53:58.248" v="1455" actId="1036"/>
         <pc:sldMkLst>
           <pc:docMk/>
           <pc:sldMk cId="0" sldId="256"/>
         </pc:sldMkLst>
         <pc:spChg chg="mod">
-          <ac:chgData name="Ivan V Pechenezhskiy" userId="05151ae6-aff0-4c3b-afef-5d8361ad9277" providerId="ADAL" clId="{497C8B30-E653-41E3-BCDE-D087AF3F3AA5}" dt="2026-07-08T03:46:43.544" v="1123" actId="1038"/>
+          <ac:chgData name="Ivan V Pechenezhskiy" userId="05151ae6-aff0-4c3b-afef-5d8361ad9277" providerId="ADAL" clId="{497C8B30-E653-41E3-BCDE-D087AF3F3AA5}" dt="2026-07-13T19:51:27.501" v="1435" actId="1076"/>
           <ac:spMkLst>
             <pc:docMk/>
             <pc:sldMk cId="0" sldId="256"/>
@@ -174,7 +174,7 @@
           </ac:spMkLst>
         </pc:spChg>
         <pc:spChg chg="add mod">
-          <ac:chgData name="Ivan V Pechenezhskiy" userId="05151ae6-aff0-4c3b-afef-5d8361ad9277" providerId="ADAL" clId="{497C8B30-E653-41E3-BCDE-D087AF3F3AA5}" dt="2026-07-08T03:50:41.602" v="1304" actId="1038"/>
+          <ac:chgData name="Ivan V Pechenezhskiy" userId="05151ae6-aff0-4c3b-afef-5d8361ad9277" providerId="ADAL" clId="{497C8B30-E653-41E3-BCDE-D087AF3F3AA5}" dt="2026-07-13T19:44:49.304" v="1394" actId="1038"/>
           <ac:spMkLst>
             <pc:docMk/>
             <pc:sldMk cId="0" sldId="256"/>
@@ -182,7 +182,7 @@
           </ac:spMkLst>
         </pc:spChg>
         <pc:spChg chg="add mod">
-          <ac:chgData name="Ivan V Pechenezhskiy" userId="05151ae6-aff0-4c3b-afef-5d8361ad9277" providerId="ADAL" clId="{497C8B30-E653-41E3-BCDE-D087AF3F3AA5}" dt="2026-07-08T03:50:41.602" v="1304" actId="1038"/>
+          <ac:chgData name="Ivan V Pechenezhskiy" userId="05151ae6-aff0-4c3b-afef-5d8361ad9277" providerId="ADAL" clId="{497C8B30-E653-41E3-BCDE-D087AF3F3AA5}" dt="2026-07-13T19:44:49.304" v="1394" actId="1038"/>
           <ac:spMkLst>
             <pc:docMk/>
             <pc:sldMk cId="0" sldId="256"/>
@@ -190,7 +190,7 @@
           </ac:spMkLst>
         </pc:spChg>
         <pc:spChg chg="add mod">
-          <ac:chgData name="Ivan V Pechenezhskiy" userId="05151ae6-aff0-4c3b-afef-5d8361ad9277" providerId="ADAL" clId="{497C8B30-E653-41E3-BCDE-D087AF3F3AA5}" dt="2026-07-08T03:50:41.602" v="1304" actId="1038"/>
+          <ac:chgData name="Ivan V Pechenezhskiy" userId="05151ae6-aff0-4c3b-afef-5d8361ad9277" providerId="ADAL" clId="{497C8B30-E653-41E3-BCDE-D087AF3F3AA5}" dt="2026-07-13T19:44:49.304" v="1394" actId="1038"/>
           <ac:spMkLst>
             <pc:docMk/>
             <pc:sldMk cId="0" sldId="256"/>
@@ -198,7 +198,7 @@
           </ac:spMkLst>
         </pc:spChg>
         <pc:spChg chg="add mod">
-          <ac:chgData name="Ivan V Pechenezhskiy" userId="05151ae6-aff0-4c3b-afef-5d8361ad9277" providerId="ADAL" clId="{497C8B30-E653-41E3-BCDE-D087AF3F3AA5}" dt="2026-07-08T03:53:09.635" v="1331" actId="1035"/>
+          <ac:chgData name="Ivan V Pechenezhskiy" userId="05151ae6-aff0-4c3b-afef-5d8361ad9277" providerId="ADAL" clId="{497C8B30-E653-41E3-BCDE-D087AF3F3AA5}" dt="2026-07-13T19:44:49.304" v="1394" actId="1038"/>
           <ac:spMkLst>
             <pc:docMk/>
             <pc:sldMk cId="0" sldId="256"/>
@@ -206,7 +206,7 @@
           </ac:spMkLst>
         </pc:spChg>
         <pc:spChg chg="add mod">
-          <ac:chgData name="Ivan V Pechenezhskiy" userId="05151ae6-aff0-4c3b-afef-5d8361ad9277" providerId="ADAL" clId="{497C8B30-E653-41E3-BCDE-D087AF3F3AA5}" dt="2026-07-08T03:53:06.241" v="1322" actId="1035"/>
+          <ac:chgData name="Ivan V Pechenezhskiy" userId="05151ae6-aff0-4c3b-afef-5d8361ad9277" providerId="ADAL" clId="{497C8B30-E653-41E3-BCDE-D087AF3F3AA5}" dt="2026-07-13T19:44:55.756" v="1396" actId="1035"/>
           <ac:spMkLst>
             <pc:docMk/>
             <pc:sldMk cId="0" sldId="256"/>
@@ -214,7 +214,7 @@
           </ac:spMkLst>
         </pc:spChg>
         <pc:spChg chg="add mod">
-          <ac:chgData name="Ivan V Pechenezhskiy" userId="05151ae6-aff0-4c3b-afef-5d8361ad9277" providerId="ADAL" clId="{497C8B30-E653-41E3-BCDE-D087AF3F3AA5}" dt="2026-07-08T03:53:01.016" v="1310" actId="1035"/>
+          <ac:chgData name="Ivan V Pechenezhskiy" userId="05151ae6-aff0-4c3b-afef-5d8361ad9277" providerId="ADAL" clId="{497C8B30-E653-41E3-BCDE-D087AF3F3AA5}" dt="2026-07-13T19:45:01.020" v="1398" actId="1035"/>
           <ac:spMkLst>
             <pc:docMk/>
             <pc:sldMk cId="0" sldId="256"/>
@@ -245,96 +245,80 @@
             <ac:spMk id="18" creationId="{00000000-0000-0000-0000-000000000000}"/>
           </ac:spMkLst>
         </pc:spChg>
-        <pc:spChg chg="mod">
-          <ac:chgData name="Ivan V Pechenezhskiy" userId="05151ae6-aff0-4c3b-afef-5d8361ad9277" providerId="ADAL" clId="{497C8B30-E653-41E3-BCDE-D087AF3F3AA5}" dt="2026-07-08T03:46:43.544" v="1123" actId="1038"/>
+        <pc:spChg chg="mod ord">
+          <ac:chgData name="Ivan V Pechenezhskiy" userId="05151ae6-aff0-4c3b-afef-5d8361ad9277" providerId="ADAL" clId="{497C8B30-E653-41E3-BCDE-D087AF3F3AA5}" dt="2026-07-13T19:41:59.253" v="1363" actId="171"/>
           <ac:spMkLst>
             <pc:docMk/>
             <pc:sldMk cId="0" sldId="256"/>
             <ac:spMk id="19" creationId="{00000000-0000-0000-0000-000000000000}"/>
           </ac:spMkLst>
         </pc:spChg>
-        <pc:spChg chg="add mod">
-          <ac:chgData name="Ivan V Pechenezhskiy" userId="05151ae6-aff0-4c3b-afef-5d8361ad9277" providerId="ADAL" clId="{497C8B30-E653-41E3-BCDE-D087AF3F3AA5}" dt="2026-07-08T03:49:09.633" v="1194"/>
-          <ac:spMkLst>
-            <pc:docMk/>
-            <pc:sldMk cId="0" sldId="256"/>
-            <ac:spMk id="20" creationId="{E6A11564-4CAD-4A9A-E262-77E3FEB34267}"/>
-          </ac:spMkLst>
-        </pc:spChg>
-        <pc:spChg chg="mod">
-          <ac:chgData name="Ivan V Pechenezhskiy" userId="05151ae6-aff0-4c3b-afef-5d8361ad9277" providerId="ADAL" clId="{497C8B30-E653-41E3-BCDE-D087AF3F3AA5}" dt="2026-07-08T03:46:43.544" v="1123" actId="1038"/>
+        <pc:spChg chg="mod ord">
+          <ac:chgData name="Ivan V Pechenezhskiy" userId="05151ae6-aff0-4c3b-afef-5d8361ad9277" providerId="ADAL" clId="{497C8B30-E653-41E3-BCDE-D087AF3F3AA5}" dt="2026-07-13T19:43:45.959" v="1375" actId="166"/>
           <ac:spMkLst>
             <pc:docMk/>
             <pc:sldMk cId="0" sldId="256"/>
             <ac:spMk id="21" creationId="{00000000-0000-0000-0000-000000000000}"/>
           </ac:spMkLst>
         </pc:spChg>
-        <pc:spChg chg="mod">
-          <ac:chgData name="Ivan V Pechenezhskiy" userId="05151ae6-aff0-4c3b-afef-5d8361ad9277" providerId="ADAL" clId="{497C8B30-E653-41E3-BCDE-D087AF3F3AA5}" dt="2026-07-03T05:02:05.552" v="417" actId="1036"/>
+        <pc:spChg chg="mod ord">
+          <ac:chgData name="Ivan V Pechenezhskiy" userId="05151ae6-aff0-4c3b-afef-5d8361ad9277" providerId="ADAL" clId="{497C8B30-E653-41E3-BCDE-D087AF3F3AA5}" dt="2026-07-13T19:43:45.959" v="1375" actId="166"/>
           <ac:spMkLst>
             <pc:docMk/>
             <pc:sldMk cId="0" sldId="256"/>
             <ac:spMk id="22" creationId="{00000000-0000-0000-0000-000000000000}"/>
           </ac:spMkLst>
         </pc:spChg>
-        <pc:spChg chg="mod">
-          <ac:chgData name="Ivan V Pechenezhskiy" userId="05151ae6-aff0-4c3b-afef-5d8361ad9277" providerId="ADAL" clId="{497C8B30-E653-41E3-BCDE-D087AF3F3AA5}" dt="2026-07-04T04:09:19.026" v="1065" actId="1036"/>
+        <pc:spChg chg="mod ord">
+          <ac:chgData name="Ivan V Pechenezhskiy" userId="05151ae6-aff0-4c3b-afef-5d8361ad9277" providerId="ADAL" clId="{497C8B30-E653-41E3-BCDE-D087AF3F3AA5}" dt="2026-07-13T19:43:54.559" v="1376" actId="166"/>
           <ac:spMkLst>
             <pc:docMk/>
             <pc:sldMk cId="0" sldId="256"/>
             <ac:spMk id="23" creationId="{00000000-0000-0000-0000-000000000000}"/>
           </ac:spMkLst>
         </pc:spChg>
-        <pc:spChg chg="mod">
-          <ac:chgData name="Ivan V Pechenezhskiy" userId="05151ae6-aff0-4c3b-afef-5d8361ad9277" providerId="ADAL" clId="{497C8B30-E653-41E3-BCDE-D087AF3F3AA5}" dt="2026-07-08T03:46:43.544" v="1123" actId="1038"/>
+        <pc:spChg chg="mod ord">
+          <ac:chgData name="Ivan V Pechenezhskiy" userId="05151ae6-aff0-4c3b-afef-5d8361ad9277" providerId="ADAL" clId="{497C8B30-E653-41E3-BCDE-D087AF3F3AA5}" dt="2026-07-13T19:43:59.411" v="1377" actId="166"/>
           <ac:spMkLst>
             <pc:docMk/>
             <pc:sldMk cId="0" sldId="256"/>
             <ac:spMk id="24" creationId="{00000000-0000-0000-0000-000000000000}"/>
           </ac:spMkLst>
         </pc:spChg>
-        <pc:spChg chg="mod">
-          <ac:chgData name="Ivan V Pechenezhskiy" userId="05151ae6-aff0-4c3b-afef-5d8361ad9277" providerId="ADAL" clId="{497C8B30-E653-41E3-BCDE-D087AF3F3AA5}" dt="2026-07-08T03:47:18.535" v="1152" actId="1036"/>
+        <pc:spChg chg="mod ord">
+          <ac:chgData name="Ivan V Pechenezhskiy" userId="05151ae6-aff0-4c3b-afef-5d8361ad9277" providerId="ADAL" clId="{497C8B30-E653-41E3-BCDE-D087AF3F3AA5}" dt="2026-07-13T19:53:52.493" v="1454" actId="1036"/>
           <ac:spMkLst>
             <pc:docMk/>
             <pc:sldMk cId="0" sldId="256"/>
             <ac:spMk id="25" creationId="{00000000-0000-0000-0000-000000000000}"/>
           </ac:spMkLst>
         </pc:spChg>
-        <pc:spChg chg="mod">
-          <ac:chgData name="Ivan V Pechenezhskiy" userId="05151ae6-aff0-4c3b-afef-5d8361ad9277" providerId="ADAL" clId="{497C8B30-E653-41E3-BCDE-D087AF3F3AA5}" dt="2026-07-04T04:09:19.026" v="1065" actId="1036"/>
+        <pc:spChg chg="mod ord">
+          <ac:chgData name="Ivan V Pechenezhskiy" userId="05151ae6-aff0-4c3b-afef-5d8361ad9277" providerId="ADAL" clId="{497C8B30-E653-41E3-BCDE-D087AF3F3AA5}" dt="2026-07-13T19:43:45.959" v="1375" actId="166"/>
           <ac:spMkLst>
             <pc:docMk/>
             <pc:sldMk cId="0" sldId="256"/>
             <ac:spMk id="26" creationId="{00000000-0000-0000-0000-000000000000}"/>
           </ac:spMkLst>
         </pc:spChg>
-        <pc:spChg chg="mod">
-          <ac:chgData name="Ivan V Pechenezhskiy" userId="05151ae6-aff0-4c3b-afef-5d8361ad9277" providerId="ADAL" clId="{497C8B30-E653-41E3-BCDE-D087AF3F3AA5}" dt="2026-07-03T05:19:58.640" v="794" actId="1035"/>
+        <pc:spChg chg="mod ord">
+          <ac:chgData name="Ivan V Pechenezhskiy" userId="05151ae6-aff0-4c3b-afef-5d8361ad9277" providerId="ADAL" clId="{497C8B30-E653-41E3-BCDE-D087AF3F3AA5}" dt="2026-07-13T19:43:45.959" v="1375" actId="166"/>
           <ac:spMkLst>
             <pc:docMk/>
             <pc:sldMk cId="0" sldId="256"/>
             <ac:spMk id="27" creationId="{00000000-0000-0000-0000-000000000000}"/>
           </ac:spMkLst>
         </pc:spChg>
-        <pc:spChg chg="mod">
-          <ac:chgData name="Ivan V Pechenezhskiy" userId="05151ae6-aff0-4c3b-afef-5d8361ad9277" providerId="ADAL" clId="{497C8B30-E653-41E3-BCDE-D087AF3F3AA5}" dt="2026-07-04T04:06:16.715" v="981" actId="14100"/>
+        <pc:spChg chg="mod ord">
+          <ac:chgData name="Ivan V Pechenezhskiy" userId="05151ae6-aff0-4c3b-afef-5d8361ad9277" providerId="ADAL" clId="{497C8B30-E653-41E3-BCDE-D087AF3F3AA5}" dt="2026-07-13T19:43:45.959" v="1375" actId="166"/>
           <ac:spMkLst>
             <pc:docMk/>
             <pc:sldMk cId="0" sldId="256"/>
             <ac:spMk id="28" creationId="{00000000-0000-0000-0000-000000000000}"/>
           </ac:spMkLst>
         </pc:spChg>
-        <pc:spChg chg="add mod">
-          <ac:chgData name="Ivan V Pechenezhskiy" userId="05151ae6-aff0-4c3b-afef-5d8361ad9277" providerId="ADAL" clId="{497C8B30-E653-41E3-BCDE-D087AF3F3AA5}" dt="2026-07-08T03:49:09.633" v="1194"/>
-          <ac:spMkLst>
-            <pc:docMk/>
-            <pc:sldMk cId="0" sldId="256"/>
-            <ac:spMk id="29" creationId="{139B2611-CD08-04BE-574A-00DC6370230B}"/>
-          </ac:spMkLst>
-        </pc:spChg>
         <pc:spChg chg="mod">
-          <ac:chgData name="Ivan V Pechenezhskiy" userId="05151ae6-aff0-4c3b-afef-5d8361ad9277" providerId="ADAL" clId="{497C8B30-E653-41E3-BCDE-D087AF3F3AA5}" dt="2026-07-04T04:04:40.391" v="931" actId="1035"/>
+          <ac:chgData name="Ivan V Pechenezhskiy" userId="05151ae6-aff0-4c3b-afef-5d8361ad9277" providerId="ADAL" clId="{497C8B30-E653-41E3-BCDE-D087AF3F3AA5}" dt="2026-07-13T19:49:44.769" v="1419" actId="255"/>
           <ac:spMkLst>
             <pc:docMk/>
             <pc:sldMk cId="0" sldId="256"/>
@@ -342,7 +326,7 @@
           </ac:spMkLst>
         </pc:spChg>
         <pc:spChg chg="mod">
-          <ac:chgData name="Ivan V Pechenezhskiy" userId="05151ae6-aff0-4c3b-afef-5d8361ad9277" providerId="ADAL" clId="{497C8B30-E653-41E3-BCDE-D087AF3F3AA5}" dt="2026-07-08T03:46:43.544" v="1123" actId="1038"/>
+          <ac:chgData name="Ivan V Pechenezhskiy" userId="05151ae6-aff0-4c3b-afef-5d8361ad9277" providerId="ADAL" clId="{497C8B30-E653-41E3-BCDE-D087AF3F3AA5}" dt="2026-07-13T19:53:34.304" v="1446" actId="1037"/>
           <ac:spMkLst>
             <pc:docMk/>
             <pc:sldMk cId="0" sldId="256"/>
@@ -350,7 +334,7 @@
           </ac:spMkLst>
         </pc:spChg>
         <pc:spChg chg="mod">
-          <ac:chgData name="Ivan V Pechenezhskiy" userId="05151ae6-aff0-4c3b-afef-5d8361ad9277" providerId="ADAL" clId="{497C8B30-E653-41E3-BCDE-D087AF3F3AA5}" dt="2026-07-04T04:04:32.985" v="899" actId="1036"/>
+          <ac:chgData name="Ivan V Pechenezhskiy" userId="05151ae6-aff0-4c3b-afef-5d8361ad9277" providerId="ADAL" clId="{497C8B30-E653-41E3-BCDE-D087AF3F3AA5}" dt="2026-07-13T19:51:22.207" v="1434" actId="255"/>
           <ac:spMkLst>
             <pc:docMk/>
             <pc:sldMk cId="0" sldId="256"/>
@@ -358,7 +342,7 @@
           </ac:spMkLst>
         </pc:spChg>
         <pc:spChg chg="mod">
-          <ac:chgData name="Ivan V Pechenezhskiy" userId="05151ae6-aff0-4c3b-afef-5d8361ad9277" providerId="ADAL" clId="{497C8B30-E653-41E3-BCDE-D087AF3F3AA5}" dt="2026-07-04T04:04:26.359" v="878" actId="1036"/>
+          <ac:chgData name="Ivan V Pechenezhskiy" userId="05151ae6-aff0-4c3b-afef-5d8361ad9277" providerId="ADAL" clId="{497C8B30-E653-41E3-BCDE-D087AF3F3AA5}" dt="2026-07-13T19:49:53.512" v="1421" actId="255"/>
           <ac:spMkLst>
             <pc:docMk/>
             <pc:sldMk cId="0" sldId="256"/>
@@ -366,7 +350,7 @@
           </ac:spMkLst>
         </pc:spChg>
         <pc:spChg chg="mod">
-          <ac:chgData name="Ivan V Pechenezhskiy" userId="05151ae6-aff0-4c3b-afef-5d8361ad9277" providerId="ADAL" clId="{497C8B30-E653-41E3-BCDE-D087AF3F3AA5}" dt="2026-07-04T04:09:19.026" v="1065" actId="1036"/>
+          <ac:chgData name="Ivan V Pechenezhskiy" userId="05151ae6-aff0-4c3b-afef-5d8361ad9277" providerId="ADAL" clId="{497C8B30-E653-41E3-BCDE-D087AF3F3AA5}" dt="2026-07-13T19:51:05.545" v="1432" actId="255"/>
           <ac:spMkLst>
             <pc:docMk/>
             <pc:sldMk cId="0" sldId="256"/>
@@ -374,7 +358,7 @@
           </ac:spMkLst>
         </pc:spChg>
         <pc:spChg chg="mod">
-          <ac:chgData name="Ivan V Pechenezhskiy" userId="05151ae6-aff0-4c3b-afef-5d8361ad9277" providerId="ADAL" clId="{497C8B30-E653-41E3-BCDE-D087AF3F3AA5}" dt="2026-07-08T03:46:43.544" v="1123" actId="1038"/>
+          <ac:chgData name="Ivan V Pechenezhskiy" userId="05151ae6-aff0-4c3b-afef-5d8361ad9277" providerId="ADAL" clId="{497C8B30-E653-41E3-BCDE-D087AF3F3AA5}" dt="2026-07-13T19:51:32.774" v="1436" actId="255"/>
           <ac:spMkLst>
             <pc:docMk/>
             <pc:sldMk cId="0" sldId="256"/>
@@ -382,7 +366,7 @@
           </ac:spMkLst>
         </pc:spChg>
         <pc:spChg chg="mod">
-          <ac:chgData name="Ivan V Pechenezhskiy" userId="05151ae6-aff0-4c3b-afef-5d8361ad9277" providerId="ADAL" clId="{497C8B30-E653-41E3-BCDE-D087AF3F3AA5}" dt="2026-07-03T05:11:42.790" v="609" actId="1035"/>
+          <ac:chgData name="Ivan V Pechenezhskiy" userId="05151ae6-aff0-4c3b-afef-5d8361ad9277" providerId="ADAL" clId="{497C8B30-E653-41E3-BCDE-D087AF3F3AA5}" dt="2026-07-13T19:50:14.465" v="1424" actId="255"/>
           <ac:spMkLst>
             <pc:docMk/>
             <pc:sldMk cId="0" sldId="256"/>
@@ -390,7 +374,7 @@
           </ac:spMkLst>
         </pc:spChg>
         <pc:spChg chg="mod">
-          <ac:chgData name="Ivan V Pechenezhskiy" userId="05151ae6-aff0-4c3b-afef-5d8361ad9277" providerId="ADAL" clId="{497C8B30-E653-41E3-BCDE-D087AF3F3AA5}" dt="2026-07-08T03:47:18.535" v="1152" actId="1036"/>
+          <ac:chgData name="Ivan V Pechenezhskiy" userId="05151ae6-aff0-4c3b-afef-5d8361ad9277" providerId="ADAL" clId="{497C8B30-E653-41E3-BCDE-D087AF3F3AA5}" dt="2026-07-13T19:53:58.248" v="1455" actId="1036"/>
           <ac:spMkLst>
             <pc:docMk/>
             <pc:sldMk cId="0" sldId="256"/>
@@ -398,31 +382,23 @@
           </ac:spMkLst>
         </pc:spChg>
         <pc:spChg chg="mod">
-          <ac:chgData name="Ivan V Pechenezhskiy" userId="05151ae6-aff0-4c3b-afef-5d8361ad9277" providerId="ADAL" clId="{497C8B30-E653-41E3-BCDE-D087AF3F3AA5}" dt="2026-07-04T04:09:19.026" v="1065" actId="1036"/>
+          <ac:chgData name="Ivan V Pechenezhskiy" userId="05151ae6-aff0-4c3b-afef-5d8361ad9277" providerId="ADAL" clId="{497C8B30-E653-41E3-BCDE-D087AF3F3AA5}" dt="2026-07-13T19:50:23.518" v="1426" actId="255"/>
           <ac:spMkLst>
             <pc:docMk/>
             <pc:sldMk cId="0" sldId="256"/>
             <ac:spMk id="38" creationId="{00000000-0000-0000-0000-000000000000}"/>
           </ac:spMkLst>
         </pc:spChg>
-        <pc:spChg chg="del mod">
-          <ac:chgData name="Ivan V Pechenezhskiy" userId="05151ae6-aff0-4c3b-afef-5d8361ad9277" providerId="ADAL" clId="{497C8B30-E653-41E3-BCDE-D087AF3F3AA5}" dt="2026-07-08T03:48:03.392" v="1181" actId="478"/>
-          <ac:spMkLst>
-            <pc:docMk/>
-            <pc:sldMk cId="0" sldId="256"/>
-            <ac:spMk id="39" creationId="{00000000-0000-0000-0000-000000000000}"/>
-          </ac:spMkLst>
-        </pc:spChg>
         <pc:spChg chg="mod">
-          <ac:chgData name="Ivan V Pechenezhskiy" userId="05151ae6-aff0-4c3b-afef-5d8361ad9277" providerId="ADAL" clId="{497C8B30-E653-41E3-BCDE-D087AF3F3AA5}" dt="2026-07-04T04:09:19.026" v="1065" actId="1036"/>
+          <ac:chgData name="Ivan V Pechenezhskiy" userId="05151ae6-aff0-4c3b-afef-5d8361ad9277" providerId="ADAL" clId="{497C8B30-E653-41E3-BCDE-D087AF3F3AA5}" dt="2026-07-13T19:50:41.173" v="1428" actId="255"/>
           <ac:spMkLst>
             <pc:docMk/>
             <pc:sldMk cId="0" sldId="256"/>
             <ac:spMk id="40" creationId="{00000000-0000-0000-0000-000000000000}"/>
           </ac:spMkLst>
         </pc:spChg>
-        <pc:spChg chg="mod">
-          <ac:chgData name="Ivan V Pechenezhskiy" userId="05151ae6-aff0-4c3b-afef-5d8361ad9277" providerId="ADAL" clId="{497C8B30-E653-41E3-BCDE-D087AF3F3AA5}" dt="2026-07-04T04:06:19.694" v="990" actId="1035"/>
+        <pc:spChg chg="mod ord">
+          <ac:chgData name="Ivan V Pechenezhskiy" userId="05151ae6-aff0-4c3b-afef-5d8361ad9277" providerId="ADAL" clId="{497C8B30-E653-41E3-BCDE-D087AF3F3AA5}" dt="2026-07-13T19:52:18.078" v="1438" actId="255"/>
           <ac:spMkLst>
             <pc:docMk/>
             <pc:sldMk cId="0" sldId="256"/>
@@ -437,44 +413,12 @@
             <ac:spMk id="42" creationId="{00000000-0000-0000-0000-000000000000}"/>
           </ac:spMkLst>
         </pc:spChg>
-        <pc:spChg chg="add mod">
-          <ac:chgData name="Ivan V Pechenezhskiy" userId="05151ae6-aff0-4c3b-afef-5d8361ad9277" providerId="ADAL" clId="{497C8B30-E653-41E3-BCDE-D087AF3F3AA5}" dt="2026-07-08T03:49:09.633" v="1194"/>
-          <ac:spMkLst>
-            <pc:docMk/>
-            <pc:sldMk cId="0" sldId="256"/>
-            <ac:spMk id="43" creationId="{797DF212-4641-535B-EDD7-425D6C3AB02E}"/>
-          </ac:spMkLst>
-        </pc:spChg>
-        <pc:spChg chg="add mod">
-          <ac:chgData name="Ivan V Pechenezhskiy" userId="05151ae6-aff0-4c3b-afef-5d8361ad9277" providerId="ADAL" clId="{497C8B30-E653-41E3-BCDE-D087AF3F3AA5}" dt="2026-07-08T03:49:29.969" v="1232" actId="1076"/>
-          <ac:spMkLst>
-            <pc:docMk/>
-            <pc:sldMk cId="0" sldId="256"/>
-            <ac:spMk id="46" creationId="{4CBD97B0-FCEC-E0BA-0BEE-ED3B3B63F55E}"/>
-          </ac:spMkLst>
-        </pc:spChg>
-        <pc:spChg chg="add mod">
-          <ac:chgData name="Ivan V Pechenezhskiy" userId="05151ae6-aff0-4c3b-afef-5d8361ad9277" providerId="ADAL" clId="{497C8B30-E653-41E3-BCDE-D087AF3F3AA5}" dt="2026-07-08T03:49:29.969" v="1232" actId="1076"/>
-          <ac:spMkLst>
-            <pc:docMk/>
-            <pc:sldMk cId="0" sldId="256"/>
-            <ac:spMk id="47" creationId="{41B90641-1851-052C-0CEA-747076EE788B}"/>
-          </ac:spMkLst>
-        </pc:spChg>
-        <pc:spChg chg="add mod">
-          <ac:chgData name="Ivan V Pechenezhskiy" userId="05151ae6-aff0-4c3b-afef-5d8361ad9277" providerId="ADAL" clId="{497C8B30-E653-41E3-BCDE-D087AF3F3AA5}" dt="2026-07-08T05:14:13.093" v="1349" actId="1038"/>
+        <pc:spChg chg="add mod ord">
+          <ac:chgData name="Ivan V Pechenezhskiy" userId="05151ae6-aff0-4c3b-afef-5d8361ad9277" providerId="ADAL" clId="{497C8B30-E653-41E3-BCDE-D087AF3F3AA5}" dt="2026-07-13T19:52:08.602" v="1437" actId="255"/>
           <ac:spMkLst>
             <pc:docMk/>
             <pc:sldMk cId="0" sldId="256"/>
             <ac:spMk id="48" creationId="{3E69DFA5-A952-2AED-56C9-016D15023DBB}"/>
-          </ac:spMkLst>
-        </pc:spChg>
-        <pc:spChg chg="add mod">
-          <ac:chgData name="Ivan V Pechenezhskiy" userId="05151ae6-aff0-4c3b-afef-5d8361ad9277" providerId="ADAL" clId="{497C8B30-E653-41E3-BCDE-D087AF3F3AA5}" dt="2026-07-08T03:49:29.969" v="1232" actId="1076"/>
-          <ac:spMkLst>
-            <pc:docMk/>
-            <pc:sldMk cId="0" sldId="256"/>
-            <ac:spMk id="49" creationId="{D786C316-71C8-325E-6AC0-9671EB4E191F}"/>
           </ac:spMkLst>
         </pc:spChg>
         <pc:spChg chg="add mod">
@@ -486,15 +430,15 @@
           </ac:spMkLst>
         </pc:spChg>
         <pc:spChg chg="add mod">
-          <ac:chgData name="Ivan V Pechenezhskiy" userId="05151ae6-aff0-4c3b-afef-5d8361ad9277" providerId="ADAL" clId="{497C8B30-E653-41E3-BCDE-D087AF3F3AA5}" dt="2026-07-08T03:50:41.602" v="1304" actId="1038"/>
+          <ac:chgData name="Ivan V Pechenezhskiy" userId="05151ae6-aff0-4c3b-afef-5d8361ad9277" providerId="ADAL" clId="{497C8B30-E653-41E3-BCDE-D087AF3F3AA5}" dt="2026-07-13T19:44:49.304" v="1394" actId="1038"/>
           <ac:spMkLst>
             <pc:docMk/>
             <pc:sldMk cId="0" sldId="256"/>
             <ac:spMk id="53" creationId="{9C4089C5-22FE-3D9C-27E7-E3C51D1874FE}"/>
           </ac:spMkLst>
         </pc:spChg>
-        <pc:spChg chg="add mod">
-          <ac:chgData name="Ivan V Pechenezhskiy" userId="05151ae6-aff0-4c3b-afef-5d8361ad9277" providerId="ADAL" clId="{497C8B30-E653-41E3-BCDE-D087AF3F3AA5}" dt="2026-07-04T04:09:19.026" v="1065" actId="1036"/>
+        <pc:spChg chg="add mod ord">
+          <ac:chgData name="Ivan V Pechenezhskiy" userId="05151ae6-aff0-4c3b-afef-5d8361ad9277" providerId="ADAL" clId="{497C8B30-E653-41E3-BCDE-D087AF3F3AA5}" dt="2026-07-13T19:41:13.874" v="1352" actId="171"/>
           <ac:spMkLst>
             <pc:docMk/>
             <pc:sldMk cId="0" sldId="256"/>
@@ -502,7 +446,7 @@
           </ac:spMkLst>
         </pc:spChg>
         <pc:spChg chg="add mod">
-          <ac:chgData name="Ivan V Pechenezhskiy" userId="05151ae6-aff0-4c3b-afef-5d8361ad9277" providerId="ADAL" clId="{497C8B30-E653-41E3-BCDE-D087AF3F3AA5}" dt="2026-07-08T03:50:41.602" v="1304" actId="1038"/>
+          <ac:chgData name="Ivan V Pechenezhskiy" userId="05151ae6-aff0-4c3b-afef-5d8361ad9277" providerId="ADAL" clId="{497C8B30-E653-41E3-BCDE-D087AF3F3AA5}" dt="2026-07-13T19:44:49.304" v="1394" actId="1038"/>
           <ac:spMkLst>
             <pc:docMk/>
             <pc:sldMk cId="0" sldId="256"/>
@@ -510,7 +454,7 @@
           </ac:spMkLst>
         </pc:spChg>
         <pc:spChg chg="add mod">
-          <ac:chgData name="Ivan V Pechenezhskiy" userId="05151ae6-aff0-4c3b-afef-5d8361ad9277" providerId="ADAL" clId="{497C8B30-E653-41E3-BCDE-D087AF3F3AA5}" dt="2026-07-08T03:50:41.602" v="1304" actId="1038"/>
+          <ac:chgData name="Ivan V Pechenezhskiy" userId="05151ae6-aff0-4c3b-afef-5d8361ad9277" providerId="ADAL" clId="{497C8B30-E653-41E3-BCDE-D087AF3F3AA5}" dt="2026-07-13T19:45:05.149" v="1405" actId="1035"/>
           <ac:spMkLst>
             <pc:docMk/>
             <pc:sldMk cId="0" sldId="256"/>
@@ -518,23 +462,23 @@
           </ac:spMkLst>
         </pc:spChg>
         <pc:spChg chg="add mod">
-          <ac:chgData name="Ivan V Pechenezhskiy" userId="05151ae6-aff0-4c3b-afef-5d8361ad9277" providerId="ADAL" clId="{497C8B30-E653-41E3-BCDE-D087AF3F3AA5}" dt="2026-07-08T03:50:41.602" v="1304" actId="1038"/>
+          <ac:chgData name="Ivan V Pechenezhskiy" userId="05151ae6-aff0-4c3b-afef-5d8361ad9277" providerId="ADAL" clId="{497C8B30-E653-41E3-BCDE-D087AF3F3AA5}" dt="2026-07-13T19:44:49.304" v="1394" actId="1038"/>
           <ac:spMkLst>
             <pc:docMk/>
             <pc:sldMk cId="0" sldId="256"/>
             <ac:spMk id="57" creationId="{DFE149B0-7914-9776-C40E-B06E1741D9B6}"/>
           </ac:spMkLst>
         </pc:spChg>
-        <pc:cxnChg chg="mod">
-          <ac:chgData name="Ivan V Pechenezhskiy" userId="05151ae6-aff0-4c3b-afef-5d8361ad9277" providerId="ADAL" clId="{497C8B30-E653-41E3-BCDE-D087AF3F3AA5}" dt="2026-07-04T04:10:02.627" v="1067" actId="1036"/>
+        <pc:cxnChg chg="mod ord">
+          <ac:chgData name="Ivan V Pechenezhskiy" userId="05151ae6-aff0-4c3b-afef-5d8361ad9277" providerId="ADAL" clId="{497C8B30-E653-41E3-BCDE-D087AF3F3AA5}" dt="2026-07-13T19:42:13.585" v="1365" actId="166"/>
           <ac:cxnSpMkLst>
             <pc:docMk/>
             <pc:sldMk cId="0" sldId="256"/>
             <ac:cxnSpMk id="7" creationId="{00000000-0000-0000-0000-000000000000}"/>
           </ac:cxnSpMkLst>
         </pc:cxnChg>
-        <pc:cxnChg chg="mod">
-          <ac:chgData name="Ivan V Pechenezhskiy" userId="05151ae6-aff0-4c3b-afef-5d8361ad9277" providerId="ADAL" clId="{497C8B30-E653-41E3-BCDE-D087AF3F3AA5}" dt="2026-07-04T04:06:00.930" v="980" actId="14100"/>
+        <pc:cxnChg chg="mod ord">
+          <ac:chgData name="Ivan V Pechenezhskiy" userId="05151ae6-aff0-4c3b-afef-5d8361ad9277" providerId="ADAL" clId="{497C8B30-E653-41E3-BCDE-D087AF3F3AA5}" dt="2026-07-13T19:42:08.638" v="1364" actId="166"/>
           <ac:cxnSpMkLst>
             <pc:docMk/>
             <pc:sldMk cId="0" sldId="256"/>
@@ -549,36 +493,12 @@
             <ac:cxnSpMk id="10" creationId="{00000000-0000-0000-0000-000000000000}"/>
           </ac:cxnSpMkLst>
         </pc:cxnChg>
-        <pc:cxnChg chg="mod">
-          <ac:chgData name="Ivan V Pechenezhskiy" userId="05151ae6-aff0-4c3b-afef-5d8361ad9277" providerId="ADAL" clId="{497C8B30-E653-41E3-BCDE-D087AF3F3AA5}" dt="2026-07-03T05:01:28.456" v="394" actId="1037"/>
+        <pc:cxnChg chg="mod ord">
+          <ac:chgData name="Ivan V Pechenezhskiy" userId="05151ae6-aff0-4c3b-afef-5d8361ad9277" providerId="ADAL" clId="{497C8B30-E653-41E3-BCDE-D087AF3F3AA5}" dt="2026-07-13T19:42:28.097" v="1366" actId="166"/>
           <ac:cxnSpMkLst>
             <pc:docMk/>
             <pc:sldMk cId="0" sldId="256"/>
             <ac:cxnSpMk id="11" creationId="{00000000-0000-0000-0000-000000000000}"/>
-          </ac:cxnSpMkLst>
-        </pc:cxnChg>
-        <pc:cxnChg chg="add mod">
-          <ac:chgData name="Ivan V Pechenezhskiy" userId="05151ae6-aff0-4c3b-afef-5d8361ad9277" providerId="ADAL" clId="{497C8B30-E653-41E3-BCDE-D087AF3F3AA5}" dt="2026-07-08T03:49:09.633" v="1194"/>
-          <ac:cxnSpMkLst>
-            <pc:docMk/>
-            <pc:sldMk cId="0" sldId="256"/>
-            <ac:cxnSpMk id="15" creationId="{359B6CDB-621F-8C4C-CBA0-1B5A8648C9DF}"/>
-          </ac:cxnSpMkLst>
-        </pc:cxnChg>
-        <pc:cxnChg chg="add mod">
-          <ac:chgData name="Ivan V Pechenezhskiy" userId="05151ae6-aff0-4c3b-afef-5d8361ad9277" providerId="ADAL" clId="{497C8B30-E653-41E3-BCDE-D087AF3F3AA5}" dt="2026-07-08T03:49:16.274" v="1198" actId="571"/>
-          <ac:cxnSpMkLst>
-            <pc:docMk/>
-            <pc:sldMk cId="0" sldId="256"/>
-            <ac:cxnSpMk id="44" creationId="{FCCF1FE1-6863-BE73-EB49-C950B66751DC}"/>
-          </ac:cxnSpMkLst>
-        </pc:cxnChg>
-        <pc:cxnChg chg="add mod">
-          <ac:chgData name="Ivan V Pechenezhskiy" userId="05151ae6-aff0-4c3b-afef-5d8361ad9277" providerId="ADAL" clId="{497C8B30-E653-41E3-BCDE-D087AF3F3AA5}" dt="2026-07-08T03:49:29.969" v="1232" actId="1076"/>
-          <ac:cxnSpMkLst>
-            <pc:docMk/>
-            <pc:sldMk cId="0" sldId="256"/>
-            <ac:cxnSpMk id="45" creationId="{84BF09E1-EF01-5A08-C96F-858CD7E8A0DC}"/>
           </ac:cxnSpMkLst>
         </pc:cxnChg>
         <pc:cxnChg chg="add mod">
@@ -950,7 +870,7 @@
           <a:p>
             <a:fld id="{E9373EDD-C250-4B95-9196-DEA1E9C34B38}" type="datetimeFigureOut">
               <a:rPr lang="en-US" smtClean="0"/>
-              <a:t>7/7/2026</a:t>
+              <a:t>7/13/2026</a:t>
             </a:fld>
             <a:endParaRPr lang="en-US"/>
           </a:p>
@@ -1485,7 +1405,7 @@
           <a:p>
             <a:fld id="{5BCAD085-E8A6-8845-BD4E-CB4CCA059FC4}" type="datetimeFigureOut">
               <a:rPr lang="en-US" smtClean="0"/>
-              <a:t>7/7/2026</a:t>
+              <a:t>7/13/2026</a:t>
             </a:fld>
             <a:endParaRPr lang="en-US"/>
           </a:p>
@@ -1653,7 +1573,7 @@
           <a:p>
             <a:fld id="{5BCAD085-E8A6-8845-BD4E-CB4CCA059FC4}" type="datetimeFigureOut">
               <a:rPr lang="en-US" smtClean="0"/>
-              <a:t>7/7/2026</a:t>
+              <a:t>7/13/2026</a:t>
             </a:fld>
             <a:endParaRPr lang="en-US"/>
           </a:p>
@@ -1831,7 +1751,7 @@
           <a:p>
             <a:fld id="{5BCAD085-E8A6-8845-BD4E-CB4CCA059FC4}" type="datetimeFigureOut">
               <a:rPr lang="en-US" smtClean="0"/>
-              <a:t>7/7/2026</a:t>
+              <a:t>7/13/2026</a:t>
             </a:fld>
             <a:endParaRPr lang="en-US"/>
           </a:p>
@@ -1999,7 +1919,7 @@
           <a:p>
             <a:fld id="{5BCAD085-E8A6-8845-BD4E-CB4CCA059FC4}" type="datetimeFigureOut">
               <a:rPr lang="en-US" smtClean="0"/>
-              <a:t>7/7/2026</a:t>
+              <a:t>7/13/2026</a:t>
             </a:fld>
             <a:endParaRPr lang="en-US"/>
           </a:p>
@@ -2244,7 +2164,7 @@
           <a:p>
             <a:fld id="{5BCAD085-E8A6-8845-BD4E-CB4CCA059FC4}" type="datetimeFigureOut">
               <a:rPr lang="en-US" smtClean="0"/>
-              <a:t>7/7/2026</a:t>
+              <a:t>7/13/2026</a:t>
             </a:fld>
             <a:endParaRPr lang="en-US"/>
           </a:p>
@@ -2529,7 +2449,7 @@
           <a:p>
             <a:fld id="{5BCAD085-E8A6-8845-BD4E-CB4CCA059FC4}" type="datetimeFigureOut">
               <a:rPr lang="en-US" smtClean="0"/>
-              <a:t>7/7/2026</a:t>
+              <a:t>7/13/2026</a:t>
             </a:fld>
             <a:endParaRPr lang="en-US"/>
           </a:p>
@@ -2948,7 +2868,7 @@
           <a:p>
             <a:fld id="{5BCAD085-E8A6-8845-BD4E-CB4CCA059FC4}" type="datetimeFigureOut">
               <a:rPr lang="en-US" smtClean="0"/>
-              <a:t>7/7/2026</a:t>
+              <a:t>7/13/2026</a:t>
             </a:fld>
             <a:endParaRPr lang="en-US"/>
           </a:p>
@@ -3065,7 +2985,7 @@
           <a:p>
             <a:fld id="{5BCAD085-E8A6-8845-BD4E-CB4CCA059FC4}" type="datetimeFigureOut">
               <a:rPr lang="en-US" smtClean="0"/>
-              <a:t>7/7/2026</a:t>
+              <a:t>7/13/2026</a:t>
             </a:fld>
             <a:endParaRPr lang="en-US"/>
           </a:p>
@@ -3160,7 +3080,7 @@
           <a:p>
             <a:fld id="{5BCAD085-E8A6-8845-BD4E-CB4CCA059FC4}" type="datetimeFigureOut">
               <a:rPr lang="en-US" smtClean="0"/>
-              <a:t>7/7/2026</a:t>
+              <a:t>7/13/2026</a:t>
             </a:fld>
             <a:endParaRPr lang="en-US"/>
           </a:p>
@@ -3435,7 +3355,7 @@
           <a:p>
             <a:fld id="{5BCAD085-E8A6-8845-BD4E-CB4CCA059FC4}" type="datetimeFigureOut">
               <a:rPr lang="en-US" smtClean="0"/>
-              <a:t>7/7/2026</a:t>
+              <a:t>7/13/2026</a:t>
             </a:fld>
             <a:endParaRPr lang="en-US"/>
           </a:p>
@@ -3687,7 +3607,7 @@
           <a:p>
             <a:fld id="{5BCAD085-E8A6-8845-BD4E-CB4CCA059FC4}" type="datetimeFigureOut">
               <a:rPr lang="en-US" smtClean="0"/>
-              <a:t>7/7/2026</a:t>
+              <a:t>7/13/2026</a:t>
             </a:fld>
             <a:endParaRPr lang="en-US"/>
           </a:p>
@@ -3898,7 +3818,7 @@
           <a:p>
             <a:fld id="{5BCAD085-E8A6-8845-BD4E-CB4CCA059FC4}" type="datetimeFigureOut">
               <a:rPr lang="en-US" smtClean="0"/>
-              <a:t>7/7/2026</a:t>
+              <a:t>7/13/2026</a:t>
             </a:fld>
             <a:endParaRPr lang="en-US"/>
           </a:p>
@@ -4283,13 +4203,59 @@
       </p:grpSpPr>
       <p:sp>
         <p:nvSpPr>
+          <p:cNvPr id="54" name="Rectangle 53">
+            <a:extLst>
+              <a:ext uri="{FF2B5EF4-FFF2-40B4-BE49-F238E27FC236}">
+                <a16:creationId xmlns:a16="http://schemas.microsoft.com/office/drawing/2014/main" id="{65398C4F-EB0B-354D-1D29-34208C115C7C}"/>
+              </a:ext>
+            </a:extLst>
+          </p:cNvPr>
+          <p:cNvSpPr/>
+          <p:nvPr/>
+        </p:nvSpPr>
+        <p:spPr>
+          <a:xfrm>
+            <a:off x="30988" y="1884859"/>
+            <a:ext cx="2514600" cy="5617966"/>
+          </a:xfrm>
+          <a:prstGeom prst="rect">
+            <a:avLst/>
+          </a:prstGeom>
+          <a:noFill/>
+          <a:ln w="19050"/>
+        </p:spPr>
+        <p:style>
+          <a:lnRef idx="1">
+            <a:schemeClr val="accent1"/>
+          </a:lnRef>
+          <a:fillRef idx="3">
+            <a:schemeClr val="accent1"/>
+          </a:fillRef>
+          <a:effectRef idx="2">
+            <a:schemeClr val="accent1"/>
+          </a:effectRef>
+          <a:fontRef idx="minor">
+            <a:schemeClr val="lt1"/>
+          </a:fontRef>
+        </p:style>
+        <p:txBody>
+          <a:bodyPr rtlCol="0" anchor="ctr"/>
+          <a:lstStyle/>
+          <a:p>
+            <a:pPr algn="ctr"/>
+            <a:endParaRPr lang="en-US"/>
+          </a:p>
+        </p:txBody>
+      </p:sp>
+      <p:sp>
+        <p:nvSpPr>
           <p:cNvPr id="2" name="50 K thermal stage fill"/>
           <p:cNvSpPr/>
           <p:nvPr/>
         </p:nvSpPr>
         <p:spPr>
           <a:xfrm>
-            <a:off x="110802" y="1960460"/>
+            <a:off x="129813" y="1960460"/>
             <a:ext cx="2360618" cy="5466616"/>
           </a:xfrm>
           <a:prstGeom prst="rect">
@@ -4376,54 +4342,6 @@
       </p:sp>
       <p:cxnSp>
         <p:nvCxnSpPr>
-          <p:cNvPr id="7" name="output coax vertical"/>
-          <p:cNvCxnSpPr>
-            <a:cxnSpLocks/>
-          </p:cNvCxnSpPr>
-          <p:nvPr/>
-        </p:nvCxnSpPr>
-        <p:spPr>
-          <a:xfrm flipH="1">
-            <a:off x="719382" y="192250"/>
-            <a:ext cx="2807" cy="4129037"/>
-          </a:xfrm>
-          <a:prstGeom prst="line">
-            <a:avLst/>
-          </a:prstGeom>
-          <a:ln w="68580">
-            <a:solidFill>
-              <a:srgbClr val="000000"/>
-            </a:solidFill>
-          </a:ln>
-          <a:effectLst/>
-        </p:spPr>
-      </p:cxnSp>
-      <p:cxnSp>
-        <p:nvCxnSpPr>
-          <p:cNvPr id="8" name="input coax vertical"/>
-          <p:cNvCxnSpPr>
-            <a:cxnSpLocks/>
-          </p:cNvCxnSpPr>
-          <p:nvPr/>
-        </p:nvCxnSpPr>
-        <p:spPr>
-          <a:xfrm>
-            <a:off x="1953979" y="187632"/>
-            <a:ext cx="0" cy="5893829"/>
-          </a:xfrm>
-          <a:prstGeom prst="line">
-            <a:avLst/>
-          </a:prstGeom>
-          <a:ln w="68580">
-            <a:solidFill>
-              <a:srgbClr val="000000"/>
-            </a:solidFill>
-          </a:ln>
-          <a:effectLst/>
-        </p:spPr>
-      </p:cxnSp>
-      <p:cxnSp>
-        <p:nvCxnSpPr>
           <p:cNvPr id="10" name="HEMT output bend"/>
           <p:cNvCxnSpPr>
             <a:cxnSpLocks/>
@@ -4434,28 +4352,6 @@
           <a:xfrm flipH="1">
             <a:off x="548789" y="4307535"/>
             <a:ext cx="173390" cy="279227"/>
-          </a:xfrm>
-          <a:prstGeom prst="line">
-            <a:avLst/>
-          </a:prstGeom>
-          <a:ln w="68580">
-            <a:solidFill>
-              <a:srgbClr val="000000"/>
-            </a:solidFill>
-          </a:ln>
-          <a:effectLst/>
-        </p:spPr>
-      </p:cxnSp>
-      <p:cxnSp>
-        <p:nvCxnSpPr>
-          <p:cNvPr id="11" name="filter coax vertical"/>
-          <p:cNvCxnSpPr/>
-          <p:nvPr/>
-        </p:nvCxnSpPr>
-        <p:spPr>
-          <a:xfrm>
-            <a:off x="564686" y="4562785"/>
-            <a:ext cx="0" cy="1504188"/>
           </a:xfrm>
           <a:prstGeom prst="line">
             <a:avLst/>
@@ -4563,44 +4459,723 @@
       </p:sp>
       <p:sp>
         <p:nvSpPr>
-          <p:cNvPr id="19" name="Cryoperm can outline"/>
-          <p:cNvSpPr/>
+          <p:cNvPr id="30" name="300 K label"/>
+          <p:cNvSpPr txBox="1"/>
           <p:nvPr/>
         </p:nvSpPr>
         <p:spPr>
           <a:xfrm>
-            <a:off x="258593" y="4762854"/>
-            <a:ext cx="2039363" cy="2330636"/>
+            <a:off x="1094060" y="596731"/>
+            <a:ext cx="509755" cy="261610"/>
           </a:xfrm>
           <a:prstGeom prst="rect">
             <a:avLst/>
           </a:prstGeom>
           <a:noFill/>
-          <a:ln w="38100">
-            <a:solidFill>
-              <a:srgbClr val="F5A000"/>
-            </a:solidFill>
-          </a:ln>
           <a:effectLst/>
         </p:spPr>
         <p:txBody>
-          <a:bodyPr rtlCol="0" anchor="ctr"/>
+          <a:bodyPr wrap="none" lIns="0" tIns="0" rIns="0" bIns="0" anchor="ctr">
+            <a:spAutoFit/>
+          </a:bodyPr>
           <a:lstStyle/>
           <a:p>
             <a:pPr algn="ctr"/>
-            <a:endParaRPr/>
-          </a:p>
-        </p:txBody>
-      </p:sp>
-      <p:sp>
-        <p:nvSpPr>
-          <p:cNvPr id="21" name="NARDA amplifier triangle"/>
+            <a:r>
+              <a:rPr sz="1700" dirty="0">
+                <a:solidFill>
+                  <a:srgbClr val="000000"/>
+                </a:solidFill>
+                <a:latin typeface="Times New Roman"/>
+              </a:rPr>
+              <a:t>300</a:t>
+            </a:r>
+            <a:r>
+              <a:rPr lang="en-US" sz="800" dirty="0">
+                <a:solidFill>
+                  <a:srgbClr val="000000"/>
+                </a:solidFill>
+                <a:latin typeface="Times New Roman"/>
+              </a:rPr>
+              <a:t> </a:t>
+            </a:r>
+            <a:r>
+              <a:rPr sz="1700" dirty="0">
+                <a:solidFill>
+                  <a:srgbClr val="000000"/>
+                </a:solidFill>
+                <a:latin typeface="Times New Roman"/>
+              </a:rPr>
+              <a:t>K</a:t>
+            </a:r>
+          </a:p>
+        </p:txBody>
+      </p:sp>
+      <p:sp>
+        <p:nvSpPr>
+          <p:cNvPr id="31" name="NARDA label"/>
+          <p:cNvSpPr txBox="1"/>
+          <p:nvPr/>
+        </p:nvSpPr>
+        <p:spPr>
+          <a:xfrm>
+            <a:off x="746375" y="975082"/>
+            <a:ext cx="737061" cy="246221"/>
+          </a:xfrm>
+          <a:prstGeom prst="rect">
+            <a:avLst/>
+          </a:prstGeom>
+          <a:noFill/>
+          <a:effectLst/>
+        </p:spPr>
+        <p:txBody>
+          <a:bodyPr wrap="square" lIns="0" tIns="0" rIns="0" bIns="0" anchor="ctr">
+            <a:spAutoFit/>
+          </a:bodyPr>
+          <a:lstStyle/>
+          <a:p>
+            <a:pPr algn="ctr"/>
+            <a:r>
+              <a:rPr sz="1600" dirty="0">
+                <a:solidFill>
+                  <a:srgbClr val="000000"/>
+                </a:solidFill>
+                <a:latin typeface="Times New Roman"/>
+              </a:rPr>
+              <a:t>+30</a:t>
+            </a:r>
+            <a:r>
+              <a:rPr lang="en-US" sz="800" dirty="0">
+                <a:solidFill>
+                  <a:srgbClr val="000000"/>
+                </a:solidFill>
+                <a:latin typeface="Times New Roman"/>
+              </a:rPr>
+              <a:t> </a:t>
+            </a:r>
+            <a:r>
+              <a:rPr sz="1600" dirty="0">
+                <a:solidFill>
+                  <a:srgbClr val="000000"/>
+                </a:solidFill>
+                <a:latin typeface="Times New Roman"/>
+              </a:rPr>
+              <a:t>dB</a:t>
+            </a:r>
+          </a:p>
+        </p:txBody>
+      </p:sp>
+      <p:sp>
+        <p:nvSpPr>
+          <p:cNvPr id="32" name="-50 dB label"/>
+          <p:cNvSpPr txBox="1"/>
+          <p:nvPr/>
+        </p:nvSpPr>
+        <p:spPr>
+          <a:xfrm rot="16200000">
+            <a:off x="1377810" y="1254340"/>
+            <a:ext cx="554639" cy="253916"/>
+          </a:xfrm>
+          <a:prstGeom prst="rect">
+            <a:avLst/>
+          </a:prstGeom>
+          <a:noFill/>
+          <a:effectLst/>
+        </p:spPr>
+        <p:txBody>
+          <a:bodyPr wrap="none" lIns="0" tIns="0" rIns="0" bIns="0" anchor="ctr">
+            <a:spAutoFit/>
+          </a:bodyPr>
+          <a:lstStyle/>
+          <a:p>
+            <a:pPr algn="ctr"/>
+            <a:r>
+              <a:rPr sz="1650" dirty="0">
+                <a:solidFill>
+                  <a:srgbClr val="000000"/>
+                </a:solidFill>
+                <a:latin typeface="Times New Roman"/>
+              </a:rPr>
+              <a:t>-50</a:t>
+            </a:r>
+            <a:r>
+              <a:rPr lang="en-US" sz="800" dirty="0">
+                <a:solidFill>
+                  <a:srgbClr val="000000"/>
+                </a:solidFill>
+                <a:latin typeface="Times New Roman"/>
+              </a:rPr>
+              <a:t> </a:t>
+            </a:r>
+            <a:r>
+              <a:rPr sz="1650" dirty="0">
+                <a:solidFill>
+                  <a:srgbClr val="000000"/>
+                </a:solidFill>
+                <a:latin typeface="Times New Roman"/>
+              </a:rPr>
+              <a:t>dB</a:t>
+            </a:r>
+          </a:p>
+        </p:txBody>
+      </p:sp>
+      <p:sp>
+        <p:nvSpPr>
+          <p:cNvPr id="33" name="50 K label"/>
+          <p:cNvSpPr txBox="1"/>
+          <p:nvPr/>
+        </p:nvSpPr>
+        <p:spPr>
+          <a:xfrm>
+            <a:off x="1203063" y="1969532"/>
+            <a:ext cx="400751" cy="261610"/>
+          </a:xfrm>
+          <a:prstGeom prst="rect">
+            <a:avLst/>
+          </a:prstGeom>
+          <a:noFill/>
+          <a:effectLst/>
+        </p:spPr>
+        <p:txBody>
+          <a:bodyPr wrap="none" lIns="0" tIns="0" rIns="0" bIns="0" anchor="ctr">
+            <a:spAutoFit/>
+          </a:bodyPr>
+          <a:lstStyle/>
+          <a:p>
+            <a:pPr algn="ctr"/>
+            <a:r>
+              <a:rPr sz="1700" dirty="0">
+                <a:solidFill>
+                  <a:srgbClr val="000000"/>
+                </a:solidFill>
+                <a:latin typeface="Times New Roman"/>
+              </a:rPr>
+              <a:t>50</a:t>
+            </a:r>
+            <a:r>
+              <a:rPr lang="en-US" sz="800" dirty="0">
+                <a:solidFill>
+                  <a:srgbClr val="000000"/>
+                </a:solidFill>
+                <a:latin typeface="Times New Roman"/>
+              </a:rPr>
+              <a:t> </a:t>
+            </a:r>
+            <a:r>
+              <a:rPr sz="1700" dirty="0">
+                <a:solidFill>
+                  <a:srgbClr val="000000"/>
+                </a:solidFill>
+                <a:latin typeface="Times New Roman"/>
+              </a:rPr>
+              <a:t>K</a:t>
+            </a:r>
+          </a:p>
+        </p:txBody>
+      </p:sp>
+      <p:sp>
+        <p:nvSpPr>
+          <p:cNvPr id="34" name="-3 dB label"/>
+          <p:cNvSpPr txBox="1"/>
+          <p:nvPr/>
+        </p:nvSpPr>
+        <p:spPr>
+          <a:xfrm rot="16200000">
+            <a:off x="1430710" y="2394285"/>
+            <a:ext cx="448841" cy="253916"/>
+          </a:xfrm>
+          <a:prstGeom prst="rect">
+            <a:avLst/>
+          </a:prstGeom>
+          <a:noFill/>
+          <a:effectLst/>
+        </p:spPr>
+        <p:txBody>
+          <a:bodyPr wrap="none" lIns="0" tIns="0" rIns="0" bIns="0" anchor="ctr">
+            <a:spAutoFit/>
+          </a:bodyPr>
+          <a:lstStyle/>
+          <a:p>
+            <a:pPr algn="ctr"/>
+            <a:r>
+              <a:rPr sz="1650" dirty="0">
+                <a:solidFill>
+                  <a:srgbClr val="000000"/>
+                </a:solidFill>
+                <a:latin typeface="Times New Roman"/>
+              </a:rPr>
+              <a:t>-3</a:t>
+            </a:r>
+            <a:r>
+              <a:rPr lang="en-US" sz="800" dirty="0">
+                <a:solidFill>
+                  <a:srgbClr val="000000"/>
+                </a:solidFill>
+                <a:latin typeface="Times New Roman"/>
+              </a:rPr>
+              <a:t> </a:t>
+            </a:r>
+            <a:r>
+              <a:rPr sz="1650" dirty="0">
+                <a:solidFill>
+                  <a:srgbClr val="000000"/>
+                </a:solidFill>
+                <a:latin typeface="Times New Roman"/>
+              </a:rPr>
+              <a:t>dB</a:t>
+            </a:r>
+          </a:p>
+        </p:txBody>
+      </p:sp>
+      <p:sp>
+        <p:nvSpPr>
+          <p:cNvPr id="35" name="3 K label"/>
+          <p:cNvSpPr txBox="1"/>
+          <p:nvPr/>
+        </p:nvSpPr>
+        <p:spPr>
+          <a:xfrm>
+            <a:off x="1312051" y="3026455"/>
+            <a:ext cx="291747" cy="261610"/>
+          </a:xfrm>
+          <a:prstGeom prst="rect">
+            <a:avLst/>
+          </a:prstGeom>
+          <a:noFill/>
+          <a:effectLst/>
+        </p:spPr>
+        <p:txBody>
+          <a:bodyPr wrap="none" lIns="0" tIns="0" rIns="0" bIns="0" anchor="ctr">
+            <a:spAutoFit/>
+          </a:bodyPr>
+          <a:lstStyle/>
+          <a:p>
+            <a:pPr algn="ctr"/>
+            <a:r>
+              <a:rPr sz="1700" dirty="0">
+                <a:solidFill>
+                  <a:srgbClr val="000000"/>
+                </a:solidFill>
+                <a:latin typeface="Times New Roman"/>
+              </a:rPr>
+              <a:t>3</a:t>
+            </a:r>
+            <a:r>
+              <a:rPr lang="en-US" sz="800" dirty="0">
+                <a:solidFill>
+                  <a:srgbClr val="000000"/>
+                </a:solidFill>
+                <a:latin typeface="Times New Roman"/>
+              </a:rPr>
+              <a:t> </a:t>
+            </a:r>
+            <a:r>
+              <a:rPr sz="1700" dirty="0">
+                <a:solidFill>
+                  <a:srgbClr val="000000"/>
+                </a:solidFill>
+                <a:latin typeface="Times New Roman"/>
+              </a:rPr>
+              <a:t>K</a:t>
+            </a:r>
+          </a:p>
+        </p:txBody>
+      </p:sp>
+      <p:sp>
+        <p:nvSpPr>
+          <p:cNvPr id="36" name="HEMT label"/>
+          <p:cNvSpPr txBox="1"/>
+          <p:nvPr/>
+        </p:nvSpPr>
+        <p:spPr>
+          <a:xfrm>
+            <a:off x="863289" y="3343550"/>
+            <a:ext cx="569066" cy="477054"/>
+          </a:xfrm>
+          <a:prstGeom prst="rect">
+            <a:avLst/>
+          </a:prstGeom>
+          <a:noFill/>
+          <a:effectLst/>
+        </p:spPr>
+        <p:txBody>
+          <a:bodyPr wrap="none" lIns="0" tIns="0" rIns="0" bIns="0" anchor="ctr">
+            <a:spAutoFit/>
+          </a:bodyPr>
+          <a:lstStyle/>
+          <a:p>
+            <a:pPr algn="ctr"/>
+            <a:r>
+              <a:rPr sz="1550" dirty="0">
+                <a:solidFill>
+                  <a:srgbClr val="000000"/>
+                </a:solidFill>
+                <a:latin typeface="Times New Roman"/>
+              </a:rPr>
+              <a:t>HEMT</a:t>
+            </a:r>
+          </a:p>
+          <a:p>
+            <a:pPr algn="ctr"/>
+            <a:r>
+              <a:rPr sz="1550" dirty="0">
+                <a:solidFill>
+                  <a:srgbClr val="000000"/>
+                </a:solidFill>
+                <a:latin typeface="Times New Roman"/>
+              </a:rPr>
+              <a:t>+30</a:t>
+            </a:r>
+            <a:r>
+              <a:rPr lang="en-US" sz="800" dirty="0">
+                <a:solidFill>
+                  <a:srgbClr val="000000"/>
+                </a:solidFill>
+                <a:latin typeface="Times New Roman"/>
+              </a:rPr>
+              <a:t> </a:t>
+            </a:r>
+            <a:r>
+              <a:rPr sz="1550" dirty="0">
+                <a:solidFill>
+                  <a:srgbClr val="000000"/>
+                </a:solidFill>
+                <a:latin typeface="Times New Roman"/>
+              </a:rPr>
+              <a:t>dB</a:t>
+            </a:r>
+          </a:p>
+        </p:txBody>
+      </p:sp>
+      <p:sp>
+        <p:nvSpPr>
+          <p:cNvPr id="37" name="3 K -20 dB label"/>
+          <p:cNvSpPr txBox="1"/>
+          <p:nvPr/>
+        </p:nvSpPr>
+        <p:spPr>
+          <a:xfrm rot="16200000">
+            <a:off x="1377810" y="3670086"/>
+            <a:ext cx="554639" cy="253916"/>
+          </a:xfrm>
+          <a:prstGeom prst="rect">
+            <a:avLst/>
+          </a:prstGeom>
+          <a:noFill/>
+          <a:effectLst/>
+        </p:spPr>
+        <p:txBody>
+          <a:bodyPr wrap="none" lIns="0" tIns="0" rIns="0" bIns="0" anchor="ctr">
+            <a:spAutoFit/>
+          </a:bodyPr>
+          <a:lstStyle/>
+          <a:p>
+            <a:pPr algn="ctr"/>
+            <a:r>
+              <a:rPr sz="1650" dirty="0">
+                <a:solidFill>
+                  <a:srgbClr val="000000"/>
+                </a:solidFill>
+                <a:latin typeface="Times New Roman"/>
+              </a:rPr>
+              <a:t>-20</a:t>
+            </a:r>
+            <a:r>
+              <a:rPr lang="en-US" sz="800" dirty="0">
+                <a:solidFill>
+                  <a:srgbClr val="000000"/>
+                </a:solidFill>
+                <a:latin typeface="Times New Roman"/>
+              </a:rPr>
+              <a:t> </a:t>
+            </a:r>
+            <a:r>
+              <a:rPr sz="1650" dirty="0">
+                <a:solidFill>
+                  <a:srgbClr val="000000"/>
+                </a:solidFill>
+                <a:latin typeface="Times New Roman"/>
+              </a:rPr>
+              <a:t>dB</a:t>
+            </a:r>
+          </a:p>
+        </p:txBody>
+      </p:sp>
+      <p:sp>
+        <p:nvSpPr>
+          <p:cNvPr id="38" name="100 mK label"/>
+          <p:cNvSpPr txBox="1"/>
+          <p:nvPr/>
+        </p:nvSpPr>
+        <p:spPr>
+          <a:xfrm>
+            <a:off x="993731" y="4824689"/>
+            <a:ext cx="679673" cy="261610"/>
+          </a:xfrm>
+          <a:prstGeom prst="rect">
+            <a:avLst/>
+          </a:prstGeom>
+          <a:noFill/>
+          <a:effectLst/>
+        </p:spPr>
+        <p:txBody>
+          <a:bodyPr wrap="none" lIns="0" tIns="0" rIns="0" bIns="0" anchor="ctr">
+            <a:spAutoFit/>
+          </a:bodyPr>
+          <a:lstStyle/>
+          <a:p>
+            <a:pPr algn="ctr"/>
+            <a:r>
+              <a:rPr sz="1700" dirty="0">
+                <a:solidFill>
+                  <a:srgbClr val="000000"/>
+                </a:solidFill>
+                <a:latin typeface="Times New Roman"/>
+              </a:rPr>
+              <a:t>100</a:t>
+            </a:r>
+            <a:r>
+              <a:rPr lang="en-US" sz="800" dirty="0">
+                <a:solidFill>
+                  <a:srgbClr val="000000"/>
+                </a:solidFill>
+                <a:latin typeface="Times New Roman"/>
+              </a:rPr>
+              <a:t> </a:t>
+            </a:r>
+            <a:r>
+              <a:rPr sz="1700" dirty="0" err="1">
+                <a:solidFill>
+                  <a:srgbClr val="000000"/>
+                </a:solidFill>
+                <a:latin typeface="Times New Roman"/>
+              </a:rPr>
+              <a:t>mK</a:t>
+            </a:r>
+            <a:endParaRPr sz="1700" dirty="0">
+              <a:solidFill>
+                <a:srgbClr val="000000"/>
+              </a:solidFill>
+              <a:latin typeface="Times New Roman"/>
+            </a:endParaRPr>
+          </a:p>
+        </p:txBody>
+      </p:sp>
+      <p:sp>
+        <p:nvSpPr>
+          <p:cNvPr id="40" name="100 mK -20 dB label"/>
+          <p:cNvSpPr txBox="1"/>
+          <p:nvPr/>
+        </p:nvSpPr>
+        <p:spPr>
+          <a:xfrm rot="16200000">
+            <a:off x="1382662" y="5265937"/>
+            <a:ext cx="554639" cy="253916"/>
+          </a:xfrm>
+          <a:prstGeom prst="rect">
+            <a:avLst/>
+          </a:prstGeom>
+          <a:noFill/>
+          <a:effectLst/>
+        </p:spPr>
+        <p:txBody>
+          <a:bodyPr wrap="none" lIns="0" tIns="0" rIns="0" bIns="0" anchor="ctr">
+            <a:spAutoFit/>
+          </a:bodyPr>
+          <a:lstStyle/>
+          <a:p>
+            <a:pPr algn="ctr"/>
+            <a:r>
+              <a:rPr sz="1650" dirty="0">
+                <a:solidFill>
+                  <a:srgbClr val="000000"/>
+                </a:solidFill>
+                <a:latin typeface="Times New Roman"/>
+              </a:rPr>
+              <a:t>-20</a:t>
+            </a:r>
+            <a:r>
+              <a:rPr lang="en-US" sz="800" dirty="0">
+                <a:solidFill>
+                  <a:srgbClr val="000000"/>
+                </a:solidFill>
+                <a:latin typeface="Times New Roman"/>
+              </a:rPr>
+              <a:t> </a:t>
+            </a:r>
+            <a:r>
+              <a:rPr sz="1650" dirty="0">
+                <a:solidFill>
+                  <a:srgbClr val="000000"/>
+                </a:solidFill>
+                <a:latin typeface="Times New Roman"/>
+              </a:rPr>
+              <a:t>dB</a:t>
+            </a:r>
+          </a:p>
+        </p:txBody>
+      </p:sp>
+      <p:sp>
+        <p:nvSpPr>
+          <p:cNvPr id="42" name="Cryoperm can label"/>
+          <p:cNvSpPr txBox="1"/>
+          <p:nvPr/>
+        </p:nvSpPr>
+        <p:spPr>
+          <a:xfrm>
+            <a:off x="1291568" y="7085776"/>
+            <a:ext cx="1022716" cy="215444"/>
+          </a:xfrm>
+          <a:prstGeom prst="rect">
+            <a:avLst/>
+          </a:prstGeom>
+          <a:noFill/>
+          <a:effectLst/>
+        </p:spPr>
+        <p:txBody>
+          <a:bodyPr wrap="none" lIns="0" tIns="0" rIns="0" bIns="0" anchor="ctr">
+            <a:spAutoFit/>
+          </a:bodyPr>
+          <a:lstStyle/>
+          <a:p>
+            <a:pPr algn="ctr"/>
+            <a:r>
+              <a:rPr lang="en-US" sz="1400" dirty="0" err="1">
+                <a:solidFill>
+                  <a:srgbClr val="000000"/>
+                </a:solidFill>
+                <a:latin typeface="Times New Roman"/>
+              </a:rPr>
+              <a:t>Cryoperm</a:t>
+            </a:r>
+            <a:r>
+              <a:rPr lang="en-US" sz="1400" dirty="0">
+                <a:solidFill>
+                  <a:srgbClr val="000000"/>
+                </a:solidFill>
+                <a:latin typeface="Times New Roman"/>
+              </a:rPr>
+              <a:t> can</a:t>
+            </a:r>
+          </a:p>
+        </p:txBody>
+      </p:sp>
+      <p:sp>
+        <p:nvSpPr>
+          <p:cNvPr id="52" name="TextBox 51">
+            <a:extLst>
+              <a:ext uri="{FF2B5EF4-FFF2-40B4-BE49-F238E27FC236}">
+                <a16:creationId xmlns:a16="http://schemas.microsoft.com/office/drawing/2014/main" id="{3A060945-B423-AC90-DEEA-8E6E4B717375}"/>
+              </a:ext>
+            </a:extLst>
+          </p:cNvPr>
+          <p:cNvSpPr txBox="1"/>
+          <p:nvPr/>
+        </p:nvSpPr>
+        <p:spPr>
+          <a:xfrm>
+            <a:off x="1020513" y="6719349"/>
+            <a:ext cx="1346200" cy="307777"/>
+          </a:xfrm>
+          <a:prstGeom prst="rect">
+            <a:avLst/>
+          </a:prstGeom>
+          <a:noFill/>
+        </p:spPr>
+        <p:txBody>
+          <a:bodyPr wrap="square">
+            <a:spAutoFit/>
+          </a:bodyPr>
+          <a:lstStyle/>
+          <a:p>
+            <a:pPr algn="ctr"/>
+            <a:r>
+              <a:rPr lang="en-US" sz="1400" dirty="0">
+                <a:solidFill>
+                  <a:srgbClr val="000000"/>
+                </a:solidFill>
+                <a:latin typeface="Times New Roman"/>
+              </a:rPr>
+              <a:t>Al package</a:t>
+            </a:r>
+          </a:p>
+        </p:txBody>
+      </p:sp>
+      <p:sp>
+        <p:nvSpPr>
+          <p:cNvPr id="56" name="TextBox 55">
+            <a:extLst>
+              <a:ext uri="{FF2B5EF4-FFF2-40B4-BE49-F238E27FC236}">
+                <a16:creationId xmlns:a16="http://schemas.microsoft.com/office/drawing/2014/main" id="{3B776951-7B78-9B27-6D00-28786E53CCA7}"/>
+              </a:ext>
+            </a:extLst>
+          </p:cNvPr>
+          <p:cNvSpPr txBox="1"/>
+          <p:nvPr/>
+        </p:nvSpPr>
+        <p:spPr>
+          <a:xfrm>
+            <a:off x="2830269" y="5238136"/>
+            <a:ext cx="1031365" cy="584775"/>
+          </a:xfrm>
+          <a:prstGeom prst="rect">
+            <a:avLst/>
+          </a:prstGeom>
+          <a:noFill/>
+        </p:spPr>
+        <p:txBody>
+          <a:bodyPr wrap="square">
+            <a:spAutoFit/>
+          </a:bodyPr>
+          <a:lstStyle/>
+          <a:p>
+            <a:pPr algn="ctr"/>
+            <a:r>
+              <a:rPr lang="en-US" sz="1600" dirty="0" err="1">
+                <a:solidFill>
+                  <a:srgbClr val="000000"/>
+                </a:solidFill>
+                <a:latin typeface="Times New Roman"/>
+              </a:rPr>
+              <a:t>Radiall</a:t>
+            </a:r>
+            <a:endParaRPr lang="en-US" sz="1600" dirty="0">
+              <a:solidFill>
+                <a:srgbClr val="000000"/>
+              </a:solidFill>
+              <a:latin typeface="Times New Roman"/>
+            </a:endParaRPr>
+          </a:p>
+          <a:p>
+            <a:pPr algn="ctr"/>
+            <a:r>
+              <a:rPr lang="en-US" sz="1600" dirty="0">
+                <a:solidFill>
+                  <a:srgbClr val="000000"/>
+                </a:solidFill>
+                <a:latin typeface="Times New Roman"/>
+              </a:rPr>
+              <a:t>switch</a:t>
+            </a:r>
+            <a:endParaRPr lang="en-US" sz="1600" dirty="0"/>
+          </a:p>
+        </p:txBody>
+      </p:sp>
+      <p:sp>
+        <p:nvSpPr>
+          <p:cNvPr id="5" name="NARDA amplifier triangle">
+            <a:extLst>
+              <a:ext uri="{FF2B5EF4-FFF2-40B4-BE49-F238E27FC236}">
+                <a16:creationId xmlns:a16="http://schemas.microsoft.com/office/drawing/2014/main" id="{861B304F-CDFB-F0E7-2356-7002C1F7EFCF}"/>
+              </a:ext>
+            </a:extLst>
+          </p:cNvPr>
           <p:cNvSpPr/>
           <p:nvPr/>
         </p:nvSpPr>
         <p:spPr>
           <a:xfrm>
-            <a:off x="367328" y="1025863"/>
+            <a:off x="2993907" y="1001142"/>
             <a:ext cx="704088" cy="644652"/>
           </a:xfrm>
           <a:prstGeom prst="triangle">
@@ -4627,13 +5202,519 @@
       </p:sp>
       <p:sp>
         <p:nvSpPr>
-          <p:cNvPr id="22" name="HEMT amplifier triangle"/>
+          <p:cNvPr id="6" name="50 K attenuator">
+            <a:extLst>
+              <a:ext uri="{FF2B5EF4-FFF2-40B4-BE49-F238E27FC236}">
+                <a16:creationId xmlns:a16="http://schemas.microsoft.com/office/drawing/2014/main" id="{66E15EAB-571C-126F-B82F-AC7FEC60EA58}"/>
+              </a:ext>
+            </a:extLst>
+          </p:cNvPr>
           <p:cNvSpPr/>
           <p:nvPr/>
         </p:nvSpPr>
         <p:spPr>
           <a:xfrm>
-            <a:off x="367328" y="3491413"/>
+            <a:off x="3208791" y="2230921"/>
+            <a:ext cx="274320" cy="580644"/>
+          </a:xfrm>
+          <a:prstGeom prst="roundRect">
+            <a:avLst/>
+          </a:prstGeom>
+          <a:solidFill>
+            <a:srgbClr val="0065D7"/>
+          </a:solidFill>
+          <a:ln w="40640">
+            <a:solidFill>
+              <a:srgbClr val="000000"/>
+            </a:solidFill>
+          </a:ln>
+          <a:effectLst/>
+        </p:spPr>
+        <p:txBody>
+          <a:bodyPr rtlCol="0" anchor="ctr"/>
+          <a:lstStyle/>
+          <a:p>
+            <a:pPr algn="ctr"/>
+            <a:endParaRPr/>
+          </a:p>
+        </p:txBody>
+      </p:sp>
+      <p:sp>
+        <p:nvSpPr>
+          <p:cNvPr id="9" name="Eccosorb filter block">
+            <a:extLst>
+              <a:ext uri="{FF2B5EF4-FFF2-40B4-BE49-F238E27FC236}">
+                <a16:creationId xmlns:a16="http://schemas.microsoft.com/office/drawing/2014/main" id="{D476E1E8-7006-54A9-0E63-5419CD305215}"/>
+              </a:ext>
+            </a:extLst>
+          </p:cNvPr>
+          <p:cNvSpPr/>
+          <p:nvPr/>
+        </p:nvSpPr>
+        <p:spPr>
+          <a:xfrm>
+            <a:off x="3206505" y="3470148"/>
+            <a:ext cx="278892" cy="603504"/>
+          </a:xfrm>
+          <a:prstGeom prst="roundRect">
+            <a:avLst/>
+          </a:prstGeom>
+          <a:solidFill>
+            <a:srgbClr val="FFCD00"/>
+          </a:solidFill>
+          <a:ln w="40640">
+            <a:solidFill>
+              <a:srgbClr val="000000"/>
+            </a:solidFill>
+          </a:ln>
+          <a:effectLst/>
+        </p:spPr>
+        <p:txBody>
+          <a:bodyPr rtlCol="0" anchor="ctr"/>
+          <a:lstStyle/>
+          <a:p>
+            <a:pPr algn="ctr"/>
+            <a:endParaRPr/>
+          </a:p>
+        </p:txBody>
+      </p:sp>
+      <p:sp>
+        <p:nvSpPr>
+          <p:cNvPr id="12" name="Eccosorb label">
+            <a:extLst>
+              <a:ext uri="{FF2B5EF4-FFF2-40B4-BE49-F238E27FC236}">
+                <a16:creationId xmlns:a16="http://schemas.microsoft.com/office/drawing/2014/main" id="{29C73919-C3A8-DF81-4156-24C90EA34F46}"/>
+              </a:ext>
+            </a:extLst>
+          </p:cNvPr>
+          <p:cNvSpPr txBox="1"/>
+          <p:nvPr/>
+        </p:nvSpPr>
+        <p:spPr>
+          <a:xfrm>
+            <a:off x="2806541" y="4093609"/>
+            <a:ext cx="1078821" cy="492443"/>
+          </a:xfrm>
+          <a:prstGeom prst="rect">
+            <a:avLst/>
+          </a:prstGeom>
+          <a:noFill/>
+          <a:effectLst/>
+        </p:spPr>
+        <p:txBody>
+          <a:bodyPr wrap="none" lIns="0" tIns="0" rIns="0" bIns="0" anchor="ctr">
+            <a:spAutoFit/>
+          </a:bodyPr>
+          <a:lstStyle/>
+          <a:p>
+            <a:pPr algn="ctr"/>
+            <a:r>
+              <a:rPr lang="en-US" sz="1600" dirty="0">
+                <a:solidFill>
+                  <a:srgbClr val="000000"/>
+                </a:solidFill>
+                <a:latin typeface="Times New Roman"/>
+              </a:rPr>
+              <a:t>ECCOSORB</a:t>
+            </a:r>
+          </a:p>
+          <a:p>
+            <a:pPr algn="ctr"/>
+            <a:r>
+              <a:rPr lang="en-US" sz="1600" dirty="0">
+                <a:solidFill>
+                  <a:srgbClr val="000000"/>
+                </a:solidFill>
+                <a:latin typeface="Times New Roman"/>
+              </a:rPr>
+              <a:t>filter</a:t>
+            </a:r>
+            <a:endParaRPr sz="1600" dirty="0">
+              <a:solidFill>
+                <a:srgbClr val="000000"/>
+              </a:solidFill>
+              <a:latin typeface="Times New Roman"/>
+            </a:endParaRPr>
+          </a:p>
+        </p:txBody>
+      </p:sp>
+      <p:sp>
+        <p:nvSpPr>
+          <p:cNvPr id="13" name="Eccosorb label">
+            <a:extLst>
+              <a:ext uri="{FF2B5EF4-FFF2-40B4-BE49-F238E27FC236}">
+                <a16:creationId xmlns:a16="http://schemas.microsoft.com/office/drawing/2014/main" id="{459E6D6A-A2CD-8561-1D60-555FEE11509D}"/>
+              </a:ext>
+            </a:extLst>
+          </p:cNvPr>
+          <p:cNvSpPr txBox="1"/>
+          <p:nvPr/>
+        </p:nvSpPr>
+        <p:spPr>
+          <a:xfrm>
+            <a:off x="2933979" y="2847425"/>
+            <a:ext cx="823945" cy="246221"/>
+          </a:xfrm>
+          <a:prstGeom prst="rect">
+            <a:avLst/>
+          </a:prstGeom>
+          <a:noFill/>
+          <a:effectLst/>
+        </p:spPr>
+        <p:txBody>
+          <a:bodyPr wrap="none" lIns="0" tIns="0" rIns="0" bIns="0" anchor="ctr">
+            <a:spAutoFit/>
+          </a:bodyPr>
+          <a:lstStyle/>
+          <a:p>
+            <a:pPr algn="ctr"/>
+            <a:r>
+              <a:rPr lang="en-US" sz="1600" dirty="0">
+                <a:solidFill>
+                  <a:srgbClr val="000000"/>
+                </a:solidFill>
+                <a:latin typeface="Times New Roman"/>
+              </a:rPr>
+              <a:t>attenuator</a:t>
+            </a:r>
+            <a:endParaRPr sz="1600" dirty="0">
+              <a:solidFill>
+                <a:srgbClr val="000000"/>
+              </a:solidFill>
+              <a:latin typeface="Times New Roman"/>
+            </a:endParaRPr>
+          </a:p>
+        </p:txBody>
+      </p:sp>
+      <p:sp>
+        <p:nvSpPr>
+          <p:cNvPr id="19" name="Cryoperm can outline"/>
+          <p:cNvSpPr/>
+          <p:nvPr/>
+        </p:nvSpPr>
+        <p:spPr>
+          <a:xfrm>
+            <a:off x="258593" y="4762854"/>
+            <a:ext cx="2039363" cy="2330636"/>
+          </a:xfrm>
+          <a:prstGeom prst="rect">
+            <a:avLst/>
+          </a:prstGeom>
+          <a:noFill/>
+          <a:ln w="38100">
+            <a:solidFill>
+              <a:srgbClr val="F5A000"/>
+            </a:solidFill>
+          </a:ln>
+          <a:effectLst/>
+        </p:spPr>
+        <p:txBody>
+          <a:bodyPr rtlCol="0" anchor="ctr"/>
+          <a:lstStyle/>
+          <a:p>
+            <a:pPr algn="ctr"/>
+            <a:endParaRPr/>
+          </a:p>
+        </p:txBody>
+      </p:sp>
+      <p:sp>
+        <p:nvSpPr>
+          <p:cNvPr id="14" name="Eccosorb label">
+            <a:extLst>
+              <a:ext uri="{FF2B5EF4-FFF2-40B4-BE49-F238E27FC236}">
+                <a16:creationId xmlns:a16="http://schemas.microsoft.com/office/drawing/2014/main" id="{B742671C-DFED-3098-26DA-76095DFA27FC}"/>
+              </a:ext>
+            </a:extLst>
+          </p:cNvPr>
+          <p:cNvSpPr txBox="1"/>
+          <p:nvPr/>
+        </p:nvSpPr>
+        <p:spPr>
+          <a:xfrm>
+            <a:off x="2967643" y="1666031"/>
+            <a:ext cx="756618" cy="246221"/>
+          </a:xfrm>
+          <a:prstGeom prst="rect">
+            <a:avLst/>
+          </a:prstGeom>
+          <a:noFill/>
+          <a:effectLst/>
+        </p:spPr>
+        <p:txBody>
+          <a:bodyPr wrap="none" lIns="0" tIns="0" rIns="0" bIns="0" anchor="ctr">
+            <a:spAutoFit/>
+          </a:bodyPr>
+          <a:lstStyle/>
+          <a:p>
+            <a:pPr algn="ctr"/>
+            <a:r>
+              <a:rPr lang="en-US" sz="1600" dirty="0">
+                <a:solidFill>
+                  <a:srgbClr val="000000"/>
+                </a:solidFill>
+                <a:latin typeface="Times New Roman"/>
+              </a:rPr>
+              <a:t>amplifier</a:t>
+            </a:r>
+            <a:endParaRPr sz="1600" dirty="0">
+              <a:solidFill>
+                <a:srgbClr val="000000"/>
+              </a:solidFill>
+              <a:latin typeface="Times New Roman"/>
+            </a:endParaRPr>
+          </a:p>
+        </p:txBody>
+      </p:sp>
+      <p:cxnSp>
+        <p:nvCxnSpPr>
+          <p:cNvPr id="50" name="output coax vertical">
+            <a:extLst>
+              <a:ext uri="{FF2B5EF4-FFF2-40B4-BE49-F238E27FC236}">
+                <a16:creationId xmlns:a16="http://schemas.microsoft.com/office/drawing/2014/main" id="{6E813ABB-43EE-8E2A-E3B4-6EC613F05C10}"/>
+              </a:ext>
+            </a:extLst>
+          </p:cNvPr>
+          <p:cNvCxnSpPr>
+            <a:cxnSpLocks/>
+          </p:cNvCxnSpPr>
+          <p:nvPr/>
+        </p:nvCxnSpPr>
+        <p:spPr>
+          <a:xfrm flipH="1">
+            <a:off x="3310388" y="4762854"/>
+            <a:ext cx="2807" cy="168033"/>
+          </a:xfrm>
+          <a:prstGeom prst="line">
+            <a:avLst/>
+          </a:prstGeom>
+          <a:ln w="68580">
+            <a:solidFill>
+              <a:srgbClr val="000000"/>
+            </a:solidFill>
+          </a:ln>
+          <a:effectLst/>
+        </p:spPr>
+      </p:cxnSp>
+      <p:cxnSp>
+        <p:nvCxnSpPr>
+          <p:cNvPr id="51" name="HEMT output bend">
+            <a:extLst>
+              <a:ext uri="{FF2B5EF4-FFF2-40B4-BE49-F238E27FC236}">
+                <a16:creationId xmlns:a16="http://schemas.microsoft.com/office/drawing/2014/main" id="{6B5EC015-9D1E-2F78-F5D5-C78A4C5297B8}"/>
+              </a:ext>
+            </a:extLst>
+          </p:cNvPr>
+          <p:cNvCxnSpPr>
+            <a:cxnSpLocks/>
+          </p:cNvCxnSpPr>
+          <p:nvPr/>
+        </p:nvCxnSpPr>
+        <p:spPr>
+          <a:xfrm flipH="1">
+            <a:off x="3139795" y="4917135"/>
+            <a:ext cx="173390" cy="279227"/>
+          </a:xfrm>
+          <a:prstGeom prst="line">
+            <a:avLst/>
+          </a:prstGeom>
+          <a:ln w="68580">
+            <a:solidFill>
+              <a:srgbClr val="000000"/>
+            </a:solidFill>
+          </a:ln>
+          <a:effectLst/>
+        </p:spPr>
+      </p:cxnSp>
+      <p:sp>
+        <p:nvSpPr>
+          <p:cNvPr id="53" name="wire bond node left">
+            <a:extLst>
+              <a:ext uri="{FF2B5EF4-FFF2-40B4-BE49-F238E27FC236}">
+                <a16:creationId xmlns:a16="http://schemas.microsoft.com/office/drawing/2014/main" id="{9C4089C5-22FE-3D9C-27E7-E3C51D1874FE}"/>
+              </a:ext>
+            </a:extLst>
+          </p:cNvPr>
+          <p:cNvSpPr/>
+          <p:nvPr/>
+        </p:nvSpPr>
+        <p:spPr>
+          <a:xfrm>
+            <a:off x="3099319" y="5071464"/>
+            <a:ext cx="146304" cy="146304"/>
+          </a:xfrm>
+          <a:prstGeom prst="ellipse">
+            <a:avLst/>
+          </a:prstGeom>
+          <a:solidFill>
+            <a:srgbClr val="000000"/>
+          </a:solidFill>
+          <a:ln>
+            <a:noFill/>
+          </a:ln>
+          <a:effectLst/>
+        </p:spPr>
+        <p:txBody>
+          <a:bodyPr rtlCol="0" anchor="ctr"/>
+          <a:lstStyle/>
+          <a:p>
+            <a:pPr algn="ctr"/>
+            <a:endParaRPr/>
+          </a:p>
+        </p:txBody>
+      </p:sp>
+      <p:sp>
+        <p:nvSpPr>
+          <p:cNvPr id="55" name="wire bond node center">
+            <a:extLst>
+              <a:ext uri="{FF2B5EF4-FFF2-40B4-BE49-F238E27FC236}">
+                <a16:creationId xmlns:a16="http://schemas.microsoft.com/office/drawing/2014/main" id="{7A366CA6-7374-5992-9EFF-A5D9EA455F68}"/>
+              </a:ext>
+            </a:extLst>
+          </p:cNvPr>
+          <p:cNvSpPr/>
+          <p:nvPr/>
+        </p:nvSpPr>
+        <p:spPr>
+          <a:xfrm>
+            <a:off x="3267761" y="5073292"/>
+            <a:ext cx="146304" cy="146304"/>
+          </a:xfrm>
+          <a:prstGeom prst="ellipse">
+            <a:avLst/>
+          </a:prstGeom>
+          <a:solidFill>
+            <a:srgbClr val="000000"/>
+          </a:solidFill>
+          <a:ln>
+            <a:noFill/>
+          </a:ln>
+          <a:effectLst/>
+        </p:spPr>
+        <p:txBody>
+          <a:bodyPr rtlCol="0" anchor="ctr"/>
+          <a:lstStyle/>
+          <a:p>
+            <a:pPr algn="ctr"/>
+            <a:endParaRPr/>
+          </a:p>
+        </p:txBody>
+      </p:sp>
+      <p:sp>
+        <p:nvSpPr>
+          <p:cNvPr id="57" name="wire bond node right">
+            <a:extLst>
+              <a:ext uri="{FF2B5EF4-FFF2-40B4-BE49-F238E27FC236}">
+                <a16:creationId xmlns:a16="http://schemas.microsoft.com/office/drawing/2014/main" id="{DFE149B0-7914-9776-C40E-B06E1741D9B6}"/>
+              </a:ext>
+            </a:extLst>
+          </p:cNvPr>
+          <p:cNvSpPr/>
+          <p:nvPr/>
+        </p:nvSpPr>
+        <p:spPr>
+          <a:xfrm>
+            <a:off x="3450277" y="5076055"/>
+            <a:ext cx="146304" cy="146304"/>
+          </a:xfrm>
+          <a:prstGeom prst="ellipse">
+            <a:avLst/>
+          </a:prstGeom>
+          <a:solidFill>
+            <a:srgbClr val="000000"/>
+          </a:solidFill>
+          <a:ln>
+            <a:noFill/>
+          </a:ln>
+          <a:effectLst/>
+        </p:spPr>
+        <p:txBody>
+          <a:bodyPr rtlCol="0" anchor="ctr"/>
+          <a:lstStyle/>
+          <a:p>
+            <a:pPr algn="ctr"/>
+            <a:endParaRPr/>
+          </a:p>
+        </p:txBody>
+      </p:sp>
+      <p:cxnSp>
+        <p:nvCxnSpPr>
+          <p:cNvPr id="8" name="input coax vertical"/>
+          <p:cNvCxnSpPr>
+            <a:cxnSpLocks/>
+          </p:cNvCxnSpPr>
+          <p:nvPr/>
+        </p:nvCxnSpPr>
+        <p:spPr>
+          <a:xfrm>
+            <a:off x="1953979" y="187632"/>
+            <a:ext cx="0" cy="5893829"/>
+          </a:xfrm>
+          <a:prstGeom prst="line">
+            <a:avLst/>
+          </a:prstGeom>
+          <a:ln w="68580">
+            <a:solidFill>
+              <a:srgbClr val="000000"/>
+            </a:solidFill>
+          </a:ln>
+          <a:effectLst/>
+        </p:spPr>
+      </p:cxnSp>
+      <p:cxnSp>
+        <p:nvCxnSpPr>
+          <p:cNvPr id="7" name="output coax vertical"/>
+          <p:cNvCxnSpPr>
+            <a:cxnSpLocks/>
+          </p:cNvCxnSpPr>
+          <p:nvPr/>
+        </p:nvCxnSpPr>
+        <p:spPr>
+          <a:xfrm flipH="1">
+            <a:off x="719382" y="192250"/>
+            <a:ext cx="2807" cy="4129037"/>
+          </a:xfrm>
+          <a:prstGeom prst="line">
+            <a:avLst/>
+          </a:prstGeom>
+          <a:ln w="68580">
+            <a:solidFill>
+              <a:srgbClr val="000000"/>
+            </a:solidFill>
+          </a:ln>
+          <a:effectLst/>
+        </p:spPr>
+      </p:cxnSp>
+      <p:cxnSp>
+        <p:nvCxnSpPr>
+          <p:cNvPr id="11" name="filter coax vertical"/>
+          <p:cNvCxnSpPr/>
+          <p:nvPr/>
+        </p:nvCxnSpPr>
+        <p:spPr>
+          <a:xfrm>
+            <a:off x="564686" y="4562785"/>
+            <a:ext cx="0" cy="1504188"/>
+          </a:xfrm>
+          <a:prstGeom prst="line">
+            <a:avLst/>
+          </a:prstGeom>
+          <a:ln w="68580">
+            <a:solidFill>
+              <a:srgbClr val="000000"/>
+            </a:solidFill>
+          </a:ln>
+          <a:effectLst/>
+        </p:spPr>
+      </p:cxnSp>
+      <p:sp>
+        <p:nvSpPr>
+          <p:cNvPr id="21" name="NARDA amplifier triangle"/>
+          <p:cNvSpPr/>
+          <p:nvPr/>
+        </p:nvSpPr>
+        <p:spPr>
+          <a:xfrm>
+            <a:off x="367328" y="1025863"/>
             <a:ext cx="704088" cy="644652"/>
           </a:xfrm>
           <a:prstGeom prst="triangle">
@@ -4660,13 +5741,46 @@
       </p:sp>
       <p:sp>
         <p:nvSpPr>
-          <p:cNvPr id="23" name="room-temperature attenuator"/>
+          <p:cNvPr id="22" name="HEMT amplifier triangle"/>
           <p:cNvSpPr/>
           <p:nvPr/>
         </p:nvSpPr>
         <p:spPr>
           <a:xfrm>
-            <a:off x="1821391" y="1082252"/>
+            <a:off x="367328" y="3491413"/>
+            <a:ext cx="704088" cy="644652"/>
+          </a:xfrm>
+          <a:prstGeom prst="triangle">
+            <a:avLst/>
+          </a:prstGeom>
+          <a:solidFill>
+            <a:srgbClr val="FF0000"/>
+          </a:solidFill>
+          <a:ln w="40640">
+            <a:solidFill>
+              <a:srgbClr val="000000"/>
+            </a:solidFill>
+          </a:ln>
+          <a:effectLst/>
+        </p:spPr>
+        <p:txBody>
+          <a:bodyPr rtlCol="0" anchor="ctr"/>
+          <a:lstStyle/>
+          <a:p>
+            <a:pPr algn="ctr"/>
+            <a:endParaRPr/>
+          </a:p>
+        </p:txBody>
+      </p:sp>
+      <p:sp>
+        <p:nvSpPr>
+          <p:cNvPr id="26" name="100 mK attenuator"/>
+          <p:cNvSpPr/>
+          <p:nvPr/>
+        </p:nvSpPr>
+        <p:spPr>
+          <a:xfrm>
+            <a:off x="1821391" y="5083739"/>
             <a:ext cx="274320" cy="580644"/>
           </a:xfrm>
           <a:prstGeom prst="roundRect">
@@ -4693,112 +5807,13 @@
       </p:sp>
       <p:sp>
         <p:nvSpPr>
-          <p:cNvPr id="24" name="50 K attenuator"/>
-          <p:cNvSpPr/>
-          <p:nvPr/>
-        </p:nvSpPr>
-        <p:spPr>
-          <a:xfrm>
-            <a:off x="1821391" y="2218222"/>
-            <a:ext cx="274320" cy="580644"/>
-          </a:xfrm>
-          <a:prstGeom prst="roundRect">
-            <a:avLst/>
-          </a:prstGeom>
-          <a:solidFill>
-            <a:srgbClr val="0065D7"/>
-          </a:solidFill>
-          <a:ln w="40640">
-            <a:solidFill>
-              <a:srgbClr val="000000"/>
-            </a:solidFill>
-          </a:ln>
-          <a:effectLst/>
-        </p:spPr>
-        <p:txBody>
-          <a:bodyPr rtlCol="0" anchor="ctr"/>
-          <a:lstStyle/>
-          <a:p>
-            <a:pPr algn="ctr"/>
-            <a:endParaRPr/>
-          </a:p>
-        </p:txBody>
-      </p:sp>
-      <p:sp>
-        <p:nvSpPr>
-          <p:cNvPr id="25" name="3 K attenuator"/>
-          <p:cNvSpPr/>
-          <p:nvPr/>
-        </p:nvSpPr>
-        <p:spPr>
-          <a:xfrm>
-            <a:off x="1821391" y="3483793"/>
-            <a:ext cx="274320" cy="580644"/>
-          </a:xfrm>
-          <a:prstGeom prst="roundRect">
-            <a:avLst/>
-          </a:prstGeom>
-          <a:solidFill>
-            <a:srgbClr val="0065D7"/>
-          </a:solidFill>
-          <a:ln w="40640">
-            <a:solidFill>
-              <a:srgbClr val="000000"/>
-            </a:solidFill>
-          </a:ln>
-          <a:effectLst/>
-        </p:spPr>
-        <p:txBody>
-          <a:bodyPr rtlCol="0" anchor="ctr"/>
-          <a:lstStyle/>
-          <a:p>
-            <a:pPr algn="ctr"/>
-            <a:endParaRPr/>
-          </a:p>
-        </p:txBody>
-      </p:sp>
-      <p:sp>
-        <p:nvSpPr>
-          <p:cNvPr id="26" name="100 mK attenuator"/>
-          <p:cNvSpPr/>
-          <p:nvPr/>
-        </p:nvSpPr>
-        <p:spPr>
-          <a:xfrm>
-            <a:off x="1821391" y="5083739"/>
-            <a:ext cx="274320" cy="580644"/>
-          </a:xfrm>
-          <a:prstGeom prst="roundRect">
-            <a:avLst/>
-          </a:prstGeom>
-          <a:solidFill>
-            <a:srgbClr val="0065D7"/>
-          </a:solidFill>
-          <a:ln w="40640">
-            <a:solidFill>
-              <a:srgbClr val="000000"/>
-            </a:solidFill>
-          </a:ln>
-          <a:effectLst/>
-        </p:spPr>
-        <p:txBody>
-          <a:bodyPr rtlCol="0" anchor="ctr"/>
-          <a:lstStyle/>
-          <a:p>
-            <a:pPr algn="ctr"/>
-            <a:endParaRPr/>
-          </a:p>
-        </p:txBody>
-      </p:sp>
-      <p:sp>
-        <p:nvSpPr>
           <p:cNvPr id="27" name="Eccosorb filter block"/>
           <p:cNvSpPr/>
           <p:nvPr/>
         </p:nvSpPr>
         <p:spPr>
           <a:xfrm>
-            <a:off x="445560" y="5046147"/>
+            <a:off x="432948" y="5046147"/>
             <a:ext cx="278892" cy="603504"/>
           </a:xfrm>
           <a:prstGeom prst="roundRect">
@@ -4860,14 +5875,14 @@
       </p:sp>
       <p:sp>
         <p:nvSpPr>
-          <p:cNvPr id="30" name="300 K label"/>
+          <p:cNvPr id="41" name="Samples label"/>
           <p:cNvSpPr txBox="1"/>
           <p:nvPr/>
         </p:nvSpPr>
         <p:spPr>
           <a:xfrm>
-            <a:off x="1106883" y="596731"/>
-            <a:ext cx="484107" cy="261610"/>
+            <a:off x="943850" y="6173130"/>
+            <a:ext cx="724557" cy="307777"/>
           </a:xfrm>
           <a:prstGeom prst="rect">
             <a:avLst/>
@@ -4883,379 +5898,7 @@
           <a:p>
             <a:pPr algn="ctr"/>
             <a:r>
-              <a:rPr sz="1700" dirty="0">
-                <a:solidFill>
-                  <a:srgbClr val="000000"/>
-                </a:solidFill>
-                <a:latin typeface="Times New Roman"/>
-              </a:rPr>
-              <a:t>300K</a:t>
-            </a:r>
-          </a:p>
-        </p:txBody>
-      </p:sp>
-      <p:sp>
-        <p:nvSpPr>
-          <p:cNvPr id="31" name="NARDA label"/>
-          <p:cNvSpPr txBox="1"/>
-          <p:nvPr/>
-        </p:nvSpPr>
-        <p:spPr>
-          <a:xfrm>
-            <a:off x="848299" y="975082"/>
-            <a:ext cx="572273" cy="246221"/>
-          </a:xfrm>
-          <a:prstGeom prst="rect">
-            <a:avLst/>
-          </a:prstGeom>
-          <a:noFill/>
-          <a:effectLst/>
-        </p:spPr>
-        <p:txBody>
-          <a:bodyPr wrap="square" lIns="0" tIns="0" rIns="0" bIns="0" anchor="ctr">
-            <a:spAutoFit/>
-          </a:bodyPr>
-          <a:lstStyle/>
-          <a:p>
-            <a:pPr algn="ctr"/>
-            <a:r>
-              <a:rPr sz="1600" dirty="0">
-                <a:solidFill>
-                  <a:srgbClr val="000000"/>
-                </a:solidFill>
-                <a:latin typeface="Times New Roman"/>
-              </a:rPr>
-              <a:t>+30dB</a:t>
-            </a:r>
-          </a:p>
-        </p:txBody>
-      </p:sp>
-      <p:sp>
-        <p:nvSpPr>
-          <p:cNvPr id="32" name="-50 dB label"/>
-          <p:cNvSpPr txBox="1"/>
-          <p:nvPr/>
-        </p:nvSpPr>
-        <p:spPr>
-          <a:xfrm rot="16200000">
-            <a:off x="1390633" y="1254340"/>
-            <a:ext cx="528992" cy="253916"/>
-          </a:xfrm>
-          <a:prstGeom prst="rect">
-            <a:avLst/>
-          </a:prstGeom>
-          <a:noFill/>
-          <a:effectLst/>
-        </p:spPr>
-        <p:txBody>
-          <a:bodyPr wrap="none" lIns="0" tIns="0" rIns="0" bIns="0" anchor="ctr">
-            <a:spAutoFit/>
-          </a:bodyPr>
-          <a:lstStyle/>
-          <a:p>
-            <a:pPr algn="ctr"/>
-            <a:r>
-              <a:rPr sz="1650" dirty="0">
-                <a:solidFill>
-                  <a:srgbClr val="000000"/>
-                </a:solidFill>
-                <a:latin typeface="Times New Roman"/>
-              </a:rPr>
-              <a:t>-50dB</a:t>
-            </a:r>
-          </a:p>
-        </p:txBody>
-      </p:sp>
-      <p:sp>
-        <p:nvSpPr>
-          <p:cNvPr id="33" name="50 K label"/>
-          <p:cNvSpPr txBox="1"/>
-          <p:nvPr/>
-        </p:nvSpPr>
-        <p:spPr>
-          <a:xfrm>
-            <a:off x="1215887" y="1969532"/>
-            <a:ext cx="375103" cy="261610"/>
-          </a:xfrm>
-          <a:prstGeom prst="rect">
-            <a:avLst/>
-          </a:prstGeom>
-          <a:noFill/>
-          <a:effectLst/>
-        </p:spPr>
-        <p:txBody>
-          <a:bodyPr wrap="none" lIns="0" tIns="0" rIns="0" bIns="0" anchor="ctr">
-            <a:spAutoFit/>
-          </a:bodyPr>
-          <a:lstStyle/>
-          <a:p>
-            <a:pPr algn="ctr"/>
-            <a:r>
-              <a:rPr sz="1700" dirty="0">
-                <a:solidFill>
-                  <a:srgbClr val="000000"/>
-                </a:solidFill>
-                <a:latin typeface="Times New Roman"/>
-              </a:rPr>
-              <a:t>50K</a:t>
-            </a:r>
-          </a:p>
-        </p:txBody>
-      </p:sp>
-      <p:sp>
-        <p:nvSpPr>
-          <p:cNvPr id="34" name="-3 dB label"/>
-          <p:cNvSpPr txBox="1"/>
-          <p:nvPr/>
-        </p:nvSpPr>
-        <p:spPr>
-          <a:xfrm rot="16200000">
-            <a:off x="1443534" y="2394285"/>
-            <a:ext cx="423193" cy="253916"/>
-          </a:xfrm>
-          <a:prstGeom prst="rect">
-            <a:avLst/>
-          </a:prstGeom>
-          <a:noFill/>
-          <a:effectLst/>
-        </p:spPr>
-        <p:txBody>
-          <a:bodyPr wrap="none" lIns="0" tIns="0" rIns="0" bIns="0" anchor="ctr">
-            <a:spAutoFit/>
-          </a:bodyPr>
-          <a:lstStyle/>
-          <a:p>
-            <a:pPr algn="ctr"/>
-            <a:r>
-              <a:rPr sz="1650" dirty="0">
-                <a:solidFill>
-                  <a:srgbClr val="000000"/>
-                </a:solidFill>
-                <a:latin typeface="Times New Roman"/>
-              </a:rPr>
-              <a:t>-3dB</a:t>
-            </a:r>
-          </a:p>
-        </p:txBody>
-      </p:sp>
-      <p:sp>
-        <p:nvSpPr>
-          <p:cNvPr id="35" name="3 K label"/>
-          <p:cNvSpPr txBox="1"/>
-          <p:nvPr/>
-        </p:nvSpPr>
-        <p:spPr>
-          <a:xfrm>
-            <a:off x="1324875" y="3026455"/>
-            <a:ext cx="266099" cy="261610"/>
-          </a:xfrm>
-          <a:prstGeom prst="rect">
-            <a:avLst/>
-          </a:prstGeom>
-          <a:noFill/>
-          <a:effectLst/>
-        </p:spPr>
-        <p:txBody>
-          <a:bodyPr wrap="none" lIns="0" tIns="0" rIns="0" bIns="0" anchor="ctr">
-            <a:spAutoFit/>
-          </a:bodyPr>
-          <a:lstStyle/>
-          <a:p>
-            <a:pPr algn="ctr"/>
-            <a:r>
-              <a:rPr sz="1700" dirty="0">
-                <a:solidFill>
-                  <a:srgbClr val="000000"/>
-                </a:solidFill>
-                <a:latin typeface="Times New Roman"/>
-              </a:rPr>
-              <a:t>3K</a:t>
-            </a:r>
-          </a:p>
-        </p:txBody>
-      </p:sp>
-      <p:sp>
-        <p:nvSpPr>
-          <p:cNvPr id="36" name="HEMT label"/>
-          <p:cNvSpPr txBox="1"/>
-          <p:nvPr/>
-        </p:nvSpPr>
-        <p:spPr>
-          <a:xfrm>
-            <a:off x="865693" y="3343550"/>
-            <a:ext cx="564258" cy="477054"/>
-          </a:xfrm>
-          <a:prstGeom prst="rect">
-            <a:avLst/>
-          </a:prstGeom>
-          <a:noFill/>
-          <a:effectLst/>
-        </p:spPr>
-        <p:txBody>
-          <a:bodyPr wrap="none" lIns="0" tIns="0" rIns="0" bIns="0" anchor="ctr">
-            <a:spAutoFit/>
-          </a:bodyPr>
-          <a:lstStyle/>
-          <a:p>
-            <a:pPr algn="ctr"/>
-            <a:r>
-              <a:rPr sz="1550" dirty="0">
-                <a:solidFill>
-                  <a:srgbClr val="000000"/>
-                </a:solidFill>
-                <a:latin typeface="Times New Roman"/>
-              </a:rPr>
-              <a:t>HEMT</a:t>
-            </a:r>
-          </a:p>
-          <a:p>
-            <a:pPr algn="ctr"/>
-            <a:r>
-              <a:rPr sz="1550" dirty="0">
-                <a:solidFill>
-                  <a:srgbClr val="000000"/>
-                </a:solidFill>
-                <a:latin typeface="Times New Roman"/>
-              </a:rPr>
-              <a:t>+30dB</a:t>
-            </a:r>
-          </a:p>
-        </p:txBody>
-      </p:sp>
-      <p:sp>
-        <p:nvSpPr>
-          <p:cNvPr id="37" name="3 K -20 dB label"/>
-          <p:cNvSpPr txBox="1"/>
-          <p:nvPr/>
-        </p:nvSpPr>
-        <p:spPr>
-          <a:xfrm rot="16200000">
-            <a:off x="1390633" y="3689004"/>
-            <a:ext cx="528992" cy="253916"/>
-          </a:xfrm>
-          <a:prstGeom prst="rect">
-            <a:avLst/>
-          </a:prstGeom>
-          <a:noFill/>
-          <a:effectLst/>
-        </p:spPr>
-        <p:txBody>
-          <a:bodyPr wrap="none" lIns="0" tIns="0" rIns="0" bIns="0" anchor="ctr">
-            <a:spAutoFit/>
-          </a:bodyPr>
-          <a:lstStyle/>
-          <a:p>
-            <a:pPr algn="ctr"/>
-            <a:r>
-              <a:rPr sz="1650" dirty="0">
-                <a:solidFill>
-                  <a:srgbClr val="000000"/>
-                </a:solidFill>
-                <a:latin typeface="Times New Roman"/>
-              </a:rPr>
-              <a:t>-20dB</a:t>
-            </a:r>
-          </a:p>
-        </p:txBody>
-      </p:sp>
-      <p:sp>
-        <p:nvSpPr>
-          <p:cNvPr id="38" name="100 mK label"/>
-          <p:cNvSpPr txBox="1"/>
-          <p:nvPr/>
-        </p:nvSpPr>
-        <p:spPr>
-          <a:xfrm>
-            <a:off x="1006555" y="4824689"/>
-            <a:ext cx="654026" cy="261610"/>
-          </a:xfrm>
-          <a:prstGeom prst="rect">
-            <a:avLst/>
-          </a:prstGeom>
-          <a:noFill/>
-          <a:effectLst/>
-        </p:spPr>
-        <p:txBody>
-          <a:bodyPr wrap="none" lIns="0" tIns="0" rIns="0" bIns="0" anchor="ctr">
-            <a:spAutoFit/>
-          </a:bodyPr>
-          <a:lstStyle/>
-          <a:p>
-            <a:pPr algn="ctr"/>
-            <a:r>
-              <a:rPr sz="1700" dirty="0">
-                <a:solidFill>
-                  <a:srgbClr val="000000"/>
-                </a:solidFill>
-                <a:latin typeface="Times New Roman"/>
-              </a:rPr>
-              <a:t>100mK</a:t>
-            </a:r>
-          </a:p>
-        </p:txBody>
-      </p:sp>
-      <p:sp>
-        <p:nvSpPr>
-          <p:cNvPr id="40" name="100 mK -20 dB label"/>
-          <p:cNvSpPr txBox="1"/>
-          <p:nvPr/>
-        </p:nvSpPr>
-        <p:spPr>
-          <a:xfrm rot="16200000">
-            <a:off x="1395485" y="5265937"/>
-            <a:ext cx="528992" cy="253916"/>
-          </a:xfrm>
-          <a:prstGeom prst="rect">
-            <a:avLst/>
-          </a:prstGeom>
-          <a:noFill/>
-          <a:effectLst/>
-        </p:spPr>
-        <p:txBody>
-          <a:bodyPr wrap="none" lIns="0" tIns="0" rIns="0" bIns="0" anchor="ctr">
-            <a:spAutoFit/>
-          </a:bodyPr>
-          <a:lstStyle/>
-          <a:p>
-            <a:pPr algn="ctr"/>
-            <a:r>
-              <a:rPr sz="1650" dirty="0">
-                <a:solidFill>
-                  <a:srgbClr val="000000"/>
-                </a:solidFill>
-                <a:latin typeface="Times New Roman"/>
-              </a:rPr>
-              <a:t>-20dB</a:t>
-            </a:r>
-          </a:p>
-        </p:txBody>
-      </p:sp>
-      <p:sp>
-        <p:nvSpPr>
-          <p:cNvPr id="41" name="Samples label"/>
-          <p:cNvSpPr txBox="1"/>
-          <p:nvPr/>
-        </p:nvSpPr>
-        <p:spPr>
-          <a:xfrm>
-            <a:off x="870913" y="6142353"/>
-            <a:ext cx="870431" cy="369332"/>
-          </a:xfrm>
-          <a:prstGeom prst="rect">
-            <a:avLst/>
-          </a:prstGeom>
-          <a:noFill/>
-          <a:effectLst/>
-        </p:spPr>
-        <p:txBody>
-          <a:bodyPr wrap="none" lIns="0" tIns="0" rIns="0" bIns="0" anchor="ctr">
-            <a:spAutoFit/>
-          </a:bodyPr>
-          <a:lstStyle/>
-          <a:p>
-            <a:pPr algn="ctr"/>
-            <a:r>
-              <a:rPr lang="en-US" sz="2400" dirty="0">
+              <a:rPr lang="en-US" sz="2000" dirty="0">
                 <a:solidFill>
                   <a:srgbClr val="000000"/>
                 </a:solidFill>
@@ -5264,7 +5907,7 @@
               <a:t>s</a:t>
             </a:r>
             <a:r>
-              <a:rPr sz="2400" dirty="0">
+              <a:rPr sz="2000" dirty="0">
                 <a:solidFill>
                   <a:srgbClr val="000000"/>
                 </a:solidFill>
@@ -5277,46 +5920,100 @@
       </p:sp>
       <p:sp>
         <p:nvSpPr>
-          <p:cNvPr id="42" name="Cryoperm can label"/>
-          <p:cNvSpPr txBox="1"/>
+          <p:cNvPr id="23" name="room-temperature attenuator"/>
+          <p:cNvSpPr/>
           <p:nvPr/>
         </p:nvSpPr>
         <p:spPr>
           <a:xfrm>
-            <a:off x="1291568" y="7085776"/>
-            <a:ext cx="1022716" cy="215444"/>
-          </a:xfrm>
-          <a:prstGeom prst="rect">
+            <a:off x="1821391" y="1082252"/>
+            <a:ext cx="274320" cy="580644"/>
+          </a:xfrm>
+          <a:prstGeom prst="roundRect">
             <a:avLst/>
           </a:prstGeom>
-          <a:noFill/>
+          <a:solidFill>
+            <a:srgbClr val="0065D7"/>
+          </a:solidFill>
+          <a:ln w="40640">
+            <a:solidFill>
+              <a:srgbClr val="000000"/>
+            </a:solidFill>
+          </a:ln>
           <a:effectLst/>
         </p:spPr>
         <p:txBody>
-          <a:bodyPr wrap="none" lIns="0" tIns="0" rIns="0" bIns="0" anchor="ctr">
-            <a:spAutoFit/>
-          </a:bodyPr>
+          <a:bodyPr rtlCol="0" anchor="ctr"/>
           <a:lstStyle/>
           <a:p>
             <a:pPr algn="ctr"/>
-            <a:r>
-              <a:rPr lang="en-US" sz="1400" dirty="0" err="1">
-                <a:solidFill>
-                  <a:srgbClr val="000000"/>
-                </a:solidFill>
-                <a:latin typeface="Times New Roman"/>
-              </a:rPr>
-              <a:t>Cryoperm</a:t>
-            </a:r>
-            <a:r>
-              <a:rPr lang="en-US" sz="1400" dirty="0">
-                <a:solidFill>
-                  <a:srgbClr val="000000"/>
-                </a:solidFill>
-                <a:latin typeface="Times New Roman"/>
-              </a:rPr>
-              <a:t> can</a:t>
-            </a:r>
+            <a:endParaRPr/>
+          </a:p>
+        </p:txBody>
+      </p:sp>
+      <p:sp>
+        <p:nvSpPr>
+          <p:cNvPr id="25" name="3 K attenuator"/>
+          <p:cNvSpPr/>
+          <p:nvPr/>
+        </p:nvSpPr>
+        <p:spPr>
+          <a:xfrm>
+            <a:off x="1821391" y="3509017"/>
+            <a:ext cx="274320" cy="580644"/>
+          </a:xfrm>
+          <a:prstGeom prst="roundRect">
+            <a:avLst/>
+          </a:prstGeom>
+          <a:solidFill>
+            <a:srgbClr val="0065D7"/>
+          </a:solidFill>
+          <a:ln w="40640">
+            <a:solidFill>
+              <a:srgbClr val="000000"/>
+            </a:solidFill>
+          </a:ln>
+          <a:effectLst/>
+        </p:spPr>
+        <p:txBody>
+          <a:bodyPr rtlCol="0" anchor="ctr"/>
+          <a:lstStyle/>
+          <a:p>
+            <a:pPr algn="ctr"/>
+            <a:endParaRPr/>
+          </a:p>
+        </p:txBody>
+      </p:sp>
+      <p:sp>
+        <p:nvSpPr>
+          <p:cNvPr id="24" name="50 K attenuator"/>
+          <p:cNvSpPr/>
+          <p:nvPr/>
+        </p:nvSpPr>
+        <p:spPr>
+          <a:xfrm>
+            <a:off x="1821391" y="2218222"/>
+            <a:ext cx="274320" cy="580644"/>
+          </a:xfrm>
+          <a:prstGeom prst="roundRect">
+            <a:avLst/>
+          </a:prstGeom>
+          <a:solidFill>
+            <a:srgbClr val="0065D7"/>
+          </a:solidFill>
+          <a:ln w="40640">
+            <a:solidFill>
+              <a:srgbClr val="000000"/>
+            </a:solidFill>
+          </a:ln>
+          <a:effectLst/>
+        </p:spPr>
+        <p:txBody>
+          <a:bodyPr rtlCol="0" anchor="ctr"/>
+          <a:lstStyle/>
+          <a:p>
+            <a:pPr algn="ctr"/>
+            <a:endParaRPr/>
           </a:p>
         </p:txBody>
       </p:sp>
@@ -5375,7 +6072,7 @@
           <a:p>
             <a:pPr algn="ctr"/>
             <a:r>
-              <a:rPr lang="en-US" dirty="0">
+              <a:rPr lang="en-US" sz="1800" dirty="0">
                 <a:solidFill>
                   <a:srgbClr val="000000"/>
                 </a:solidFill>
@@ -5383,597 +6080,6 @@
               </a:rPr>
               <a:t>VNA</a:t>
             </a:r>
-          </a:p>
-        </p:txBody>
-      </p:sp>
-      <p:sp>
-        <p:nvSpPr>
-          <p:cNvPr id="52" name="TextBox 51">
-            <a:extLst>
-              <a:ext uri="{FF2B5EF4-FFF2-40B4-BE49-F238E27FC236}">
-                <a16:creationId xmlns:a16="http://schemas.microsoft.com/office/drawing/2014/main" id="{3A060945-B423-AC90-DEEA-8E6E4B717375}"/>
-              </a:ext>
-            </a:extLst>
-          </p:cNvPr>
-          <p:cNvSpPr txBox="1"/>
-          <p:nvPr/>
-        </p:nvSpPr>
-        <p:spPr>
-          <a:xfrm>
-            <a:off x="1020513" y="6719349"/>
-            <a:ext cx="1346200" cy="307777"/>
-          </a:xfrm>
-          <a:prstGeom prst="rect">
-            <a:avLst/>
-          </a:prstGeom>
-          <a:noFill/>
-        </p:spPr>
-        <p:txBody>
-          <a:bodyPr wrap="square">
-            <a:spAutoFit/>
-          </a:bodyPr>
-          <a:lstStyle/>
-          <a:p>
-            <a:pPr algn="ctr"/>
-            <a:r>
-              <a:rPr lang="en-US" sz="1400" dirty="0">
-                <a:solidFill>
-                  <a:srgbClr val="000000"/>
-                </a:solidFill>
-                <a:latin typeface="Times New Roman"/>
-              </a:rPr>
-              <a:t>Al package</a:t>
-            </a:r>
-          </a:p>
-        </p:txBody>
-      </p:sp>
-      <p:sp>
-        <p:nvSpPr>
-          <p:cNvPr id="54" name="Rectangle 53">
-            <a:extLst>
-              <a:ext uri="{FF2B5EF4-FFF2-40B4-BE49-F238E27FC236}">
-                <a16:creationId xmlns:a16="http://schemas.microsoft.com/office/drawing/2014/main" id="{65398C4F-EB0B-354D-1D29-34208C115C7C}"/>
-              </a:ext>
-            </a:extLst>
-          </p:cNvPr>
-          <p:cNvSpPr/>
-          <p:nvPr/>
-        </p:nvSpPr>
-        <p:spPr>
-          <a:xfrm>
-            <a:off x="30988" y="1884859"/>
-            <a:ext cx="2514600" cy="5617966"/>
-          </a:xfrm>
-          <a:prstGeom prst="rect">
-            <a:avLst/>
-          </a:prstGeom>
-          <a:noFill/>
-          <a:ln w="19050"/>
-        </p:spPr>
-        <p:style>
-          <a:lnRef idx="1">
-            <a:schemeClr val="accent1"/>
-          </a:lnRef>
-          <a:fillRef idx="3">
-            <a:schemeClr val="accent1"/>
-          </a:fillRef>
-          <a:effectRef idx="2">
-            <a:schemeClr val="accent1"/>
-          </a:effectRef>
-          <a:fontRef idx="minor">
-            <a:schemeClr val="lt1"/>
-          </a:fontRef>
-        </p:style>
-        <p:txBody>
-          <a:bodyPr rtlCol="0" anchor="ctr"/>
-          <a:lstStyle/>
-          <a:p>
-            <a:pPr algn="ctr"/>
-            <a:endParaRPr lang="en-US"/>
-          </a:p>
-        </p:txBody>
-      </p:sp>
-      <p:sp>
-        <p:nvSpPr>
-          <p:cNvPr id="56" name="TextBox 55">
-            <a:extLst>
-              <a:ext uri="{FF2B5EF4-FFF2-40B4-BE49-F238E27FC236}">
-                <a16:creationId xmlns:a16="http://schemas.microsoft.com/office/drawing/2014/main" id="{3B776951-7B78-9B27-6D00-28786E53CCA7}"/>
-              </a:ext>
-            </a:extLst>
-          </p:cNvPr>
-          <p:cNvSpPr txBox="1"/>
-          <p:nvPr/>
-        </p:nvSpPr>
-        <p:spPr>
-          <a:xfrm>
-            <a:off x="2874411" y="5282278"/>
-            <a:ext cx="1031365" cy="523220"/>
-          </a:xfrm>
-          <a:prstGeom prst="rect">
-            <a:avLst/>
-          </a:prstGeom>
-          <a:noFill/>
-        </p:spPr>
-        <p:txBody>
-          <a:bodyPr wrap="square">
-            <a:spAutoFit/>
-          </a:bodyPr>
-          <a:lstStyle/>
-          <a:p>
-            <a:pPr algn="ctr"/>
-            <a:r>
-              <a:rPr lang="en-US" sz="1400" dirty="0" err="1">
-                <a:solidFill>
-                  <a:srgbClr val="000000"/>
-                </a:solidFill>
-                <a:latin typeface="Times New Roman"/>
-              </a:rPr>
-              <a:t>Radiall</a:t>
-            </a:r>
-            <a:endParaRPr lang="en-US" sz="1400" dirty="0">
-              <a:solidFill>
-                <a:srgbClr val="000000"/>
-              </a:solidFill>
-              <a:latin typeface="Times New Roman"/>
-            </a:endParaRPr>
-          </a:p>
-          <a:p>
-            <a:pPr algn="ctr"/>
-            <a:r>
-              <a:rPr lang="en-US" sz="1400" dirty="0">
-                <a:solidFill>
-                  <a:srgbClr val="000000"/>
-                </a:solidFill>
-                <a:latin typeface="Times New Roman"/>
-              </a:rPr>
-              <a:t>switch</a:t>
-            </a:r>
-            <a:endParaRPr lang="en-US" sz="1400" dirty="0"/>
-          </a:p>
-        </p:txBody>
-      </p:sp>
-      <p:sp>
-        <p:nvSpPr>
-          <p:cNvPr id="5" name="NARDA amplifier triangle">
-            <a:extLst>
-              <a:ext uri="{FF2B5EF4-FFF2-40B4-BE49-F238E27FC236}">
-                <a16:creationId xmlns:a16="http://schemas.microsoft.com/office/drawing/2014/main" id="{861B304F-CDFB-F0E7-2356-7002C1F7EFCF}"/>
-              </a:ext>
-            </a:extLst>
-          </p:cNvPr>
-          <p:cNvSpPr/>
-          <p:nvPr/>
-        </p:nvSpPr>
-        <p:spPr>
-          <a:xfrm>
-            <a:off x="3038049" y="1001142"/>
-            <a:ext cx="704088" cy="644652"/>
-          </a:xfrm>
-          <a:prstGeom prst="triangle">
-            <a:avLst/>
-          </a:prstGeom>
-          <a:solidFill>
-            <a:srgbClr val="FF0000"/>
-          </a:solidFill>
-          <a:ln w="40640">
-            <a:solidFill>
-              <a:srgbClr val="000000"/>
-            </a:solidFill>
-          </a:ln>
-          <a:effectLst/>
-        </p:spPr>
-        <p:txBody>
-          <a:bodyPr rtlCol="0" anchor="ctr"/>
-          <a:lstStyle/>
-          <a:p>
-            <a:pPr algn="ctr"/>
-            <a:endParaRPr/>
-          </a:p>
-        </p:txBody>
-      </p:sp>
-      <p:sp>
-        <p:nvSpPr>
-          <p:cNvPr id="6" name="50 K attenuator">
-            <a:extLst>
-              <a:ext uri="{FF2B5EF4-FFF2-40B4-BE49-F238E27FC236}">
-                <a16:creationId xmlns:a16="http://schemas.microsoft.com/office/drawing/2014/main" id="{66E15EAB-571C-126F-B82F-AC7FEC60EA58}"/>
-              </a:ext>
-            </a:extLst>
-          </p:cNvPr>
-          <p:cNvSpPr/>
-          <p:nvPr/>
-        </p:nvSpPr>
-        <p:spPr>
-          <a:xfrm>
-            <a:off x="3252933" y="2230921"/>
-            <a:ext cx="274320" cy="580644"/>
-          </a:xfrm>
-          <a:prstGeom prst="roundRect">
-            <a:avLst/>
-          </a:prstGeom>
-          <a:solidFill>
-            <a:srgbClr val="0065D7"/>
-          </a:solidFill>
-          <a:ln w="40640">
-            <a:solidFill>
-              <a:srgbClr val="000000"/>
-            </a:solidFill>
-          </a:ln>
-          <a:effectLst/>
-        </p:spPr>
-        <p:txBody>
-          <a:bodyPr rtlCol="0" anchor="ctr"/>
-          <a:lstStyle/>
-          <a:p>
-            <a:pPr algn="ctr"/>
-            <a:endParaRPr/>
-          </a:p>
-        </p:txBody>
-      </p:sp>
-      <p:sp>
-        <p:nvSpPr>
-          <p:cNvPr id="9" name="Eccosorb filter block">
-            <a:extLst>
-              <a:ext uri="{FF2B5EF4-FFF2-40B4-BE49-F238E27FC236}">
-                <a16:creationId xmlns:a16="http://schemas.microsoft.com/office/drawing/2014/main" id="{D476E1E8-7006-54A9-0E63-5419CD305215}"/>
-              </a:ext>
-            </a:extLst>
-          </p:cNvPr>
-          <p:cNvSpPr/>
-          <p:nvPr/>
-        </p:nvSpPr>
-        <p:spPr>
-          <a:xfrm>
-            <a:off x="3250647" y="3470148"/>
-            <a:ext cx="278892" cy="603504"/>
-          </a:xfrm>
-          <a:prstGeom prst="roundRect">
-            <a:avLst/>
-          </a:prstGeom>
-          <a:solidFill>
-            <a:srgbClr val="FFCD00"/>
-          </a:solidFill>
-          <a:ln w="40640">
-            <a:solidFill>
-              <a:srgbClr val="000000"/>
-            </a:solidFill>
-          </a:ln>
-          <a:effectLst/>
-        </p:spPr>
-        <p:txBody>
-          <a:bodyPr rtlCol="0" anchor="ctr"/>
-          <a:lstStyle/>
-          <a:p>
-            <a:pPr algn="ctr"/>
-            <a:endParaRPr/>
-          </a:p>
-        </p:txBody>
-      </p:sp>
-      <p:sp>
-        <p:nvSpPr>
-          <p:cNvPr id="12" name="Eccosorb label">
-            <a:extLst>
-              <a:ext uri="{FF2B5EF4-FFF2-40B4-BE49-F238E27FC236}">
-                <a16:creationId xmlns:a16="http://schemas.microsoft.com/office/drawing/2014/main" id="{29C73919-C3A8-DF81-4156-24C90EA34F46}"/>
-              </a:ext>
-            </a:extLst>
-          </p:cNvPr>
-          <p:cNvSpPr txBox="1"/>
-          <p:nvPr/>
-        </p:nvSpPr>
-        <p:spPr>
-          <a:xfrm>
-            <a:off x="2950870" y="4139775"/>
-            <a:ext cx="878447" cy="400110"/>
-          </a:xfrm>
-          <a:prstGeom prst="rect">
-            <a:avLst/>
-          </a:prstGeom>
-          <a:noFill/>
-          <a:effectLst/>
-        </p:spPr>
-        <p:txBody>
-          <a:bodyPr wrap="none" lIns="0" tIns="0" rIns="0" bIns="0" anchor="ctr">
-            <a:spAutoFit/>
-          </a:bodyPr>
-          <a:lstStyle/>
-          <a:p>
-            <a:pPr algn="ctr"/>
-            <a:r>
-              <a:rPr lang="en-US" sz="1300" dirty="0">
-                <a:solidFill>
-                  <a:srgbClr val="000000"/>
-                </a:solidFill>
-                <a:latin typeface="Times New Roman"/>
-              </a:rPr>
-              <a:t>ECCOSORB</a:t>
-            </a:r>
-          </a:p>
-          <a:p>
-            <a:pPr algn="ctr"/>
-            <a:r>
-              <a:rPr lang="en-US" sz="1300" dirty="0">
-                <a:solidFill>
-                  <a:srgbClr val="000000"/>
-                </a:solidFill>
-                <a:latin typeface="Times New Roman"/>
-              </a:rPr>
-              <a:t>filter</a:t>
-            </a:r>
-            <a:endParaRPr sz="1300" dirty="0">
-              <a:solidFill>
-                <a:srgbClr val="000000"/>
-              </a:solidFill>
-              <a:latin typeface="Times New Roman"/>
-            </a:endParaRPr>
-          </a:p>
-        </p:txBody>
-      </p:sp>
-      <p:sp>
-        <p:nvSpPr>
-          <p:cNvPr id="13" name="Eccosorb label">
-            <a:extLst>
-              <a:ext uri="{FF2B5EF4-FFF2-40B4-BE49-F238E27FC236}">
-                <a16:creationId xmlns:a16="http://schemas.microsoft.com/office/drawing/2014/main" id="{459E6D6A-A2CD-8561-1D60-555FEE11509D}"/>
-              </a:ext>
-            </a:extLst>
-          </p:cNvPr>
-          <p:cNvSpPr txBox="1"/>
-          <p:nvPr/>
-        </p:nvSpPr>
-        <p:spPr>
-          <a:xfrm>
-            <a:off x="3056669" y="2883120"/>
-            <a:ext cx="666849" cy="200055"/>
-          </a:xfrm>
-          <a:prstGeom prst="rect">
-            <a:avLst/>
-          </a:prstGeom>
-          <a:noFill/>
-          <a:effectLst/>
-        </p:spPr>
-        <p:txBody>
-          <a:bodyPr wrap="none" lIns="0" tIns="0" rIns="0" bIns="0" anchor="ctr">
-            <a:spAutoFit/>
-          </a:bodyPr>
-          <a:lstStyle/>
-          <a:p>
-            <a:pPr algn="ctr"/>
-            <a:r>
-              <a:rPr lang="en-US" sz="1300" dirty="0">
-                <a:solidFill>
-                  <a:srgbClr val="000000"/>
-                </a:solidFill>
-                <a:latin typeface="Times New Roman"/>
-              </a:rPr>
-              <a:t>attenuator</a:t>
-            </a:r>
-            <a:endParaRPr sz="1300" dirty="0">
-              <a:solidFill>
-                <a:srgbClr val="000000"/>
-              </a:solidFill>
-              <a:latin typeface="Times New Roman"/>
-            </a:endParaRPr>
-          </a:p>
-        </p:txBody>
-      </p:sp>
-      <p:sp>
-        <p:nvSpPr>
-          <p:cNvPr id="14" name="Eccosorb label">
-            <a:extLst>
-              <a:ext uri="{FF2B5EF4-FFF2-40B4-BE49-F238E27FC236}">
-                <a16:creationId xmlns:a16="http://schemas.microsoft.com/office/drawing/2014/main" id="{B742671C-DFED-3098-26DA-76095DFA27FC}"/>
-              </a:ext>
-            </a:extLst>
-          </p:cNvPr>
-          <p:cNvSpPr txBox="1"/>
-          <p:nvPr/>
-        </p:nvSpPr>
-        <p:spPr>
-          <a:xfrm>
-            <a:off x="3083920" y="1701726"/>
-            <a:ext cx="612347" cy="200055"/>
-          </a:xfrm>
-          <a:prstGeom prst="rect">
-            <a:avLst/>
-          </a:prstGeom>
-          <a:noFill/>
-          <a:effectLst/>
-        </p:spPr>
-        <p:txBody>
-          <a:bodyPr wrap="none" lIns="0" tIns="0" rIns="0" bIns="0" anchor="ctr">
-            <a:spAutoFit/>
-          </a:bodyPr>
-          <a:lstStyle/>
-          <a:p>
-            <a:pPr algn="ctr"/>
-            <a:r>
-              <a:rPr lang="en-US" sz="1300" dirty="0">
-                <a:solidFill>
-                  <a:srgbClr val="000000"/>
-                </a:solidFill>
-                <a:latin typeface="Times New Roman"/>
-              </a:rPr>
-              <a:t>amplifier</a:t>
-            </a:r>
-            <a:endParaRPr sz="1300" dirty="0">
-              <a:solidFill>
-                <a:srgbClr val="000000"/>
-              </a:solidFill>
-              <a:latin typeface="Times New Roman"/>
-            </a:endParaRPr>
-          </a:p>
-        </p:txBody>
-      </p:sp>
-      <p:cxnSp>
-        <p:nvCxnSpPr>
-          <p:cNvPr id="50" name="output coax vertical">
-            <a:extLst>
-              <a:ext uri="{FF2B5EF4-FFF2-40B4-BE49-F238E27FC236}">
-                <a16:creationId xmlns:a16="http://schemas.microsoft.com/office/drawing/2014/main" id="{6E813ABB-43EE-8E2A-E3B4-6EC613F05C10}"/>
-              </a:ext>
-            </a:extLst>
-          </p:cNvPr>
-          <p:cNvCxnSpPr>
-            <a:cxnSpLocks/>
-          </p:cNvCxnSpPr>
-          <p:nvPr/>
-        </p:nvCxnSpPr>
-        <p:spPr>
-          <a:xfrm flipH="1">
-            <a:off x="3354530" y="4762854"/>
-            <a:ext cx="2807" cy="168033"/>
-          </a:xfrm>
-          <a:prstGeom prst="line">
-            <a:avLst/>
-          </a:prstGeom>
-          <a:ln w="68580">
-            <a:solidFill>
-              <a:srgbClr val="000000"/>
-            </a:solidFill>
-          </a:ln>
-          <a:effectLst/>
-        </p:spPr>
-      </p:cxnSp>
-      <p:cxnSp>
-        <p:nvCxnSpPr>
-          <p:cNvPr id="51" name="HEMT output bend">
-            <a:extLst>
-              <a:ext uri="{FF2B5EF4-FFF2-40B4-BE49-F238E27FC236}">
-                <a16:creationId xmlns:a16="http://schemas.microsoft.com/office/drawing/2014/main" id="{6B5EC015-9D1E-2F78-F5D5-C78A4C5297B8}"/>
-              </a:ext>
-            </a:extLst>
-          </p:cNvPr>
-          <p:cNvCxnSpPr>
-            <a:cxnSpLocks/>
-          </p:cNvCxnSpPr>
-          <p:nvPr/>
-        </p:nvCxnSpPr>
-        <p:spPr>
-          <a:xfrm flipH="1">
-            <a:off x="3183937" y="4917135"/>
-            <a:ext cx="173390" cy="279227"/>
-          </a:xfrm>
-          <a:prstGeom prst="line">
-            <a:avLst/>
-          </a:prstGeom>
-          <a:ln w="68580">
-            <a:solidFill>
-              <a:srgbClr val="000000"/>
-            </a:solidFill>
-          </a:ln>
-          <a:effectLst/>
-        </p:spPr>
-      </p:cxnSp>
-      <p:sp>
-        <p:nvSpPr>
-          <p:cNvPr id="53" name="wire bond node left">
-            <a:extLst>
-              <a:ext uri="{FF2B5EF4-FFF2-40B4-BE49-F238E27FC236}">
-                <a16:creationId xmlns:a16="http://schemas.microsoft.com/office/drawing/2014/main" id="{9C4089C5-22FE-3D9C-27E7-E3C51D1874FE}"/>
-              </a:ext>
-            </a:extLst>
-          </p:cNvPr>
-          <p:cNvSpPr/>
-          <p:nvPr/>
-        </p:nvSpPr>
-        <p:spPr>
-          <a:xfrm>
-            <a:off x="3143461" y="5071464"/>
-            <a:ext cx="146304" cy="146304"/>
-          </a:xfrm>
-          <a:prstGeom prst="ellipse">
-            <a:avLst/>
-          </a:prstGeom>
-          <a:solidFill>
-            <a:srgbClr val="000000"/>
-          </a:solidFill>
-          <a:ln>
-            <a:noFill/>
-          </a:ln>
-          <a:effectLst/>
-        </p:spPr>
-        <p:txBody>
-          <a:bodyPr rtlCol="0" anchor="ctr"/>
-          <a:lstStyle/>
-          <a:p>
-            <a:pPr algn="ctr"/>
-            <a:endParaRPr/>
-          </a:p>
-        </p:txBody>
-      </p:sp>
-      <p:sp>
-        <p:nvSpPr>
-          <p:cNvPr id="55" name="wire bond node center">
-            <a:extLst>
-              <a:ext uri="{FF2B5EF4-FFF2-40B4-BE49-F238E27FC236}">
-                <a16:creationId xmlns:a16="http://schemas.microsoft.com/office/drawing/2014/main" id="{7A366CA6-7374-5992-9EFF-A5D9EA455F68}"/>
-              </a:ext>
-            </a:extLst>
-          </p:cNvPr>
-          <p:cNvSpPr/>
-          <p:nvPr/>
-        </p:nvSpPr>
-        <p:spPr>
-          <a:xfrm>
-            <a:off x="3311903" y="5073292"/>
-            <a:ext cx="146304" cy="146304"/>
-          </a:xfrm>
-          <a:prstGeom prst="ellipse">
-            <a:avLst/>
-          </a:prstGeom>
-          <a:solidFill>
-            <a:srgbClr val="000000"/>
-          </a:solidFill>
-          <a:ln>
-            <a:noFill/>
-          </a:ln>
-          <a:effectLst/>
-        </p:spPr>
-        <p:txBody>
-          <a:bodyPr rtlCol="0" anchor="ctr"/>
-          <a:lstStyle/>
-          <a:p>
-            <a:pPr algn="ctr"/>
-            <a:endParaRPr/>
-          </a:p>
-        </p:txBody>
-      </p:sp>
-      <p:sp>
-        <p:nvSpPr>
-          <p:cNvPr id="57" name="wire bond node right">
-            <a:extLst>
-              <a:ext uri="{FF2B5EF4-FFF2-40B4-BE49-F238E27FC236}">
-                <a16:creationId xmlns:a16="http://schemas.microsoft.com/office/drawing/2014/main" id="{DFE149B0-7914-9776-C40E-B06E1741D9B6}"/>
-              </a:ext>
-            </a:extLst>
-          </p:cNvPr>
-          <p:cNvSpPr/>
-          <p:nvPr/>
-        </p:nvSpPr>
-        <p:spPr>
-          <a:xfrm>
-            <a:off x="3494419" y="5076055"/>
-            <a:ext cx="146304" cy="146304"/>
-          </a:xfrm>
-          <a:prstGeom prst="ellipse">
-            <a:avLst/>
-          </a:prstGeom>
-          <a:solidFill>
-            <a:srgbClr val="000000"/>
-          </a:solidFill>
-          <a:ln>
-            <a:noFill/>
-          </a:ln>
-          <a:effectLst/>
-        </p:spPr>
-        <p:txBody>
-          <a:bodyPr rtlCol="0" anchor="ctr"/>
-          <a:lstStyle/>
-          <a:p>
-            <a:pPr algn="ctr"/>
-            <a:endParaRPr/>
           </a:p>
         </p:txBody>
       </p:sp>
